--- a/docs/people10_poc.pptx
+++ b/docs/people10_poc.pptx
@@ -1569,7 +1569,7 @@
     <p:bg>
       <p:bgPr>
         <a:solidFill>
-          <a:srgbClr val="0F2A52"/>
+          <a:srgbClr val="0A1F3D"/>
         </a:solidFill>
       </p:bgPr>
     </p:bg>
@@ -1615,8 +1615,8 @@
         </p:nvSpPr>
         <p:spPr>
           <a:xfrm>
-            <a:off x="548640" y="1463040"/>
-            <a:ext cx="6949440" cy="1280160"/>
+            <a:off x="548640" y="1005840"/>
+            <a:ext cx="6949440" cy="320040"/>
           </a:xfrm>
           <a:prstGeom prst="rect">
             <a:avLst/>
@@ -1632,13 +1632,52 @@
               <a:buNone/>
             </a:pPr>
             <a:r>
+              <a:rPr lang="en-US" sz="1100" b="1" spc="400" kern="0" dirty="0">
+                <a:solidFill>
+                  <a:srgbClr val="DEECF9"/>
+                </a:solidFill>
+                <a:latin typeface="Segoe UI" pitchFamily="34" charset="0"/>
+                <a:ea typeface="Segoe UI" pitchFamily="34" charset="-122"/>
+                <a:cs typeface="Segoe UI" pitchFamily="34" charset="-120"/>
+              </a:rPr>
+              <a:t>PEOPLE10 SOLUTIONS LAB · 3-DAY TAKE-HOME</a:t>
+            </a:r>
+            <a:endParaRPr lang="en-US" sz="1100" dirty="0"/>
+          </a:p>
+        </p:txBody>
+      </p:sp>
+      <p:sp>
+        <p:nvSpPr>
+          <p:cNvPr id="4" name="Text 2"/>
+          <p:cNvSpPr/>
+          <p:nvPr/>
+        </p:nvSpPr>
+        <p:spPr>
+          <a:xfrm>
+            <a:off x="548640" y="1371600"/>
+            <a:ext cx="6949440" cy="1371600"/>
+          </a:xfrm>
+          <a:prstGeom prst="rect">
+            <a:avLst/>
+          </a:prstGeom>
+          <a:noFill/>
+          <a:ln/>
+        </p:spPr>
+        <p:txBody>
+          <a:bodyPr wrap="square" lIns="0" tIns="0" rIns="0" bIns="0" rtlCol="0" anchor="ctr"/>
+          <a:lstStyle/>
+          <a:p>
+            <a:pPr indent="0" marL="0">
+              <a:buNone/>
+            </a:pPr>
+            <a:r>
               <a:rPr lang="en-US" sz="4000" b="1" dirty="0">
                 <a:solidFill>
                   <a:srgbClr val="FFFFFF"/>
                 </a:solidFill>
-                <a:latin typeface="Calibri" pitchFamily="34" charset="0"/>
-                <a:ea typeface="Calibri" pitchFamily="34" charset="-122"/>
-                <a:cs typeface="Calibri" pitchFamily="34" charset="-120"/>
+                <a:latin typeface="Segoe UI" pitchFamily="34" charset="0"/>
+                <a:ea typeface="Segoe UI" pitchFamily="34" charset="-122"/>
+                <a:cs typeface="Segoe UI" pitchFamily="34" charset="-120"/>
               </a:rPr>
               <a:t>Cloud-Native Data Platform on Azure</a:t>
             </a:r>
@@ -1648,13 +1687,13 @@
       </p:sp>
       <p:sp>
         <p:nvSpPr>
-          <p:cNvPr id="4" name="Text 2"/>
-          <p:cNvSpPr/>
-          <p:nvPr/>
-        </p:nvSpPr>
-        <p:spPr>
-          <a:xfrm>
-            <a:off x="548640" y="2788920"/>
+          <p:cNvPr id="5" name="Text 3"/>
+          <p:cNvSpPr/>
+          <p:nvPr/>
+        </p:nvSpPr>
+        <p:spPr>
+          <a:xfrm>
+            <a:off x="548640" y="2834640"/>
             <a:ext cx="6949440" cy="457200"/>
           </a:xfrm>
           <a:prstGeom prst="rect">
@@ -1673,13 +1712,13 @@
             <a:r>
               <a:rPr lang="en-US" sz="1800" dirty="0">
                 <a:solidFill>
-                  <a:srgbClr val="CFE3F8"/>
-                </a:solidFill>
-                <a:latin typeface="Calibri" pitchFamily="34" charset="0"/>
-                <a:ea typeface="Calibri" pitchFamily="34" charset="-122"/>
-                <a:cs typeface="Calibri" pitchFamily="34" charset="-120"/>
-              </a:rPr>
-              <a:t>People10 Solutions Lab — 3-day take-home</a:t>
+                  <a:srgbClr val="DEECF9"/>
+                </a:solidFill>
+                <a:latin typeface="Segoe UI" pitchFamily="34" charset="0"/>
+                <a:ea typeface="Segoe UI" pitchFamily="34" charset="-122"/>
+                <a:cs typeface="Segoe UI" pitchFamily="34" charset="-120"/>
+              </a:rPr>
+              <a:t>Unifying streaming and batch on a Databricks Lakehouse</a:t>
             </a:r>
             <a:endParaRPr lang="en-US" sz="1800" dirty="0"/>
           </a:p>
@@ -1687,13 +1726,33 @@
       </p:sp>
       <p:sp>
         <p:nvSpPr>
-          <p:cNvPr id="5" name="Text 3"/>
-          <p:cNvSpPr/>
-          <p:nvPr/>
-        </p:nvSpPr>
-        <p:spPr>
-          <a:xfrm>
-            <a:off x="548640" y="4160520"/>
+          <p:cNvPr id="6" name="Shape 4"/>
+          <p:cNvSpPr/>
+          <p:nvPr/>
+        </p:nvSpPr>
+        <p:spPr>
+          <a:xfrm>
+            <a:off x="548640" y="3840480"/>
+            <a:ext cx="365760" cy="36576"/>
+          </a:xfrm>
+          <a:prstGeom prst="rect">
+            <a:avLst/>
+          </a:prstGeom>
+          <a:solidFill>
+            <a:srgbClr val="0078D4"/>
+          </a:solidFill>
+          <a:ln/>
+        </p:spPr>
+      </p:sp>
+      <p:sp>
+        <p:nvSpPr>
+          <p:cNvPr id="7" name="Text 5"/>
+          <p:cNvSpPr/>
+          <p:nvPr/>
+        </p:nvSpPr>
+        <p:spPr>
+          <a:xfrm>
+            <a:off x="548640" y="3931920"/>
             <a:ext cx="6949440" cy="365760"/>
           </a:xfrm>
           <a:prstGeom prst="rect">
@@ -1710,30 +1769,69 @@
               <a:buNone/>
             </a:pPr>
             <a:r>
-              <a:rPr lang="en-US" sz="1400" i="1" dirty="0">
+              <a:rPr lang="en-US" sz="1600" b="1" dirty="0">
                 <a:solidFill>
                   <a:srgbClr val="FFFFFF"/>
                 </a:solidFill>
-                <a:latin typeface="Calibri" pitchFamily="34" charset="0"/>
-                <a:ea typeface="Calibri" pitchFamily="34" charset="-122"/>
-                <a:cs typeface="Calibri" pitchFamily="34" charset="-120"/>
+                <a:latin typeface="Segoe UI" pitchFamily="34" charset="0"/>
+                <a:ea typeface="Segoe UI" pitchFamily="34" charset="-122"/>
+                <a:cs typeface="Segoe UI" pitchFamily="34" charset="-120"/>
               </a:rPr>
               <a:t>Malappa</a:t>
             </a:r>
-            <a:endParaRPr lang="en-US" sz="1400" dirty="0"/>
-          </a:p>
-        </p:txBody>
-      </p:sp>
-      <p:sp>
-        <p:nvSpPr>
-          <p:cNvPr id="6" name="Shape 4"/>
-          <p:cNvSpPr/>
-          <p:nvPr/>
-        </p:nvSpPr>
-        <p:spPr>
-          <a:xfrm>
-            <a:off x="548640" y="4572000"/>
-            <a:ext cx="1097280" cy="329184"/>
+            <a:endParaRPr lang="en-US" sz="1600" dirty="0"/>
+          </a:p>
+        </p:txBody>
+      </p:sp>
+      <p:sp>
+        <p:nvSpPr>
+          <p:cNvPr id="8" name="Text 6"/>
+          <p:cNvSpPr/>
+          <p:nvPr/>
+        </p:nvSpPr>
+        <p:spPr>
+          <a:xfrm>
+            <a:off x="548640" y="4251960"/>
+            <a:ext cx="6949440" cy="320040"/>
+          </a:xfrm>
+          <a:prstGeom prst="rect">
+            <a:avLst/>
+          </a:prstGeom>
+          <a:noFill/>
+          <a:ln/>
+        </p:spPr>
+        <p:txBody>
+          <a:bodyPr wrap="square" lIns="0" tIns="0" rIns="0" bIns="0" rtlCol="0" anchor="ctr"/>
+          <a:lstStyle/>
+          <a:p>
+            <a:pPr indent="0" marL="0">
+              <a:buNone/>
+            </a:pPr>
+            <a:r>
+              <a:rPr lang="en-US" sz="1200" dirty="0">
+                <a:solidFill>
+                  <a:srgbClr val="8FB6DA"/>
+                </a:solidFill>
+                <a:latin typeface="Segoe UI" pitchFamily="34" charset="0"/>
+                <a:ea typeface="Segoe UI" pitchFamily="34" charset="-122"/>
+                <a:cs typeface="Segoe UI" pitchFamily="34" charset="-120"/>
+              </a:rPr>
+              <a:t>github.com/malappa2304/people10_usecase</a:t>
+            </a:r>
+            <a:endParaRPr lang="en-US" sz="1200" dirty="0"/>
+          </a:p>
+        </p:txBody>
+      </p:sp>
+      <p:sp>
+        <p:nvSpPr>
+          <p:cNvPr id="9" name="Shape 7"/>
+          <p:cNvSpPr/>
+          <p:nvPr/>
+        </p:nvSpPr>
+        <p:spPr>
+          <a:xfrm>
+            <a:off x="548640" y="4663440"/>
+            <a:ext cx="1234440" cy="329184"/>
           </a:xfrm>
           <a:prstGeom prst="roundRect">
             <a:avLst>
@@ -1742,12 +1840,12 @@
           </a:prstGeom>
           <a:solidFill>
             <a:srgbClr val="FFFFFF">
-              <a:alpha val="20000"/>
+              <a:alpha val="15000"/>
             </a:srgbClr>
           </a:solidFill>
-          <a:ln w="9525">
+          <a:ln w="6350">
             <a:solidFill>
-              <a:srgbClr val="FFFFFF"/>
+              <a:srgbClr val="DEECF9"/>
             </a:solidFill>
             <a:prstDash val="solid"/>
           </a:ln>
@@ -1755,14 +1853,14 @@
       </p:sp>
       <p:sp>
         <p:nvSpPr>
-          <p:cNvPr id="7" name="Text 5"/>
-          <p:cNvSpPr/>
-          <p:nvPr/>
-        </p:nvSpPr>
-        <p:spPr>
-          <a:xfrm>
-            <a:off x="548640" y="4572000"/>
-            <a:ext cx="1097280" cy="329184"/>
+          <p:cNvPr id="10" name="Text 8"/>
+          <p:cNvSpPr/>
+          <p:nvPr/>
+        </p:nvSpPr>
+        <p:spPr>
+          <a:xfrm>
+            <a:off x="548640" y="4663440"/>
+            <a:ext cx="1234440" cy="329184"/>
           </a:xfrm>
           <a:prstGeom prst="rect">
             <a:avLst/>
@@ -1782,9 +1880,9 @@
                 <a:solidFill>
                   <a:srgbClr val="FFFFFF"/>
                 </a:solidFill>
-                <a:latin typeface="Calibri" pitchFamily="34" charset="0"/>
-                <a:ea typeface="Calibri" pitchFamily="34" charset="-122"/>
-                <a:cs typeface="Calibri" pitchFamily="34" charset="-120"/>
+                <a:latin typeface="Segoe UI" pitchFamily="34" charset="0"/>
+                <a:ea typeface="Segoe UI" pitchFamily="34" charset="-122"/>
+                <a:cs typeface="Segoe UI" pitchFamily="34" charset="-120"/>
               </a:rPr>
               <a:t>ADLS Gen2</a:t>
             </a:r>
@@ -1794,14 +1892,14 @@
       </p:sp>
       <p:sp>
         <p:nvSpPr>
-          <p:cNvPr id="8" name="Shape 6"/>
-          <p:cNvSpPr/>
-          <p:nvPr/>
-        </p:nvSpPr>
-        <p:spPr>
-          <a:xfrm>
-            <a:off x="1755648" y="4572000"/>
-            <a:ext cx="1097280" cy="329184"/>
+          <p:cNvPr id="11" name="Shape 9"/>
+          <p:cNvSpPr/>
+          <p:nvPr/>
+        </p:nvSpPr>
+        <p:spPr>
+          <a:xfrm>
+            <a:off x="1920240" y="4663440"/>
+            <a:ext cx="1234440" cy="329184"/>
           </a:xfrm>
           <a:prstGeom prst="roundRect">
             <a:avLst>
@@ -1810,12 +1908,12 @@
           </a:prstGeom>
           <a:solidFill>
             <a:srgbClr val="FFFFFF">
-              <a:alpha val="20000"/>
+              <a:alpha val="15000"/>
             </a:srgbClr>
           </a:solidFill>
-          <a:ln w="9525">
+          <a:ln w="6350">
             <a:solidFill>
-              <a:srgbClr val="FFFFFF"/>
+              <a:srgbClr val="DEECF9"/>
             </a:solidFill>
             <a:prstDash val="solid"/>
           </a:ln>
@@ -1823,14 +1921,14 @@
       </p:sp>
       <p:sp>
         <p:nvSpPr>
-          <p:cNvPr id="9" name="Text 7"/>
-          <p:cNvSpPr/>
-          <p:nvPr/>
-        </p:nvSpPr>
-        <p:spPr>
-          <a:xfrm>
-            <a:off x="1755648" y="4572000"/>
-            <a:ext cx="1097280" cy="329184"/>
+          <p:cNvPr id="12" name="Text 10"/>
+          <p:cNvSpPr/>
+          <p:nvPr/>
+        </p:nvSpPr>
+        <p:spPr>
+          <a:xfrm>
+            <a:off x="1920240" y="4663440"/>
+            <a:ext cx="1234440" cy="329184"/>
           </a:xfrm>
           <a:prstGeom prst="rect">
             <a:avLst/>
@@ -1850,9 +1948,9 @@
                 <a:solidFill>
                   <a:srgbClr val="FFFFFF"/>
                 </a:solidFill>
-                <a:latin typeface="Calibri" pitchFamily="34" charset="0"/>
-                <a:ea typeface="Calibri" pitchFamily="34" charset="-122"/>
-                <a:cs typeface="Calibri" pitchFamily="34" charset="-120"/>
+                <a:latin typeface="Segoe UI" pitchFamily="34" charset="0"/>
+                <a:ea typeface="Segoe UI" pitchFamily="34" charset="-122"/>
+                <a:cs typeface="Segoe UI" pitchFamily="34" charset="-120"/>
               </a:rPr>
               <a:t>Databricks</a:t>
             </a:r>
@@ -1862,14 +1960,14 @@
       </p:sp>
       <p:sp>
         <p:nvSpPr>
-          <p:cNvPr id="10" name="Shape 8"/>
-          <p:cNvSpPr/>
-          <p:nvPr/>
-        </p:nvSpPr>
-        <p:spPr>
-          <a:xfrm>
-            <a:off x="2962656" y="4572000"/>
-            <a:ext cx="1097280" cy="329184"/>
+          <p:cNvPr id="13" name="Shape 11"/>
+          <p:cNvSpPr/>
+          <p:nvPr/>
+        </p:nvSpPr>
+        <p:spPr>
+          <a:xfrm>
+            <a:off x="3291840" y="4663440"/>
+            <a:ext cx="1234440" cy="329184"/>
           </a:xfrm>
           <a:prstGeom prst="roundRect">
             <a:avLst>
@@ -1878,12 +1976,12 @@
           </a:prstGeom>
           <a:solidFill>
             <a:srgbClr val="FFFFFF">
-              <a:alpha val="20000"/>
+              <a:alpha val="15000"/>
             </a:srgbClr>
           </a:solidFill>
-          <a:ln w="9525">
+          <a:ln w="6350">
             <a:solidFill>
-              <a:srgbClr val="FFFFFF"/>
+              <a:srgbClr val="DEECF9"/>
             </a:solidFill>
             <a:prstDash val="solid"/>
           </a:ln>
@@ -1891,14 +1989,14 @@
       </p:sp>
       <p:sp>
         <p:nvSpPr>
-          <p:cNvPr id="11" name="Text 9"/>
-          <p:cNvSpPr/>
-          <p:nvPr/>
-        </p:nvSpPr>
-        <p:spPr>
-          <a:xfrm>
-            <a:off x="2962656" y="4572000"/>
-            <a:ext cx="1097280" cy="329184"/>
+          <p:cNvPr id="14" name="Text 12"/>
+          <p:cNvSpPr/>
+          <p:nvPr/>
+        </p:nvSpPr>
+        <p:spPr>
+          <a:xfrm>
+            <a:off x="3291840" y="4663440"/>
+            <a:ext cx="1234440" cy="329184"/>
           </a:xfrm>
           <a:prstGeom prst="rect">
             <a:avLst/>
@@ -1918,9 +2016,9 @@
                 <a:solidFill>
                   <a:srgbClr val="FFFFFF"/>
                 </a:solidFill>
-                <a:latin typeface="Calibri" pitchFamily="34" charset="0"/>
-                <a:ea typeface="Calibri" pitchFamily="34" charset="-122"/>
-                <a:cs typeface="Calibri" pitchFamily="34" charset="-120"/>
+                <a:latin typeface="Segoe UI" pitchFamily="34" charset="0"/>
+                <a:ea typeface="Segoe UI" pitchFamily="34" charset="-122"/>
+                <a:cs typeface="Segoe UI" pitchFamily="34" charset="-120"/>
               </a:rPr>
               <a:t>Delta Lake</a:t>
             </a:r>
@@ -1930,14 +2028,14 @@
       </p:sp>
       <p:sp>
         <p:nvSpPr>
-          <p:cNvPr id="12" name="Shape 10"/>
-          <p:cNvSpPr/>
-          <p:nvPr/>
-        </p:nvSpPr>
-        <p:spPr>
-          <a:xfrm>
-            <a:off x="4169664" y="4572000"/>
-            <a:ext cx="1097280" cy="329184"/>
+          <p:cNvPr id="15" name="Shape 13"/>
+          <p:cNvSpPr/>
+          <p:nvPr/>
+        </p:nvSpPr>
+        <p:spPr>
+          <a:xfrm>
+            <a:off x="4663440" y="4663440"/>
+            <a:ext cx="1234440" cy="329184"/>
           </a:xfrm>
           <a:prstGeom prst="roundRect">
             <a:avLst>
@@ -1946,12 +2044,12 @@
           </a:prstGeom>
           <a:solidFill>
             <a:srgbClr val="FFFFFF">
-              <a:alpha val="20000"/>
+              <a:alpha val="15000"/>
             </a:srgbClr>
           </a:solidFill>
-          <a:ln w="9525">
+          <a:ln w="6350">
             <a:solidFill>
-              <a:srgbClr val="FFFFFF"/>
+              <a:srgbClr val="DEECF9"/>
             </a:solidFill>
             <a:prstDash val="solid"/>
           </a:ln>
@@ -1959,14 +2057,14 @@
       </p:sp>
       <p:sp>
         <p:nvSpPr>
-          <p:cNvPr id="13" name="Text 11"/>
-          <p:cNvSpPr/>
-          <p:nvPr/>
-        </p:nvSpPr>
-        <p:spPr>
-          <a:xfrm>
-            <a:off x="4169664" y="4572000"/>
-            <a:ext cx="1097280" cy="329184"/>
+          <p:cNvPr id="16" name="Text 14"/>
+          <p:cNvSpPr/>
+          <p:nvPr/>
+        </p:nvSpPr>
+        <p:spPr>
+          <a:xfrm>
+            <a:off x="4663440" y="4663440"/>
+            <a:ext cx="1234440" cy="329184"/>
           </a:xfrm>
           <a:prstGeom prst="rect">
             <a:avLst/>
@@ -1986,9 +2084,9 @@
                 <a:solidFill>
                   <a:srgbClr val="FFFFFF"/>
                 </a:solidFill>
-                <a:latin typeface="Calibri" pitchFamily="34" charset="0"/>
-                <a:ea typeface="Calibri" pitchFamily="34" charset="-122"/>
-                <a:cs typeface="Calibri" pitchFamily="34" charset="-120"/>
+                <a:latin typeface="Segoe UI" pitchFamily="34" charset="0"/>
+                <a:ea typeface="Segoe UI" pitchFamily="34" charset="-122"/>
+                <a:cs typeface="Segoe UI" pitchFamily="34" charset="-120"/>
               </a:rPr>
               <a:t>Synapse</a:t>
             </a:r>
@@ -2057,9 +2155,9 @@
                 <a:solidFill>
                   <a:srgbClr val="0F2A52"/>
                 </a:solidFill>
-                <a:latin typeface="Calibri" pitchFamily="34" charset="0"/>
-                <a:ea typeface="Calibri" pitchFamily="34" charset="-122"/>
-                <a:cs typeface="Calibri" pitchFamily="34" charset="-120"/>
+                <a:latin typeface="Segoe UI" pitchFamily="34" charset="0"/>
+                <a:ea typeface="Segoe UI" pitchFamily="34" charset="-122"/>
+                <a:cs typeface="Segoe UI" pitchFamily="34" charset="-120"/>
               </a:rPr>
               <a:t>The problem the brief asks us to solve</a:t>
             </a:r>
@@ -2076,10 +2174,12 @@
         <p:spPr>
           <a:xfrm>
             <a:off x="548640" y="1143000"/>
-            <a:ext cx="457200" cy="457200"/>
-          </a:xfrm>
-          <a:prstGeom prst="ellipse">
-            <a:avLst/>
+            <a:ext cx="502920" cy="502920"/>
+          </a:xfrm>
+          <a:prstGeom prst="roundRect">
+            <a:avLst>
+              <a:gd name="adj" fmla="val 9091"/>
+            </a:avLst>
           </a:prstGeom>
           <a:solidFill>
             <a:srgbClr val="0078D4"/>
@@ -2087,40 +2187,64 @@
           <a:ln/>
         </p:spPr>
       </p:sp>
-      <p:sp>
-        <p:nvSpPr>
-          <p:cNvPr id="4" name="Text 2"/>
-          <p:cNvSpPr/>
-          <p:nvPr/>
-        </p:nvSpPr>
-        <p:spPr>
-          <a:xfrm>
-            <a:off x="548640" y="1143000"/>
-            <a:ext cx="457200" cy="457200"/>
-          </a:xfrm>
-          <a:prstGeom prst="rect">
-            <a:avLst/>
-          </a:prstGeom>
-          <a:noFill/>
-          <a:ln/>
-        </p:spPr>
-        <p:txBody>
-          <a:bodyPr wrap="square" lIns="0" tIns="0" rIns="0" bIns="0" rtlCol="0" anchor="ctr"/>
-          <a:lstStyle/>
-          <a:p>
-            <a:pPr algn="ctr" indent="0" marL="0">
+      <p:pic>
+        <p:nvPicPr>
+          <p:cNvPr id="4" name="Image 0" descr="preencoded.png">    </p:cNvPr>
+          <p:cNvPicPr>
+            <a:picLocks noChangeAspect="1"/>
+          </p:cNvPicPr>
+          <p:nvPr/>
+        </p:nvPicPr>
+        <p:blipFill>
+          <a:blip r:embed="rId1"/>
+          <a:stretch>
+            <a:fillRect/>
+          </a:stretch>
+        </p:blipFill>
+        <p:spPr>
+          <a:xfrm>
+            <a:off x="640080" y="1234440"/>
+            <a:ext cx="320040" cy="320040"/>
+          </a:xfrm>
+          <a:prstGeom prst="rect">
+            <a:avLst/>
+          </a:prstGeom>
+        </p:spPr>
+      </p:pic>
+      <p:sp>
+        <p:nvSpPr>
+          <p:cNvPr id="5" name="Text 2"/>
+          <p:cNvSpPr/>
+          <p:nvPr/>
+        </p:nvSpPr>
+        <p:spPr>
+          <a:xfrm>
+            <a:off x="1234440" y="1115568"/>
+            <a:ext cx="6858000" cy="292608"/>
+          </a:xfrm>
+          <a:prstGeom prst="rect">
+            <a:avLst/>
+          </a:prstGeom>
+          <a:noFill/>
+          <a:ln/>
+        </p:spPr>
+        <p:txBody>
+          <a:bodyPr wrap="square" lIns="0" tIns="0" rIns="0" bIns="0" rtlCol="0" anchor="ctr"/>
+          <a:lstStyle/>
+          <a:p>
+            <a:pPr indent="0" marL="0">
               <a:buNone/>
             </a:pPr>
             <a:r>
               <a:rPr lang="en-US" sz="1800" b="1" dirty="0">
                 <a:solidFill>
-                  <a:srgbClr val="FFFFFF"/>
-                </a:solidFill>
-                <a:latin typeface="Calibri" pitchFamily="34" charset="0"/>
-                <a:ea typeface="Calibri" pitchFamily="34" charset="-122"/>
-                <a:cs typeface="Calibri" pitchFamily="34" charset="-120"/>
-              </a:rPr>
-              <a:t>1</a:t>
+                  <a:srgbClr val="0F2A52"/>
+                </a:solidFill>
+                <a:latin typeface="Segoe UI" pitchFamily="34" charset="0"/>
+                <a:ea typeface="Segoe UI" pitchFamily="34" charset="-122"/>
+                <a:cs typeface="Segoe UI" pitchFamily="34" charset="-120"/>
+              </a:rPr>
+              <a:t>Unify streaming + batch</a:t>
             </a:r>
             <a:endParaRPr lang="en-US" sz="1800" dirty="0"/>
           </a:p>
@@ -2128,14 +2252,14 @@
       </p:sp>
       <p:sp>
         <p:nvSpPr>
-          <p:cNvPr id="5" name="Text 3"/>
-          <p:cNvSpPr/>
-          <p:nvPr/>
-        </p:nvSpPr>
-        <p:spPr>
-          <a:xfrm>
-            <a:off x="1188720" y="1115568"/>
-            <a:ext cx="6858000" cy="292608"/>
+          <p:cNvPr id="6" name="Text 3"/>
+          <p:cNvSpPr/>
+          <p:nvPr/>
+        </p:nvSpPr>
+        <p:spPr>
+          <a:xfrm>
+            <a:off x="1234440" y="1408176"/>
+            <a:ext cx="7132320" cy="274320"/>
           </a:xfrm>
           <a:prstGeom prst="rect">
             <a:avLst/>
@@ -2151,52 +2275,13 @@
               <a:buNone/>
             </a:pPr>
             <a:r>
-              <a:rPr lang="en-US" sz="1800" b="1" dirty="0">
-                <a:solidFill>
-                  <a:srgbClr val="0F2A52"/>
-                </a:solidFill>
-                <a:latin typeface="Calibri" pitchFamily="34" charset="0"/>
-                <a:ea typeface="Calibri" pitchFamily="34" charset="-122"/>
-                <a:cs typeface="Calibri" pitchFamily="34" charset="-120"/>
-              </a:rPr>
-              <a:t>Unify streaming + batch</a:t>
-            </a:r>
-            <a:endParaRPr lang="en-US" sz="1800" dirty="0"/>
-          </a:p>
-        </p:txBody>
-      </p:sp>
-      <p:sp>
-        <p:nvSpPr>
-          <p:cNvPr id="6" name="Text 4"/>
-          <p:cNvSpPr/>
-          <p:nvPr/>
-        </p:nvSpPr>
-        <p:spPr>
-          <a:xfrm>
-            <a:off x="1188720" y="1408176"/>
-            <a:ext cx="7132320" cy="274320"/>
-          </a:xfrm>
-          <a:prstGeom prst="rect">
-            <a:avLst/>
-          </a:prstGeom>
-          <a:noFill/>
-          <a:ln/>
-        </p:spPr>
-        <p:txBody>
-          <a:bodyPr wrap="square" lIns="0" tIns="0" rIns="0" bIns="0" rtlCol="0" anchor="ctr"/>
-          <a:lstStyle/>
-          <a:p>
-            <a:pPr indent="0" marL="0">
-              <a:buNone/>
-            </a:pPr>
-            <a:r>
               <a:rPr lang="en-US" sz="1300" dirty="0">
                 <a:solidFill>
                   <a:srgbClr val="6B7280"/>
                 </a:solidFill>
-                <a:latin typeface="Calibri" pitchFamily="34" charset="0"/>
-                <a:ea typeface="Calibri" pitchFamily="34" charset="-122"/>
-                <a:cs typeface="Calibri" pitchFamily="34" charset="-120"/>
+                <a:latin typeface="Segoe UI" pitchFamily="34" charset="0"/>
+                <a:ea typeface="Segoe UI" pitchFamily="34" charset="-122"/>
+                <a:cs typeface="Segoe UI" pitchFamily="34" charset="-120"/>
               </a:rPr>
               <a:t>One platform for both, not two pipelines.</a:t>
             </a:r>
@@ -2206,17 +2291,19 @@
       </p:sp>
       <p:sp>
         <p:nvSpPr>
-          <p:cNvPr id="7" name="Shape 5"/>
+          <p:cNvPr id="7" name="Shape 4"/>
           <p:cNvSpPr/>
           <p:nvPr/>
         </p:nvSpPr>
         <p:spPr>
           <a:xfrm>
             <a:off x="548640" y="1783080"/>
-            <a:ext cx="457200" cy="457200"/>
-          </a:xfrm>
-          <a:prstGeom prst="ellipse">
-            <a:avLst/>
+            <a:ext cx="502920" cy="502920"/>
+          </a:xfrm>
+          <a:prstGeom prst="roundRect">
+            <a:avLst>
+              <a:gd name="adj" fmla="val 9091"/>
+            </a:avLst>
           </a:prstGeom>
           <a:solidFill>
             <a:srgbClr val="0078D4"/>
@@ -2224,40 +2311,64 @@
           <a:ln/>
         </p:spPr>
       </p:sp>
-      <p:sp>
-        <p:nvSpPr>
-          <p:cNvPr id="8" name="Text 6"/>
-          <p:cNvSpPr/>
-          <p:nvPr/>
-        </p:nvSpPr>
-        <p:spPr>
-          <a:xfrm>
-            <a:off x="548640" y="1783080"/>
-            <a:ext cx="457200" cy="457200"/>
-          </a:xfrm>
-          <a:prstGeom prst="rect">
-            <a:avLst/>
-          </a:prstGeom>
-          <a:noFill/>
-          <a:ln/>
-        </p:spPr>
-        <p:txBody>
-          <a:bodyPr wrap="square" lIns="0" tIns="0" rIns="0" bIns="0" rtlCol="0" anchor="ctr"/>
-          <a:lstStyle/>
-          <a:p>
-            <a:pPr algn="ctr" indent="0" marL="0">
+      <p:pic>
+        <p:nvPicPr>
+          <p:cNvPr id="8" name="Image 1" descr="preencoded.png">    </p:cNvPr>
+          <p:cNvPicPr>
+            <a:picLocks noChangeAspect="1"/>
+          </p:cNvPicPr>
+          <p:nvPr/>
+        </p:nvPicPr>
+        <p:blipFill>
+          <a:blip r:embed="rId2"/>
+          <a:stretch>
+            <a:fillRect/>
+          </a:stretch>
+        </p:blipFill>
+        <p:spPr>
+          <a:xfrm>
+            <a:off x="640080" y="1874520"/>
+            <a:ext cx="320040" cy="320040"/>
+          </a:xfrm>
+          <a:prstGeom prst="rect">
+            <a:avLst/>
+          </a:prstGeom>
+        </p:spPr>
+      </p:pic>
+      <p:sp>
+        <p:nvSpPr>
+          <p:cNvPr id="9" name="Text 5"/>
+          <p:cNvSpPr/>
+          <p:nvPr/>
+        </p:nvSpPr>
+        <p:spPr>
+          <a:xfrm>
+            <a:off x="1234440" y="1755648"/>
+            <a:ext cx="6858000" cy="292608"/>
+          </a:xfrm>
+          <a:prstGeom prst="rect">
+            <a:avLst/>
+          </a:prstGeom>
+          <a:noFill/>
+          <a:ln/>
+        </p:spPr>
+        <p:txBody>
+          <a:bodyPr wrap="square" lIns="0" tIns="0" rIns="0" bIns="0" rtlCol="0" anchor="ctr"/>
+          <a:lstStyle/>
+          <a:p>
+            <a:pPr indent="0" marL="0">
               <a:buNone/>
             </a:pPr>
             <a:r>
               <a:rPr lang="en-US" sz="1800" b="1" dirty="0">
                 <a:solidFill>
-                  <a:srgbClr val="FFFFFF"/>
-                </a:solidFill>
-                <a:latin typeface="Calibri" pitchFamily="34" charset="0"/>
-                <a:ea typeface="Calibri" pitchFamily="34" charset="-122"/>
-                <a:cs typeface="Calibri" pitchFamily="34" charset="-120"/>
-              </a:rPr>
-              <a:t>2</a:t>
+                  <a:srgbClr val="0F2A52"/>
+                </a:solidFill>
+                <a:latin typeface="Segoe UI" pitchFamily="34" charset="0"/>
+                <a:ea typeface="Segoe UI" pitchFamily="34" charset="-122"/>
+                <a:cs typeface="Segoe UI" pitchFamily="34" charset="-120"/>
+              </a:rPr>
+              <a:t>Enable real-time insights</a:t>
             </a:r>
             <a:endParaRPr lang="en-US" sz="1800" dirty="0"/>
           </a:p>
@@ -2265,14 +2376,14 @@
       </p:sp>
       <p:sp>
         <p:nvSpPr>
-          <p:cNvPr id="9" name="Text 7"/>
-          <p:cNvSpPr/>
-          <p:nvPr/>
-        </p:nvSpPr>
-        <p:spPr>
-          <a:xfrm>
-            <a:off x="1188720" y="1755648"/>
-            <a:ext cx="6858000" cy="292608"/>
+          <p:cNvPr id="10" name="Text 6"/>
+          <p:cNvSpPr/>
+          <p:nvPr/>
+        </p:nvSpPr>
+        <p:spPr>
+          <a:xfrm>
+            <a:off x="1234440" y="2048256"/>
+            <a:ext cx="7132320" cy="274320"/>
           </a:xfrm>
           <a:prstGeom prst="rect">
             <a:avLst/>
@@ -2288,52 +2399,13 @@
               <a:buNone/>
             </a:pPr>
             <a:r>
-              <a:rPr lang="en-US" sz="1800" b="1" dirty="0">
-                <a:solidFill>
-                  <a:srgbClr val="0F2A52"/>
-                </a:solidFill>
-                <a:latin typeface="Calibri" pitchFamily="34" charset="0"/>
-                <a:ea typeface="Calibri" pitchFamily="34" charset="-122"/>
-                <a:cs typeface="Calibri" pitchFamily="34" charset="-120"/>
-              </a:rPr>
-              <a:t>Enable real-time insights</a:t>
-            </a:r>
-            <a:endParaRPr lang="en-US" sz="1800" dirty="0"/>
-          </a:p>
-        </p:txBody>
-      </p:sp>
-      <p:sp>
-        <p:nvSpPr>
-          <p:cNvPr id="10" name="Text 8"/>
-          <p:cNvSpPr/>
-          <p:nvPr/>
-        </p:nvSpPr>
-        <p:spPr>
-          <a:xfrm>
-            <a:off x="1188720" y="2048256"/>
-            <a:ext cx="7132320" cy="274320"/>
-          </a:xfrm>
-          <a:prstGeom prst="rect">
-            <a:avLst/>
-          </a:prstGeom>
-          <a:noFill/>
-          <a:ln/>
-        </p:spPr>
-        <p:txBody>
-          <a:bodyPr wrap="square" lIns="0" tIns="0" rIns="0" bIns="0" rtlCol="0" anchor="ctr"/>
-          <a:lstStyle/>
-          <a:p>
-            <a:pPr indent="0" marL="0">
-              <a:buNone/>
-            </a:pPr>
-            <a:r>
               <a:rPr lang="en-US" sz="1300" dirty="0">
                 <a:solidFill>
                   <a:srgbClr val="6B7280"/>
                 </a:solidFill>
-                <a:latin typeface="Calibri" pitchFamily="34" charset="0"/>
-                <a:ea typeface="Calibri" pitchFamily="34" charset="-122"/>
-                <a:cs typeface="Calibri" pitchFamily="34" charset="-120"/>
+                <a:latin typeface="Segoe UI" pitchFamily="34" charset="0"/>
+                <a:ea typeface="Segoe UI" pitchFamily="34" charset="-122"/>
+                <a:cs typeface="Segoe UI" pitchFamily="34" charset="-120"/>
               </a:rPr>
               <a:t>Sub-minute freshness for the business.</a:t>
             </a:r>
@@ -2343,17 +2415,19 @@
       </p:sp>
       <p:sp>
         <p:nvSpPr>
-          <p:cNvPr id="11" name="Shape 9"/>
+          <p:cNvPr id="11" name="Shape 7"/>
           <p:cNvSpPr/>
           <p:nvPr/>
         </p:nvSpPr>
         <p:spPr>
           <a:xfrm>
             <a:off x="548640" y="2423160"/>
-            <a:ext cx="457200" cy="457200"/>
-          </a:xfrm>
-          <a:prstGeom prst="ellipse">
-            <a:avLst/>
+            <a:ext cx="502920" cy="502920"/>
+          </a:xfrm>
+          <a:prstGeom prst="roundRect">
+            <a:avLst>
+              <a:gd name="adj" fmla="val 9091"/>
+            </a:avLst>
           </a:prstGeom>
           <a:solidFill>
             <a:srgbClr val="0078D4"/>
@@ -2361,40 +2435,64 @@
           <a:ln/>
         </p:spPr>
       </p:sp>
-      <p:sp>
-        <p:nvSpPr>
-          <p:cNvPr id="12" name="Text 10"/>
-          <p:cNvSpPr/>
-          <p:nvPr/>
-        </p:nvSpPr>
-        <p:spPr>
-          <a:xfrm>
-            <a:off x="548640" y="2423160"/>
-            <a:ext cx="457200" cy="457200"/>
-          </a:xfrm>
-          <a:prstGeom prst="rect">
-            <a:avLst/>
-          </a:prstGeom>
-          <a:noFill/>
-          <a:ln/>
-        </p:spPr>
-        <p:txBody>
-          <a:bodyPr wrap="square" lIns="0" tIns="0" rIns="0" bIns="0" rtlCol="0" anchor="ctr"/>
-          <a:lstStyle/>
-          <a:p>
-            <a:pPr algn="ctr" indent="0" marL="0">
+      <p:pic>
+        <p:nvPicPr>
+          <p:cNvPr id="12" name="Image 2" descr="preencoded.png">    </p:cNvPr>
+          <p:cNvPicPr>
+            <a:picLocks noChangeAspect="1"/>
+          </p:cNvPicPr>
+          <p:nvPr/>
+        </p:nvPicPr>
+        <p:blipFill>
+          <a:blip r:embed="rId3"/>
+          <a:stretch>
+            <a:fillRect/>
+          </a:stretch>
+        </p:blipFill>
+        <p:spPr>
+          <a:xfrm>
+            <a:off x="640080" y="2514600"/>
+            <a:ext cx="320040" cy="320040"/>
+          </a:xfrm>
+          <a:prstGeom prst="rect">
+            <a:avLst/>
+          </a:prstGeom>
+        </p:spPr>
+      </p:pic>
+      <p:sp>
+        <p:nvSpPr>
+          <p:cNvPr id="13" name="Text 8"/>
+          <p:cNvSpPr/>
+          <p:nvPr/>
+        </p:nvSpPr>
+        <p:spPr>
+          <a:xfrm>
+            <a:off x="1234440" y="2395728"/>
+            <a:ext cx="6858000" cy="292608"/>
+          </a:xfrm>
+          <a:prstGeom prst="rect">
+            <a:avLst/>
+          </a:prstGeom>
+          <a:noFill/>
+          <a:ln/>
+        </p:spPr>
+        <p:txBody>
+          <a:bodyPr wrap="square" lIns="0" tIns="0" rIns="0" bIns="0" rtlCol="0" anchor="ctr"/>
+          <a:lstStyle/>
+          <a:p>
+            <a:pPr indent="0" marL="0">
               <a:buNone/>
             </a:pPr>
             <a:r>
               <a:rPr lang="en-US" sz="1800" b="1" dirty="0">
                 <a:solidFill>
-                  <a:srgbClr val="FFFFFF"/>
-                </a:solidFill>
-                <a:latin typeface="Calibri" pitchFamily="34" charset="0"/>
-                <a:ea typeface="Calibri" pitchFamily="34" charset="-122"/>
-                <a:cs typeface="Calibri" pitchFamily="34" charset="-120"/>
-              </a:rPr>
-              <a:t>3</a:t>
+                  <a:srgbClr val="0F2A52"/>
+                </a:solidFill>
+                <a:latin typeface="Segoe UI" pitchFamily="34" charset="0"/>
+                <a:ea typeface="Segoe UI" pitchFamily="34" charset="-122"/>
+                <a:cs typeface="Segoe UI" pitchFamily="34" charset="-120"/>
+              </a:rPr>
+              <a:t>Support analytics</a:t>
             </a:r>
             <a:endParaRPr lang="en-US" sz="1800" dirty="0"/>
           </a:p>
@@ -2402,14 +2500,14 @@
       </p:sp>
       <p:sp>
         <p:nvSpPr>
-          <p:cNvPr id="13" name="Text 11"/>
-          <p:cNvSpPr/>
-          <p:nvPr/>
-        </p:nvSpPr>
-        <p:spPr>
-          <a:xfrm>
-            <a:off x="1188720" y="2395728"/>
-            <a:ext cx="6858000" cy="292608"/>
+          <p:cNvPr id="14" name="Text 9"/>
+          <p:cNvSpPr/>
+          <p:nvPr/>
+        </p:nvSpPr>
+        <p:spPr>
+          <a:xfrm>
+            <a:off x="1234440" y="2688336"/>
+            <a:ext cx="7132320" cy="274320"/>
           </a:xfrm>
           <a:prstGeom prst="rect">
             <a:avLst/>
@@ -2425,52 +2523,13 @@
               <a:buNone/>
             </a:pPr>
             <a:r>
-              <a:rPr lang="en-US" sz="1800" b="1" dirty="0">
-                <a:solidFill>
-                  <a:srgbClr val="0F2A52"/>
-                </a:solidFill>
-                <a:latin typeface="Calibri" pitchFamily="34" charset="0"/>
-                <a:ea typeface="Calibri" pitchFamily="34" charset="-122"/>
-                <a:cs typeface="Calibri" pitchFamily="34" charset="-120"/>
-              </a:rPr>
-              <a:t>Support analytics</a:t>
-            </a:r>
-            <a:endParaRPr lang="en-US" sz="1800" dirty="0"/>
-          </a:p>
-        </p:txBody>
-      </p:sp>
-      <p:sp>
-        <p:nvSpPr>
-          <p:cNvPr id="14" name="Text 12"/>
-          <p:cNvSpPr/>
-          <p:nvPr/>
-        </p:nvSpPr>
-        <p:spPr>
-          <a:xfrm>
-            <a:off x="1188720" y="2688336"/>
-            <a:ext cx="7132320" cy="274320"/>
-          </a:xfrm>
-          <a:prstGeom prst="rect">
-            <a:avLst/>
-          </a:prstGeom>
-          <a:noFill/>
-          <a:ln/>
-        </p:spPr>
-        <p:txBody>
-          <a:bodyPr wrap="square" lIns="0" tIns="0" rIns="0" bIns="0" rtlCol="0" anchor="ctr"/>
-          <a:lstStyle/>
-          <a:p>
-            <a:pPr indent="0" marL="0">
-              <a:buNone/>
-            </a:pPr>
-            <a:r>
               <a:rPr lang="en-US" sz="1300" dirty="0">
                 <a:solidFill>
                   <a:srgbClr val="6B7280"/>
                 </a:solidFill>
-                <a:latin typeface="Calibri" pitchFamily="34" charset="0"/>
-                <a:ea typeface="Calibri" pitchFamily="34" charset="-122"/>
-                <a:cs typeface="Calibri" pitchFamily="34" charset="-120"/>
+                <a:latin typeface="Segoe UI" pitchFamily="34" charset="0"/>
+                <a:ea typeface="Segoe UI" pitchFamily="34" charset="-122"/>
+                <a:cs typeface="Segoe UI" pitchFamily="34" charset="-120"/>
               </a:rPr>
               <a:t>BI dashboards and ad-hoc SQL.</a:t>
             </a:r>
@@ -2480,17 +2539,19 @@
       </p:sp>
       <p:sp>
         <p:nvSpPr>
-          <p:cNvPr id="15" name="Shape 13"/>
+          <p:cNvPr id="15" name="Shape 10"/>
           <p:cNvSpPr/>
           <p:nvPr/>
         </p:nvSpPr>
         <p:spPr>
           <a:xfrm>
             <a:off x="548640" y="3063240"/>
-            <a:ext cx="457200" cy="457200"/>
-          </a:xfrm>
-          <a:prstGeom prst="ellipse">
-            <a:avLst/>
+            <a:ext cx="502920" cy="502920"/>
+          </a:xfrm>
+          <a:prstGeom prst="roundRect">
+            <a:avLst>
+              <a:gd name="adj" fmla="val 9091"/>
+            </a:avLst>
           </a:prstGeom>
           <a:solidFill>
             <a:srgbClr val="0078D4"/>
@@ -2498,40 +2559,64 @@
           <a:ln/>
         </p:spPr>
       </p:sp>
-      <p:sp>
-        <p:nvSpPr>
-          <p:cNvPr id="16" name="Text 14"/>
-          <p:cNvSpPr/>
-          <p:nvPr/>
-        </p:nvSpPr>
-        <p:spPr>
-          <a:xfrm>
-            <a:off x="548640" y="3063240"/>
-            <a:ext cx="457200" cy="457200"/>
-          </a:xfrm>
-          <a:prstGeom prst="rect">
-            <a:avLst/>
-          </a:prstGeom>
-          <a:noFill/>
-          <a:ln/>
-        </p:spPr>
-        <p:txBody>
-          <a:bodyPr wrap="square" lIns="0" tIns="0" rIns="0" bIns="0" rtlCol="0" anchor="ctr"/>
-          <a:lstStyle/>
-          <a:p>
-            <a:pPr algn="ctr" indent="0" marL="0">
+      <p:pic>
+        <p:nvPicPr>
+          <p:cNvPr id="16" name="Image 3" descr="preencoded.png">    </p:cNvPr>
+          <p:cNvPicPr>
+            <a:picLocks noChangeAspect="1"/>
+          </p:cNvPicPr>
+          <p:nvPr/>
+        </p:nvPicPr>
+        <p:blipFill>
+          <a:blip r:embed="rId4"/>
+          <a:stretch>
+            <a:fillRect/>
+          </a:stretch>
+        </p:blipFill>
+        <p:spPr>
+          <a:xfrm>
+            <a:off x="640080" y="3154680"/>
+            <a:ext cx="320040" cy="320040"/>
+          </a:xfrm>
+          <a:prstGeom prst="rect">
+            <a:avLst/>
+          </a:prstGeom>
+        </p:spPr>
+      </p:pic>
+      <p:sp>
+        <p:nvSpPr>
+          <p:cNvPr id="17" name="Text 11"/>
+          <p:cNvSpPr/>
+          <p:nvPr/>
+        </p:nvSpPr>
+        <p:spPr>
+          <a:xfrm>
+            <a:off x="1234440" y="3035808"/>
+            <a:ext cx="6858000" cy="292608"/>
+          </a:xfrm>
+          <a:prstGeom prst="rect">
+            <a:avLst/>
+          </a:prstGeom>
+          <a:noFill/>
+          <a:ln/>
+        </p:spPr>
+        <p:txBody>
+          <a:bodyPr wrap="square" lIns="0" tIns="0" rIns="0" bIns="0" rtlCol="0" anchor="ctr"/>
+          <a:lstStyle/>
+          <a:p>
+            <a:pPr indent="0" marL="0">
               <a:buNone/>
             </a:pPr>
             <a:r>
               <a:rPr lang="en-US" sz="1800" b="1" dirty="0">
                 <a:solidFill>
-                  <a:srgbClr val="FFFFFF"/>
-                </a:solidFill>
-                <a:latin typeface="Calibri" pitchFamily="34" charset="0"/>
-                <a:ea typeface="Calibri" pitchFamily="34" charset="-122"/>
-                <a:cs typeface="Calibri" pitchFamily="34" charset="-120"/>
-              </a:rPr>
-              <a:t>4</a:t>
+                  <a:srgbClr val="0F2A52"/>
+                </a:solidFill>
+                <a:latin typeface="Segoe UI" pitchFamily="34" charset="0"/>
+                <a:ea typeface="Segoe UI" pitchFamily="34" charset="-122"/>
+                <a:cs typeface="Segoe UI" pitchFamily="34" charset="-120"/>
+              </a:rPr>
+              <a:t>Prepare data for AI/ML</a:t>
             </a:r>
             <a:endParaRPr lang="en-US" sz="1800" dirty="0"/>
           </a:p>
@@ -2539,14 +2624,14 @@
       </p:sp>
       <p:sp>
         <p:nvSpPr>
-          <p:cNvPr id="17" name="Text 15"/>
-          <p:cNvSpPr/>
-          <p:nvPr/>
-        </p:nvSpPr>
-        <p:spPr>
-          <a:xfrm>
-            <a:off x="1188720" y="3035808"/>
-            <a:ext cx="6858000" cy="292608"/>
+          <p:cNvPr id="18" name="Text 12"/>
+          <p:cNvSpPr/>
+          <p:nvPr/>
+        </p:nvSpPr>
+        <p:spPr>
+          <a:xfrm>
+            <a:off x="1234440" y="3328416"/>
+            <a:ext cx="7132320" cy="274320"/>
           </a:xfrm>
           <a:prstGeom prst="rect">
             <a:avLst/>
@@ -2562,52 +2647,13 @@
               <a:buNone/>
             </a:pPr>
             <a:r>
-              <a:rPr lang="en-US" sz="1800" b="1" dirty="0">
-                <a:solidFill>
-                  <a:srgbClr val="0F2A52"/>
-                </a:solidFill>
-                <a:latin typeface="Calibri" pitchFamily="34" charset="0"/>
-                <a:ea typeface="Calibri" pitchFamily="34" charset="-122"/>
-                <a:cs typeface="Calibri" pitchFamily="34" charset="-120"/>
-              </a:rPr>
-              <a:t>Prepare data for AI/ML</a:t>
-            </a:r>
-            <a:endParaRPr lang="en-US" sz="1800" dirty="0"/>
-          </a:p>
-        </p:txBody>
-      </p:sp>
-      <p:sp>
-        <p:nvSpPr>
-          <p:cNvPr id="18" name="Text 16"/>
-          <p:cNvSpPr/>
-          <p:nvPr/>
-        </p:nvSpPr>
-        <p:spPr>
-          <a:xfrm>
-            <a:off x="1188720" y="3328416"/>
-            <a:ext cx="7132320" cy="274320"/>
-          </a:xfrm>
-          <a:prstGeom prst="rect">
-            <a:avLst/>
-          </a:prstGeom>
-          <a:noFill/>
-          <a:ln/>
-        </p:spPr>
-        <p:txBody>
-          <a:bodyPr wrap="square" lIns="0" tIns="0" rIns="0" bIns="0" rtlCol="0" anchor="ctr"/>
-          <a:lstStyle/>
-          <a:p>
-            <a:pPr indent="0" marL="0">
-              <a:buNone/>
-            </a:pPr>
-            <a:r>
               <a:rPr lang="en-US" sz="1300" dirty="0">
                 <a:solidFill>
                   <a:srgbClr val="6B7280"/>
                 </a:solidFill>
-                <a:latin typeface="Calibri" pitchFamily="34" charset="0"/>
-                <a:ea typeface="Calibri" pitchFamily="34" charset="-122"/>
-                <a:cs typeface="Calibri" pitchFamily="34" charset="-120"/>
+                <a:latin typeface="Segoe UI" pitchFamily="34" charset="0"/>
+                <a:ea typeface="Segoe UI" pitchFamily="34" charset="-122"/>
+                <a:cs typeface="Segoe UI" pitchFamily="34" charset="-120"/>
               </a:rPr>
               <a:t>Offline + online feature stores.</a:t>
             </a:r>
@@ -2617,17 +2663,19 @@
       </p:sp>
       <p:sp>
         <p:nvSpPr>
-          <p:cNvPr id="19" name="Shape 17"/>
+          <p:cNvPr id="19" name="Shape 13"/>
           <p:cNvSpPr/>
           <p:nvPr/>
         </p:nvSpPr>
         <p:spPr>
           <a:xfrm>
             <a:off x="548640" y="3703320"/>
-            <a:ext cx="457200" cy="457200"/>
-          </a:xfrm>
-          <a:prstGeom prst="ellipse">
-            <a:avLst/>
+            <a:ext cx="502920" cy="502920"/>
+          </a:xfrm>
+          <a:prstGeom prst="roundRect">
+            <a:avLst>
+              <a:gd name="adj" fmla="val 9091"/>
+            </a:avLst>
           </a:prstGeom>
           <a:solidFill>
             <a:srgbClr val="0078D4"/>
@@ -2635,40 +2683,64 @@
           <a:ln/>
         </p:spPr>
       </p:sp>
-      <p:sp>
-        <p:nvSpPr>
-          <p:cNvPr id="20" name="Text 18"/>
-          <p:cNvSpPr/>
-          <p:nvPr/>
-        </p:nvSpPr>
-        <p:spPr>
-          <a:xfrm>
-            <a:off x="548640" y="3703320"/>
-            <a:ext cx="457200" cy="457200"/>
-          </a:xfrm>
-          <a:prstGeom prst="rect">
-            <a:avLst/>
-          </a:prstGeom>
-          <a:noFill/>
-          <a:ln/>
-        </p:spPr>
-        <p:txBody>
-          <a:bodyPr wrap="square" lIns="0" tIns="0" rIns="0" bIns="0" rtlCol="0" anchor="ctr"/>
-          <a:lstStyle/>
-          <a:p>
-            <a:pPr algn="ctr" indent="0" marL="0">
+      <p:pic>
+        <p:nvPicPr>
+          <p:cNvPr id="20" name="Image 4" descr="preencoded.png">    </p:cNvPr>
+          <p:cNvPicPr>
+            <a:picLocks noChangeAspect="1"/>
+          </p:cNvPicPr>
+          <p:nvPr/>
+        </p:nvPicPr>
+        <p:blipFill>
+          <a:blip r:embed="rId5"/>
+          <a:stretch>
+            <a:fillRect/>
+          </a:stretch>
+        </p:blipFill>
+        <p:spPr>
+          <a:xfrm>
+            <a:off x="640080" y="3794760"/>
+            <a:ext cx="320040" cy="320040"/>
+          </a:xfrm>
+          <a:prstGeom prst="rect">
+            <a:avLst/>
+          </a:prstGeom>
+        </p:spPr>
+      </p:pic>
+      <p:sp>
+        <p:nvSpPr>
+          <p:cNvPr id="21" name="Text 14"/>
+          <p:cNvSpPr/>
+          <p:nvPr/>
+        </p:nvSpPr>
+        <p:spPr>
+          <a:xfrm>
+            <a:off x="1234440" y="3675888"/>
+            <a:ext cx="6858000" cy="292608"/>
+          </a:xfrm>
+          <a:prstGeom prst="rect">
+            <a:avLst/>
+          </a:prstGeom>
+          <a:noFill/>
+          <a:ln/>
+        </p:spPr>
+        <p:txBody>
+          <a:bodyPr wrap="square" lIns="0" tIns="0" rIns="0" bIns="0" rtlCol="0" anchor="ctr"/>
+          <a:lstStyle/>
+          <a:p>
+            <a:pPr indent="0" marL="0">
               <a:buNone/>
             </a:pPr>
             <a:r>
               <a:rPr lang="en-US" sz="1800" b="1" dirty="0">
                 <a:solidFill>
-                  <a:srgbClr val="FFFFFF"/>
-                </a:solidFill>
-                <a:latin typeface="Calibri" pitchFamily="34" charset="0"/>
-                <a:ea typeface="Calibri" pitchFamily="34" charset="-122"/>
-                <a:cs typeface="Calibri" pitchFamily="34" charset="-120"/>
-              </a:rPr>
-              <a:t>5</a:t>
+                  <a:srgbClr val="0F2A52"/>
+                </a:solidFill>
+                <a:latin typeface="Segoe UI" pitchFamily="34" charset="0"/>
+                <a:ea typeface="Segoe UI" pitchFamily="34" charset="-122"/>
+                <a:cs typeface="Segoe UI" pitchFamily="34" charset="-120"/>
+              </a:rPr>
+              <a:t>Replace legacy ETL + silos</a:t>
             </a:r>
             <a:endParaRPr lang="en-US" sz="1800" dirty="0"/>
           </a:p>
@@ -2676,14 +2748,14 @@
       </p:sp>
       <p:sp>
         <p:nvSpPr>
-          <p:cNvPr id="21" name="Text 19"/>
-          <p:cNvSpPr/>
-          <p:nvPr/>
-        </p:nvSpPr>
-        <p:spPr>
-          <a:xfrm>
-            <a:off x="1188720" y="3675888"/>
-            <a:ext cx="6858000" cy="292608"/>
+          <p:cNvPr id="22" name="Text 15"/>
+          <p:cNvSpPr/>
+          <p:nvPr/>
+        </p:nvSpPr>
+        <p:spPr>
+          <a:xfrm>
+            <a:off x="1234440" y="3968496"/>
+            <a:ext cx="7132320" cy="274320"/>
           </a:xfrm>
           <a:prstGeom prst="rect">
             <a:avLst/>
@@ -2699,54 +2771,15 @@
               <a:buNone/>
             </a:pPr>
             <a:r>
-              <a:rPr lang="en-US" sz="1800" b="1" dirty="0">
-                <a:solidFill>
-                  <a:srgbClr val="0F2A52"/>
-                </a:solidFill>
-                <a:latin typeface="Calibri" pitchFamily="34" charset="0"/>
-                <a:ea typeface="Calibri" pitchFamily="34" charset="-122"/>
-                <a:cs typeface="Calibri" pitchFamily="34" charset="-120"/>
-              </a:rPr>
-              <a:t>Replace legacy ETL + silos</a:t>
-            </a:r>
-            <a:endParaRPr lang="en-US" sz="1800" dirty="0"/>
-          </a:p>
-        </p:txBody>
-      </p:sp>
-      <p:sp>
-        <p:nvSpPr>
-          <p:cNvPr id="22" name="Text 20"/>
-          <p:cNvSpPr/>
-          <p:nvPr/>
-        </p:nvSpPr>
-        <p:spPr>
-          <a:xfrm>
-            <a:off x="1188720" y="3968496"/>
-            <a:ext cx="7132320" cy="274320"/>
-          </a:xfrm>
-          <a:prstGeom prst="rect">
-            <a:avLst/>
-          </a:prstGeom>
-          <a:noFill/>
-          <a:ln/>
-        </p:spPr>
-        <p:txBody>
-          <a:bodyPr wrap="square" lIns="0" tIns="0" rIns="0" bIns="0" rtlCol="0" anchor="ctr"/>
-          <a:lstStyle/>
-          <a:p>
-            <a:pPr indent="0" marL="0">
-              <a:buNone/>
-            </a:pPr>
-            <a:r>
               <a:rPr lang="en-US" sz="1300" dirty="0">
                 <a:solidFill>
                   <a:srgbClr val="6B7280"/>
                 </a:solidFill>
-                <a:latin typeface="Calibri" pitchFamily="34" charset="0"/>
-                <a:ea typeface="Calibri" pitchFamily="34" charset="-122"/>
-                <a:cs typeface="Calibri" pitchFamily="34" charset="-120"/>
-              </a:rPr>
-              <a:t>Unblock scalability, agility, cost.</a:t>
+                <a:latin typeface="Segoe UI" pitchFamily="34" charset="0"/>
+                <a:ea typeface="Segoe UI" pitchFamily="34" charset="-122"/>
+                <a:cs typeface="Segoe UI" pitchFamily="34" charset="-120"/>
+              </a:rPr>
+              <a:t>Unblock scalability, agility, and cost.</a:t>
             </a:r>
             <a:endParaRPr lang="en-US" sz="1300" dirty="0"/>
           </a:p>
@@ -2754,7 +2787,7 @@
       </p:sp>
       <p:sp>
         <p:nvSpPr>
-          <p:cNvPr id="23" name="Text 21"/>
+          <p:cNvPr id="23" name="Text 16"/>
           <p:cNvSpPr/>
           <p:nvPr/>
         </p:nvSpPr>
@@ -2781,9 +2814,9 @@
                 <a:solidFill>
                   <a:srgbClr val="6B7280"/>
                 </a:solidFill>
-                <a:latin typeface="Calibri" pitchFamily="34" charset="0"/>
-                <a:ea typeface="Calibri" pitchFamily="34" charset="-122"/>
-                <a:cs typeface="Calibri" pitchFamily="34" charset="-120"/>
+                <a:latin typeface="Segoe UI" pitchFamily="34" charset="0"/>
+                <a:ea typeface="Segoe UI" pitchFamily="34" charset="-122"/>
+                <a:cs typeface="Segoe UI" pitchFamily="34" charset="-120"/>
               </a:rPr>
               <a:t>People10 Solutions Lab — Malappa</a:t>
             </a:r>
@@ -2793,7 +2826,7 @@
       </p:sp>
       <p:sp>
         <p:nvSpPr>
-          <p:cNvPr id="24" name="Text 22"/>
+          <p:cNvPr id="24" name="Text 17"/>
           <p:cNvSpPr/>
           <p:nvPr/>
         </p:nvSpPr>
@@ -2820,9 +2853,9 @@
                 <a:solidFill>
                   <a:srgbClr val="6B7280"/>
                 </a:solidFill>
-                <a:latin typeface="Calibri" pitchFamily="34" charset="0"/>
-                <a:ea typeface="Calibri" pitchFamily="34" charset="-122"/>
-                <a:cs typeface="Calibri" pitchFamily="34" charset="-120"/>
+                <a:latin typeface="Segoe UI" pitchFamily="34" charset="0"/>
+                <a:ea typeface="Segoe UI" pitchFamily="34" charset="-122"/>
+                <a:cs typeface="Segoe UI" pitchFamily="34" charset="-120"/>
               </a:rPr>
               <a:t>2 / 9</a:t>
             </a:r>
@@ -2891,11 +2924,11 @@
                 <a:solidFill>
                   <a:srgbClr val="0F2A52"/>
                 </a:solidFill>
-                <a:latin typeface="Calibri" pitchFamily="34" charset="0"/>
-                <a:ea typeface="Calibri" pitchFamily="34" charset="-122"/>
-                <a:cs typeface="Calibri" pitchFamily="34" charset="-120"/>
-              </a:rPr>
-              <a:t>Architecture — what to point at on the diagram</a:t>
+                <a:latin typeface="Segoe UI" pitchFamily="34" charset="0"/>
+                <a:ea typeface="Segoe UI" pitchFamily="34" charset="-122"/>
+                <a:cs typeface="Segoe UI" pitchFamily="34" charset="-120"/>
+              </a:rPr>
+              <a:t>Architecture — streaming + batch into one medallion</a:t>
             </a:r>
             <a:endParaRPr lang="en-US" sz="2800" dirty="0"/>
           </a:p>
@@ -2903,63 +2936,24 @@
       </p:sp>
       <p:sp>
         <p:nvSpPr>
-          <p:cNvPr id="3" name="Text 1"/>
-          <p:cNvSpPr/>
-          <p:nvPr/>
-        </p:nvSpPr>
-        <p:spPr>
-          <a:xfrm>
-            <a:off x="457200" y="960120"/>
-            <a:ext cx="8229600" cy="320040"/>
-          </a:xfrm>
-          <a:prstGeom prst="rect">
-            <a:avLst/>
-          </a:prstGeom>
-          <a:noFill/>
-          <a:ln/>
-        </p:spPr>
-        <p:txBody>
-          <a:bodyPr wrap="square" lIns="0" tIns="0" rIns="0" bIns="0" rtlCol="0" anchor="ctr"/>
-          <a:lstStyle/>
-          <a:p>
-            <a:pPr indent="0" marL="0">
-              <a:buNone/>
-            </a:pPr>
-            <a:r>
-              <a:rPr lang="en-US" sz="1300" i="1" dirty="0">
-                <a:solidFill>
-                  <a:srgbClr val="6B7280"/>
-                </a:solidFill>
-                <a:latin typeface="Calibri" pitchFamily="34" charset="0"/>
-                <a:ea typeface="Calibri" pitchFamily="34" charset="-122"/>
-                <a:cs typeface="Calibri" pitchFamily="34" charset="-120"/>
-              </a:rPr>
-              <a:t>Open docs/01_architecture_diagram.md live. Three things, in this order:</a:t>
-            </a:r>
-            <a:endParaRPr lang="en-US" sz="1300" dirty="0"/>
-          </a:p>
-        </p:txBody>
-      </p:sp>
-      <p:sp>
-        <p:nvSpPr>
-          <p:cNvPr id="4" name="Shape 2"/>
-          <p:cNvSpPr/>
-          <p:nvPr/>
-        </p:nvSpPr>
-        <p:spPr>
-          <a:xfrm>
-            <a:off x="457200" y="1417320"/>
-            <a:ext cx="2697480" cy="3108960"/>
+          <p:cNvPr id="3" name="Shape 1"/>
+          <p:cNvSpPr/>
+          <p:nvPr/>
+        </p:nvSpPr>
+        <p:spPr>
+          <a:xfrm>
+            <a:off x="457200" y="1325880"/>
+            <a:ext cx="1508760" cy="777240"/>
           </a:xfrm>
           <a:prstGeom prst="roundRect">
             <a:avLst>
-              <a:gd name="adj" fmla="val 2712"/>
+              <a:gd name="adj" fmla="val 7059"/>
             </a:avLst>
           </a:prstGeom>
           <a:solidFill>
             <a:srgbClr val="EFF6FC"/>
           </a:solidFill>
-          <a:ln w="9525">
+          <a:ln w="12700">
             <a:solidFill>
               <a:srgbClr val="0078D4"/>
             </a:solidFill>
@@ -2969,34 +2963,14 @@
       </p:sp>
       <p:sp>
         <p:nvSpPr>
-          <p:cNvPr id="5" name="Shape 3"/>
-          <p:cNvSpPr/>
-          <p:nvPr/>
-        </p:nvSpPr>
-        <p:spPr>
-          <a:xfrm>
-            <a:off x="685800" y="1645920"/>
-            <a:ext cx="502920" cy="502920"/>
-          </a:xfrm>
-          <a:prstGeom prst="ellipse">
-            <a:avLst/>
-          </a:prstGeom>
-          <a:solidFill>
-            <a:srgbClr val="0078D4"/>
-          </a:solidFill>
-          <a:ln/>
-        </p:spPr>
-      </p:sp>
-      <p:sp>
-        <p:nvSpPr>
-          <p:cNvPr id="6" name="Text 4"/>
-          <p:cNvSpPr/>
-          <p:nvPr/>
-        </p:nvSpPr>
-        <p:spPr>
-          <a:xfrm>
-            <a:off x="685800" y="1645920"/>
-            <a:ext cx="502920" cy="502920"/>
+          <p:cNvPr id="4" name="Text 2"/>
+          <p:cNvSpPr/>
+          <p:nvPr/>
+        </p:nvSpPr>
+        <p:spPr>
+          <a:xfrm>
+            <a:off x="457200" y="1371600"/>
+            <a:ext cx="1508760" cy="292608"/>
           </a:xfrm>
           <a:prstGeom prst="rect">
             <a:avLst/>
@@ -3012,118 +2986,96 @@
               <a:buNone/>
             </a:pPr>
             <a:r>
-              <a:rPr lang="en-US" sz="2000" b="1" dirty="0">
-                <a:solidFill>
-                  <a:srgbClr val="FFFFFF"/>
-                </a:solidFill>
-                <a:latin typeface="Calibri" pitchFamily="34" charset="0"/>
-                <a:ea typeface="Calibri" pitchFamily="34" charset="-122"/>
-                <a:cs typeface="Calibri" pitchFamily="34" charset="-120"/>
-              </a:rPr>
-              <a:t>1</a:t>
-            </a:r>
-            <a:endParaRPr lang="en-US" sz="2000" dirty="0"/>
-          </a:p>
-        </p:txBody>
-      </p:sp>
-      <p:sp>
-        <p:nvSpPr>
-          <p:cNvPr id="7" name="Text 5"/>
-          <p:cNvSpPr/>
-          <p:nvPr/>
-        </p:nvSpPr>
-        <p:spPr>
-          <a:xfrm>
-            <a:off x="685800" y="2286000"/>
-            <a:ext cx="2240280" cy="640080"/>
-          </a:xfrm>
-          <a:prstGeom prst="rect">
-            <a:avLst/>
-          </a:prstGeom>
-          <a:noFill/>
-          <a:ln/>
-        </p:spPr>
-        <p:txBody>
-          <a:bodyPr wrap="square" lIns="0" tIns="0" rIns="0" bIns="0" rtlCol="0" anchor="ctr"/>
-          <a:lstStyle/>
-          <a:p>
-            <a:pPr indent="0" marL="0">
-              <a:buNone/>
-            </a:pPr>
-            <a:r>
-              <a:rPr lang="en-US" sz="1600" b="1" dirty="0">
-                <a:solidFill>
-                  <a:srgbClr val="0F2A52"/>
-                </a:solidFill>
-                <a:latin typeface="Calibri" pitchFamily="34" charset="0"/>
-                <a:ea typeface="Calibri" pitchFamily="34" charset="-122"/>
-                <a:cs typeface="Calibri" pitchFamily="34" charset="-120"/>
-              </a:rPr>
-              <a:t>Both arrows → same Bronze</a:t>
-            </a:r>
-            <a:endParaRPr lang="en-US" sz="1600" dirty="0"/>
-          </a:p>
-        </p:txBody>
-      </p:sp>
-      <p:sp>
-        <p:nvSpPr>
-          <p:cNvPr id="8" name="Text 6"/>
-          <p:cNvSpPr/>
-          <p:nvPr/>
-        </p:nvSpPr>
-        <p:spPr>
-          <a:xfrm>
-            <a:off x="685800" y="2971800"/>
-            <a:ext cx="2240280" cy="1417320"/>
-          </a:xfrm>
-          <a:prstGeom prst="rect">
-            <a:avLst/>
-          </a:prstGeom>
-          <a:noFill/>
-          <a:ln/>
-        </p:spPr>
-        <p:txBody>
-          <a:bodyPr wrap="square" lIns="0" tIns="0" rIns="0" bIns="0" rtlCol="0" anchor="ctr"/>
-          <a:lstStyle/>
-          <a:p>
-            <a:pPr indent="0" marL="0">
-              <a:buNone/>
-            </a:pPr>
-            <a:r>
-              <a:rPr lang="en-US" sz="1200" dirty="0">
+              <a:rPr lang="en-US" sz="1300" b="1" dirty="0">
+                <a:solidFill>
+                  <a:srgbClr val="005A9E"/>
+                </a:solidFill>
+                <a:latin typeface="Segoe UI" pitchFamily="34" charset="0"/>
+                <a:ea typeface="Segoe UI" pitchFamily="34" charset="-122"/>
+                <a:cs typeface="Segoe UI" pitchFamily="34" charset="-120"/>
+              </a:rPr>
+              <a:t>⚡ Streaming</a:t>
+            </a:r>
+            <a:endParaRPr lang="en-US" sz="1300" dirty="0"/>
+          </a:p>
+        </p:txBody>
+      </p:sp>
+      <p:sp>
+        <p:nvSpPr>
+          <p:cNvPr id="5" name="Text 3"/>
+          <p:cNvSpPr/>
+          <p:nvPr/>
+        </p:nvSpPr>
+        <p:spPr>
+          <a:xfrm>
+            <a:off x="457200" y="1664208"/>
+            <a:ext cx="1508760" cy="457200"/>
+          </a:xfrm>
+          <a:prstGeom prst="rect">
+            <a:avLst/>
+          </a:prstGeom>
+          <a:noFill/>
+          <a:ln/>
+        </p:spPr>
+        <p:txBody>
+          <a:bodyPr wrap="square" lIns="0" tIns="0" rIns="0" bIns="0" rtlCol="0" anchor="ctr"/>
+          <a:lstStyle/>
+          <a:p>
+            <a:pPr algn="ctr" indent="0" marL="0">
+              <a:buNone/>
+            </a:pPr>
+            <a:r>
+              <a:rPr lang="en-US" sz="1000" dirty="0">
                 <a:solidFill>
                   <a:srgbClr val="1F2937"/>
                 </a:solidFill>
-                <a:latin typeface="Calibri" pitchFamily="34" charset="0"/>
-                <a:ea typeface="Calibri" pitchFamily="34" charset="-122"/>
-                <a:cs typeface="Calibri" pitchFamily="34" charset="-120"/>
-              </a:rPr>
-              <a:t>Streaming and batch terminate at the same Bronze table. The unification claim made literal in the storage layer.</a:t>
-            </a:r>
-            <a:endParaRPr lang="en-US" sz="1200" dirty="0"/>
-          </a:p>
-        </p:txBody>
-      </p:sp>
-      <p:sp>
-        <p:nvSpPr>
-          <p:cNvPr id="9" name="Shape 7"/>
-          <p:cNvSpPr/>
-          <p:nvPr/>
-        </p:nvSpPr>
-        <p:spPr>
-          <a:xfrm>
-            <a:off x="3337560" y="1417320"/>
-            <a:ext cx="2697480" cy="3108960"/>
+                <a:latin typeface="Segoe UI" pitchFamily="34" charset="0"/>
+                <a:ea typeface="Segoe UI" pitchFamily="34" charset="-122"/>
+                <a:cs typeface="Segoe UI" pitchFamily="34" charset="-120"/>
+              </a:rPr>
+              <a:t>Event Hubs (Kafka)</a:t>
+            </a:r>
+            <a:endParaRPr lang="en-US" sz="1000" dirty="0"/>
+          </a:p>
+          <a:p>
+            <a:pPr algn="ctr" indent="0" marL="0">
+              <a:buNone/>
+            </a:pPr>
+            <a:r>
+              <a:rPr lang="en-US" sz="1000" dirty="0">
+                <a:solidFill>
+                  <a:srgbClr val="1F2937"/>
+                </a:solidFill>
+                <a:latin typeface="Segoe UI" pitchFamily="34" charset="0"/>
+                <a:ea typeface="Segoe UI" pitchFamily="34" charset="-122"/>
+                <a:cs typeface="Segoe UI" pitchFamily="34" charset="-120"/>
+              </a:rPr>
+              <a:t>CNC telemetry</a:t>
+            </a:r>
+            <a:endParaRPr lang="en-US" sz="1000" dirty="0"/>
+          </a:p>
+        </p:txBody>
+      </p:sp>
+      <p:sp>
+        <p:nvSpPr>
+          <p:cNvPr id="6" name="Shape 4"/>
+          <p:cNvSpPr/>
+          <p:nvPr/>
+        </p:nvSpPr>
+        <p:spPr>
+          <a:xfrm>
+            <a:off x="457200" y="2468880"/>
+            <a:ext cx="1508760" cy="777240"/>
           </a:xfrm>
           <a:prstGeom prst="roundRect">
             <a:avLst>
-              <a:gd name="adj" fmla="val 2712"/>
+              <a:gd name="adj" fmla="val 7059"/>
             </a:avLst>
           </a:prstGeom>
           <a:solidFill>
             <a:srgbClr val="EFF6FC"/>
           </a:solidFill>
-          <a:ln w="9525">
+          <a:ln w="12700">
             <a:solidFill>
               <a:srgbClr val="0078D4"/>
             </a:solidFill>
@@ -3133,161 +3085,650 @@
       </p:sp>
       <p:sp>
         <p:nvSpPr>
+          <p:cNvPr id="7" name="Text 5"/>
+          <p:cNvSpPr/>
+          <p:nvPr/>
+        </p:nvSpPr>
+        <p:spPr>
+          <a:xfrm>
+            <a:off x="457200" y="2514600"/>
+            <a:ext cx="1508760" cy="292608"/>
+          </a:xfrm>
+          <a:prstGeom prst="rect">
+            <a:avLst/>
+          </a:prstGeom>
+          <a:noFill/>
+          <a:ln/>
+        </p:spPr>
+        <p:txBody>
+          <a:bodyPr wrap="square" lIns="0" tIns="0" rIns="0" bIns="0" rtlCol="0" anchor="ctr"/>
+          <a:lstStyle/>
+          <a:p>
+            <a:pPr algn="ctr" indent="0" marL="0">
+              <a:buNone/>
+            </a:pPr>
+            <a:r>
+              <a:rPr lang="en-US" sz="1300" b="1" dirty="0">
+                <a:solidFill>
+                  <a:srgbClr val="005A9E"/>
+                </a:solidFill>
+                <a:latin typeface="Segoe UI" pitchFamily="34" charset="0"/>
+                <a:ea typeface="Segoe UI" pitchFamily="34" charset="-122"/>
+                <a:cs typeface="Segoe UI" pitchFamily="34" charset="-120"/>
+              </a:rPr>
+              <a:t>📦 Batch</a:t>
+            </a:r>
+            <a:endParaRPr lang="en-US" sz="1300" dirty="0"/>
+          </a:p>
+        </p:txBody>
+      </p:sp>
+      <p:sp>
+        <p:nvSpPr>
+          <p:cNvPr id="8" name="Text 6"/>
+          <p:cNvSpPr/>
+          <p:nvPr/>
+        </p:nvSpPr>
+        <p:spPr>
+          <a:xfrm>
+            <a:off x="457200" y="2807208"/>
+            <a:ext cx="1508760" cy="457200"/>
+          </a:xfrm>
+          <a:prstGeom prst="rect">
+            <a:avLst/>
+          </a:prstGeom>
+          <a:noFill/>
+          <a:ln/>
+        </p:spPr>
+        <p:txBody>
+          <a:bodyPr wrap="square" lIns="0" tIns="0" rIns="0" bIns="0" rtlCol="0" anchor="ctr"/>
+          <a:lstStyle/>
+          <a:p>
+            <a:pPr algn="ctr" indent="0" marL="0">
+              <a:buNone/>
+            </a:pPr>
+            <a:r>
+              <a:rPr lang="en-US" sz="1000" dirty="0">
+                <a:solidFill>
+                  <a:srgbClr val="1F2937"/>
+                </a:solidFill>
+                <a:latin typeface="Segoe UI" pitchFamily="34" charset="0"/>
+                <a:ea typeface="Segoe UI" pitchFamily="34" charset="-122"/>
+                <a:cs typeface="Segoe UI" pitchFamily="34" charset="-120"/>
+              </a:rPr>
+              <a:t>Auto Loader</a:t>
+            </a:r>
+            <a:endParaRPr lang="en-US" sz="1000" dirty="0"/>
+          </a:p>
+          <a:p>
+            <a:pPr algn="ctr" indent="0" marL="0">
+              <a:buNone/>
+            </a:pPr>
+            <a:r>
+              <a:rPr lang="en-US" sz="1000" dirty="0">
+                <a:solidFill>
+                  <a:srgbClr val="1F2937"/>
+                </a:solidFill>
+                <a:latin typeface="Segoe UI" pitchFamily="34" charset="0"/>
+                <a:ea typeface="Segoe UI" pitchFamily="34" charset="-122"/>
+                <a:cs typeface="Segoe UI" pitchFamily="34" charset="-120"/>
+              </a:rPr>
+              <a:t>SAP / MES files</a:t>
+            </a:r>
+            <a:endParaRPr lang="en-US" sz="1000" dirty="0"/>
+          </a:p>
+        </p:txBody>
+      </p:sp>
+      <p:sp>
+        <p:nvSpPr>
+          <p:cNvPr id="9" name="Shape 7"/>
+          <p:cNvSpPr/>
+          <p:nvPr/>
+        </p:nvSpPr>
+        <p:spPr>
+          <a:xfrm>
+            <a:off x="1965960" y="1709928"/>
+            <a:ext cx="640080" cy="484632"/>
+          </a:xfrm>
+          <a:prstGeom prst="line">
+            <a:avLst/>
+          </a:prstGeom>
+          <a:noFill/>
+          <a:ln w="19050">
+            <a:solidFill>
+              <a:srgbClr val="0F2A52"/>
+            </a:solidFill>
+            <a:prstDash val="solid"/>
+            <a:tailEnd type="triangle"/>
+          </a:ln>
+        </p:spPr>
+      </p:sp>
+      <p:sp>
+        <p:nvSpPr>
           <p:cNvPr id="10" name="Shape 8"/>
           <p:cNvSpPr/>
           <p:nvPr/>
         </p:nvSpPr>
         <p:spPr>
           <a:xfrm>
-            <a:off x="3566160" y="1645920"/>
-            <a:ext cx="502920" cy="502920"/>
-          </a:xfrm>
-          <a:prstGeom prst="ellipse">
-            <a:avLst/>
-          </a:prstGeom>
-          <a:solidFill>
-            <a:srgbClr val="0078D4"/>
-          </a:solidFill>
-          <a:ln/>
-        </p:spPr>
-      </p:sp>
-      <p:sp>
-        <p:nvSpPr>
-          <p:cNvPr id="11" name="Text 9"/>
-          <p:cNvSpPr/>
-          <p:nvPr/>
-        </p:nvSpPr>
-        <p:spPr>
-          <a:xfrm>
-            <a:off x="3566160" y="1645920"/>
-            <a:ext cx="502920" cy="502920"/>
-          </a:xfrm>
-          <a:prstGeom prst="rect">
-            <a:avLst/>
-          </a:prstGeom>
-          <a:noFill/>
-          <a:ln/>
-        </p:spPr>
-        <p:txBody>
-          <a:bodyPr wrap="square" lIns="0" tIns="0" rIns="0" bIns="0" rtlCol="0" anchor="ctr"/>
-          <a:lstStyle/>
-          <a:p>
-            <a:pPr algn="ctr" indent="0" marL="0">
-              <a:buNone/>
-            </a:pPr>
-            <a:r>
-              <a:rPr lang="en-US" sz="2000" b="1" dirty="0">
-                <a:solidFill>
-                  <a:srgbClr val="FFFFFF"/>
-                </a:solidFill>
-                <a:latin typeface="Calibri" pitchFamily="34" charset="0"/>
-                <a:ea typeface="Calibri" pitchFamily="34" charset="-122"/>
-                <a:cs typeface="Calibri" pitchFamily="34" charset="-120"/>
-              </a:rPr>
-              <a:t>2</a:t>
-            </a:r>
-            <a:endParaRPr lang="en-US" sz="2000" dirty="0"/>
-          </a:p>
-        </p:txBody>
-      </p:sp>
-      <p:sp>
-        <p:nvSpPr>
-          <p:cNvPr id="12" name="Text 10"/>
-          <p:cNvSpPr/>
-          <p:nvPr/>
-        </p:nvSpPr>
-        <p:spPr>
-          <a:xfrm>
-            <a:off x="3566160" y="2286000"/>
-            <a:ext cx="2240280" cy="640080"/>
-          </a:xfrm>
-          <a:prstGeom prst="rect">
-            <a:avLst/>
-          </a:prstGeom>
-          <a:noFill/>
-          <a:ln/>
-        </p:spPr>
-        <p:txBody>
-          <a:bodyPr wrap="square" lIns="0" tIns="0" rIns="0" bIns="0" rtlCol="0" anchor="ctr"/>
-          <a:lstStyle/>
-          <a:p>
-            <a:pPr indent="0" marL="0">
-              <a:buNone/>
-            </a:pPr>
-            <a:r>
-              <a:rPr lang="en-US" sz="1600" b="1" dirty="0">
-                <a:solidFill>
-                  <a:srgbClr val="0F2A52"/>
-                </a:solidFill>
-                <a:latin typeface="Calibri" pitchFamily="34" charset="0"/>
-                <a:ea typeface="Calibri" pitchFamily="34" charset="-122"/>
-                <a:cs typeface="Calibri" pitchFamily="34" charset="-120"/>
-              </a:rPr>
-              <a:t>Medallion on Delta Lake</a:t>
-            </a:r>
-            <a:endParaRPr lang="en-US" sz="1600" dirty="0"/>
-          </a:p>
-        </p:txBody>
-      </p:sp>
-      <p:sp>
-        <p:nvSpPr>
-          <p:cNvPr id="13" name="Text 11"/>
-          <p:cNvSpPr/>
-          <p:nvPr/>
-        </p:nvSpPr>
-        <p:spPr>
-          <a:xfrm>
-            <a:off x="3566160" y="2971800"/>
-            <a:ext cx="2240280" cy="1417320"/>
-          </a:xfrm>
-          <a:prstGeom prst="rect">
-            <a:avLst/>
-          </a:prstGeom>
-          <a:noFill/>
-          <a:ln/>
-        </p:spPr>
-        <p:txBody>
-          <a:bodyPr wrap="square" lIns="0" tIns="0" rIns="0" bIns="0" rtlCol="0" anchor="ctr"/>
-          <a:lstStyle/>
-          <a:p>
-            <a:pPr indent="0" marL="0">
-              <a:buNone/>
-            </a:pPr>
-            <a:r>
-              <a:rPr lang="en-US" sz="1200" dirty="0">
-                <a:solidFill>
-                  <a:srgbClr val="1F2937"/>
-                </a:solidFill>
-                <a:latin typeface="Calibri" pitchFamily="34" charset="0"/>
-                <a:ea typeface="Calibri" pitchFamily="34" charset="-122"/>
-                <a:cs typeface="Calibri" pitchFamily="34" charset="-120"/>
-              </a:rPr>
-              <a:t>Bronze → Silver → Gold under Databricks + Delta Lake. ACID concurrent writes, time travel, schema evolution.</a:t>
-            </a:r>
-            <a:endParaRPr lang="en-US" sz="1200" dirty="0"/>
-          </a:p>
-        </p:txBody>
-      </p:sp>
-      <p:sp>
-        <p:nvSpPr>
-          <p:cNvPr id="14" name="Shape 12"/>
-          <p:cNvSpPr/>
-          <p:nvPr/>
-        </p:nvSpPr>
-        <p:spPr>
-          <a:xfrm>
-            <a:off x="6217920" y="1417320"/>
-            <a:ext cx="2697480" cy="3108960"/>
+            <a:off x="1965960" y="2852928"/>
+            <a:ext cx="640080" cy="-475488"/>
+          </a:xfrm>
+          <a:prstGeom prst="line">
+            <a:avLst/>
+          </a:prstGeom>
+          <a:noFill/>
+          <a:ln w="19050">
+            <a:solidFill>
+              <a:srgbClr val="0F2A52"/>
+            </a:solidFill>
+            <a:prstDash val="solid"/>
+            <a:tailEnd type="triangle"/>
+          </a:ln>
+        </p:spPr>
+      </p:sp>
+      <p:sp>
+        <p:nvSpPr>
+          <p:cNvPr id="11" name="Shape 9"/>
+          <p:cNvSpPr/>
+          <p:nvPr/>
+        </p:nvSpPr>
+        <p:spPr>
+          <a:xfrm>
+            <a:off x="2606040" y="2011680"/>
+            <a:ext cx="1143000" cy="777240"/>
           </a:xfrm>
           <a:prstGeom prst="roundRect">
             <a:avLst>
-              <a:gd name="adj" fmla="val 2712"/>
+              <a:gd name="adj" fmla="val 9412"/>
+            </a:avLst>
+          </a:prstGeom>
+          <a:solidFill>
+            <a:srgbClr val="FFFFFF"/>
+          </a:solidFill>
+          <a:ln w="19050">
+            <a:solidFill>
+              <a:srgbClr val="B08D57"/>
+            </a:solidFill>
+            <a:prstDash val="solid"/>
+          </a:ln>
+          <a:effectLst>
+            <a:outerShdw sx="100000" sy="100000" kx="0" ky="0" algn="bl" rotWithShape="0" blurRad="76200" dist="12700" dir="5400000">
+              <a:srgbClr val="000000">
+                <a:alpha val="8000"/>
+              </a:srgbClr>
+            </a:outerShdw>
+          </a:effectLst>
+        </p:spPr>
+      </p:sp>
+      <p:sp>
+        <p:nvSpPr>
+          <p:cNvPr id="12" name="Shape 10"/>
+          <p:cNvSpPr/>
+          <p:nvPr/>
+        </p:nvSpPr>
+        <p:spPr>
+          <a:xfrm>
+            <a:off x="2606040" y="2011680"/>
+            <a:ext cx="1143000" cy="73152"/>
+          </a:xfrm>
+          <a:prstGeom prst="rect">
+            <a:avLst/>
+          </a:prstGeom>
+          <a:solidFill>
+            <a:srgbClr val="B08D57"/>
+          </a:solidFill>
+          <a:ln/>
+        </p:spPr>
+      </p:sp>
+      <p:sp>
+        <p:nvSpPr>
+          <p:cNvPr id="13" name="Text 11"/>
+          <p:cNvSpPr/>
+          <p:nvPr/>
+        </p:nvSpPr>
+        <p:spPr>
+          <a:xfrm>
+            <a:off x="2606040" y="2103120"/>
+            <a:ext cx="1143000" cy="384048"/>
+          </a:xfrm>
+          <a:prstGeom prst="rect">
+            <a:avLst/>
+          </a:prstGeom>
+          <a:noFill/>
+          <a:ln/>
+        </p:spPr>
+        <p:txBody>
+          <a:bodyPr wrap="square" lIns="0" tIns="0" rIns="0" bIns="0" rtlCol="0" anchor="ctr"/>
+          <a:lstStyle/>
+          <a:p>
+            <a:pPr algn="ctr" indent="0" marL="0">
+              <a:buNone/>
+            </a:pPr>
+            <a:r>
+              <a:rPr lang="en-US" sz="1400" b="1" dirty="0">
+                <a:solidFill>
+                  <a:srgbClr val="0F2A52"/>
+                </a:solidFill>
+                <a:latin typeface="Segoe UI" pitchFamily="34" charset="0"/>
+                <a:ea typeface="Segoe UI" pitchFamily="34" charset="-122"/>
+                <a:cs typeface="Segoe UI" pitchFamily="34" charset="-120"/>
+              </a:rPr>
+              <a:t>Bronze</a:t>
+            </a:r>
+            <a:endParaRPr lang="en-US" sz="1400" dirty="0"/>
+          </a:p>
+        </p:txBody>
+      </p:sp>
+      <p:sp>
+        <p:nvSpPr>
+          <p:cNvPr id="14" name="Text 12"/>
+          <p:cNvSpPr/>
+          <p:nvPr/>
+        </p:nvSpPr>
+        <p:spPr>
+          <a:xfrm>
+            <a:off x="2606040" y="2468880"/>
+            <a:ext cx="1143000" cy="256032"/>
+          </a:xfrm>
+          <a:prstGeom prst="rect">
+            <a:avLst/>
+          </a:prstGeom>
+          <a:noFill/>
+          <a:ln/>
+        </p:spPr>
+        <p:txBody>
+          <a:bodyPr wrap="square" lIns="0" tIns="0" rIns="0" bIns="0" rtlCol="0" anchor="ctr"/>
+          <a:lstStyle/>
+          <a:p>
+            <a:pPr algn="ctr" indent="0" marL="0">
+              <a:buNone/>
+            </a:pPr>
+            <a:r>
+              <a:rPr lang="en-US" sz="1000" i="1" dirty="0">
+                <a:solidFill>
+                  <a:srgbClr val="6B7280"/>
+                </a:solidFill>
+                <a:latin typeface="Segoe UI" pitchFamily="34" charset="0"/>
+                <a:ea typeface="Segoe UI" pitchFamily="34" charset="-122"/>
+                <a:cs typeface="Segoe UI" pitchFamily="34" charset="-120"/>
+              </a:rPr>
+              <a:t>Delta</a:t>
+            </a:r>
+            <a:endParaRPr lang="en-US" sz="1000" dirty="0"/>
+          </a:p>
+        </p:txBody>
+      </p:sp>
+      <p:sp>
+        <p:nvSpPr>
+          <p:cNvPr id="15" name="Shape 13"/>
+          <p:cNvSpPr/>
+          <p:nvPr/>
+        </p:nvSpPr>
+        <p:spPr>
+          <a:xfrm>
+            <a:off x="4023360" y="2011680"/>
+            <a:ext cx="1143000" cy="777240"/>
+          </a:xfrm>
+          <a:prstGeom prst="roundRect">
+            <a:avLst>
+              <a:gd name="adj" fmla="val 9412"/>
+            </a:avLst>
+          </a:prstGeom>
+          <a:solidFill>
+            <a:srgbClr val="FFFFFF"/>
+          </a:solidFill>
+          <a:ln w="19050">
+            <a:solidFill>
+              <a:srgbClr val="9CA3AF"/>
+            </a:solidFill>
+            <a:prstDash val="solid"/>
+          </a:ln>
+          <a:effectLst>
+            <a:outerShdw sx="100000" sy="100000" kx="0" ky="0" algn="bl" rotWithShape="0" blurRad="76200" dist="12700" dir="5400000">
+              <a:srgbClr val="000000">
+                <a:alpha val="8000"/>
+              </a:srgbClr>
+            </a:outerShdw>
+          </a:effectLst>
+        </p:spPr>
+      </p:sp>
+      <p:sp>
+        <p:nvSpPr>
+          <p:cNvPr id="16" name="Shape 14"/>
+          <p:cNvSpPr/>
+          <p:nvPr/>
+        </p:nvSpPr>
+        <p:spPr>
+          <a:xfrm>
+            <a:off x="4023360" y="2011680"/>
+            <a:ext cx="1143000" cy="73152"/>
+          </a:xfrm>
+          <a:prstGeom prst="rect">
+            <a:avLst/>
+          </a:prstGeom>
+          <a:solidFill>
+            <a:srgbClr val="9CA3AF"/>
+          </a:solidFill>
+          <a:ln/>
+        </p:spPr>
+      </p:sp>
+      <p:sp>
+        <p:nvSpPr>
+          <p:cNvPr id="17" name="Text 15"/>
+          <p:cNvSpPr/>
+          <p:nvPr/>
+        </p:nvSpPr>
+        <p:spPr>
+          <a:xfrm>
+            <a:off x="4023360" y="2103120"/>
+            <a:ext cx="1143000" cy="384048"/>
+          </a:xfrm>
+          <a:prstGeom prst="rect">
+            <a:avLst/>
+          </a:prstGeom>
+          <a:noFill/>
+          <a:ln/>
+        </p:spPr>
+        <p:txBody>
+          <a:bodyPr wrap="square" lIns="0" tIns="0" rIns="0" bIns="0" rtlCol="0" anchor="ctr"/>
+          <a:lstStyle/>
+          <a:p>
+            <a:pPr algn="ctr" indent="0" marL="0">
+              <a:buNone/>
+            </a:pPr>
+            <a:r>
+              <a:rPr lang="en-US" sz="1400" b="1" dirty="0">
+                <a:solidFill>
+                  <a:srgbClr val="0F2A52"/>
+                </a:solidFill>
+                <a:latin typeface="Segoe UI" pitchFamily="34" charset="0"/>
+                <a:ea typeface="Segoe UI" pitchFamily="34" charset="-122"/>
+                <a:cs typeface="Segoe UI" pitchFamily="34" charset="-120"/>
+              </a:rPr>
+              <a:t>Silver</a:t>
+            </a:r>
+            <a:endParaRPr lang="en-US" sz="1400" dirty="0"/>
+          </a:p>
+        </p:txBody>
+      </p:sp>
+      <p:sp>
+        <p:nvSpPr>
+          <p:cNvPr id="18" name="Text 16"/>
+          <p:cNvSpPr/>
+          <p:nvPr/>
+        </p:nvSpPr>
+        <p:spPr>
+          <a:xfrm>
+            <a:off x="4023360" y="2468880"/>
+            <a:ext cx="1143000" cy="256032"/>
+          </a:xfrm>
+          <a:prstGeom prst="rect">
+            <a:avLst/>
+          </a:prstGeom>
+          <a:noFill/>
+          <a:ln/>
+        </p:spPr>
+        <p:txBody>
+          <a:bodyPr wrap="square" lIns="0" tIns="0" rIns="0" bIns="0" rtlCol="0" anchor="ctr"/>
+          <a:lstStyle/>
+          <a:p>
+            <a:pPr algn="ctr" indent="0" marL="0">
+              <a:buNone/>
+            </a:pPr>
+            <a:r>
+              <a:rPr lang="en-US" sz="1000" i="1" dirty="0">
+                <a:solidFill>
+                  <a:srgbClr val="6B7280"/>
+                </a:solidFill>
+                <a:latin typeface="Segoe UI" pitchFamily="34" charset="0"/>
+                <a:ea typeface="Segoe UI" pitchFamily="34" charset="-122"/>
+                <a:cs typeface="Segoe UI" pitchFamily="34" charset="-120"/>
+              </a:rPr>
+              <a:t>Delta</a:t>
+            </a:r>
+            <a:endParaRPr lang="en-US" sz="1000" dirty="0"/>
+          </a:p>
+        </p:txBody>
+      </p:sp>
+      <p:sp>
+        <p:nvSpPr>
+          <p:cNvPr id="19" name="Shape 17"/>
+          <p:cNvSpPr/>
+          <p:nvPr/>
+        </p:nvSpPr>
+        <p:spPr>
+          <a:xfrm>
+            <a:off x="5440680" y="2011680"/>
+            <a:ext cx="1143000" cy="777240"/>
+          </a:xfrm>
+          <a:prstGeom prst="roundRect">
+            <a:avLst>
+              <a:gd name="adj" fmla="val 9412"/>
+            </a:avLst>
+          </a:prstGeom>
+          <a:solidFill>
+            <a:srgbClr val="FFFFFF"/>
+          </a:solidFill>
+          <a:ln w="19050">
+            <a:solidFill>
+              <a:srgbClr val="D4A23A"/>
+            </a:solidFill>
+            <a:prstDash val="solid"/>
+          </a:ln>
+          <a:effectLst>
+            <a:outerShdw sx="100000" sy="100000" kx="0" ky="0" algn="bl" rotWithShape="0" blurRad="76200" dist="12700" dir="5400000">
+              <a:srgbClr val="000000">
+                <a:alpha val="8000"/>
+              </a:srgbClr>
+            </a:outerShdw>
+          </a:effectLst>
+        </p:spPr>
+      </p:sp>
+      <p:sp>
+        <p:nvSpPr>
+          <p:cNvPr id="20" name="Shape 18"/>
+          <p:cNvSpPr/>
+          <p:nvPr/>
+        </p:nvSpPr>
+        <p:spPr>
+          <a:xfrm>
+            <a:off x="5440680" y="2011680"/>
+            <a:ext cx="1143000" cy="73152"/>
+          </a:xfrm>
+          <a:prstGeom prst="rect">
+            <a:avLst/>
+          </a:prstGeom>
+          <a:solidFill>
+            <a:srgbClr val="D4A23A"/>
+          </a:solidFill>
+          <a:ln/>
+        </p:spPr>
+      </p:sp>
+      <p:sp>
+        <p:nvSpPr>
+          <p:cNvPr id="21" name="Text 19"/>
+          <p:cNvSpPr/>
+          <p:nvPr/>
+        </p:nvSpPr>
+        <p:spPr>
+          <a:xfrm>
+            <a:off x="5440680" y="2103120"/>
+            <a:ext cx="1143000" cy="384048"/>
+          </a:xfrm>
+          <a:prstGeom prst="rect">
+            <a:avLst/>
+          </a:prstGeom>
+          <a:noFill/>
+          <a:ln/>
+        </p:spPr>
+        <p:txBody>
+          <a:bodyPr wrap="square" lIns="0" tIns="0" rIns="0" bIns="0" rtlCol="0" anchor="ctr"/>
+          <a:lstStyle/>
+          <a:p>
+            <a:pPr algn="ctr" indent="0" marL="0">
+              <a:buNone/>
+            </a:pPr>
+            <a:r>
+              <a:rPr lang="en-US" sz="1400" b="1" dirty="0">
+                <a:solidFill>
+                  <a:srgbClr val="0F2A52"/>
+                </a:solidFill>
+                <a:latin typeface="Segoe UI" pitchFamily="34" charset="0"/>
+                <a:ea typeface="Segoe UI" pitchFamily="34" charset="-122"/>
+                <a:cs typeface="Segoe UI" pitchFamily="34" charset="-120"/>
+              </a:rPr>
+              <a:t>Gold</a:t>
+            </a:r>
+            <a:endParaRPr lang="en-US" sz="1400" dirty="0"/>
+          </a:p>
+        </p:txBody>
+      </p:sp>
+      <p:sp>
+        <p:nvSpPr>
+          <p:cNvPr id="22" name="Text 20"/>
+          <p:cNvSpPr/>
+          <p:nvPr/>
+        </p:nvSpPr>
+        <p:spPr>
+          <a:xfrm>
+            <a:off x="5440680" y="2468880"/>
+            <a:ext cx="1143000" cy="256032"/>
+          </a:xfrm>
+          <a:prstGeom prst="rect">
+            <a:avLst/>
+          </a:prstGeom>
+          <a:noFill/>
+          <a:ln/>
+        </p:spPr>
+        <p:txBody>
+          <a:bodyPr wrap="square" lIns="0" tIns="0" rIns="0" bIns="0" rtlCol="0" anchor="ctr"/>
+          <a:lstStyle/>
+          <a:p>
+            <a:pPr algn="ctr" indent="0" marL="0">
+              <a:buNone/>
+            </a:pPr>
+            <a:r>
+              <a:rPr lang="en-US" sz="1000" i="1" dirty="0">
+                <a:solidFill>
+                  <a:srgbClr val="6B7280"/>
+                </a:solidFill>
+                <a:latin typeface="Segoe UI" pitchFamily="34" charset="0"/>
+                <a:ea typeface="Segoe UI" pitchFamily="34" charset="-122"/>
+                <a:cs typeface="Segoe UI" pitchFamily="34" charset="-120"/>
+              </a:rPr>
+              <a:t>Delta</a:t>
+            </a:r>
+            <a:endParaRPr lang="en-US" sz="1000" dirty="0"/>
+          </a:p>
+        </p:txBody>
+      </p:sp>
+      <p:sp>
+        <p:nvSpPr>
+          <p:cNvPr id="23" name="Shape 21"/>
+          <p:cNvSpPr/>
+          <p:nvPr/>
+        </p:nvSpPr>
+        <p:spPr>
+          <a:xfrm>
+            <a:off x="3749040" y="2400300"/>
+            <a:ext cx="274320" cy="0"/>
+          </a:xfrm>
+          <a:prstGeom prst="line">
+            <a:avLst/>
+          </a:prstGeom>
+          <a:noFill/>
+          <a:ln w="19050">
+            <a:solidFill>
+              <a:srgbClr val="0F2A52"/>
+            </a:solidFill>
+            <a:prstDash val="solid"/>
+            <a:tailEnd type="triangle"/>
+          </a:ln>
+        </p:spPr>
+      </p:sp>
+      <p:sp>
+        <p:nvSpPr>
+          <p:cNvPr id="24" name="Shape 22"/>
+          <p:cNvSpPr/>
+          <p:nvPr/>
+        </p:nvSpPr>
+        <p:spPr>
+          <a:xfrm>
+            <a:off x="5166360" y="2400300"/>
+            <a:ext cx="274320" cy="0"/>
+          </a:xfrm>
+          <a:prstGeom prst="line">
+            <a:avLst/>
+          </a:prstGeom>
+          <a:noFill/>
+          <a:ln w="19050">
+            <a:solidFill>
+              <a:srgbClr val="0F2A52"/>
+            </a:solidFill>
+            <a:prstDash val="solid"/>
+            <a:tailEnd type="triangle"/>
+          </a:ln>
+        </p:spPr>
+      </p:sp>
+      <p:sp>
+        <p:nvSpPr>
+          <p:cNvPr id="25" name="Text 23"/>
+          <p:cNvSpPr/>
+          <p:nvPr/>
+        </p:nvSpPr>
+        <p:spPr>
+          <a:xfrm>
+            <a:off x="2606040" y="2926080"/>
+            <a:ext cx="3977640" cy="256032"/>
+          </a:xfrm>
+          <a:prstGeom prst="rect">
+            <a:avLst/>
+          </a:prstGeom>
+          <a:noFill/>
+          <a:ln/>
+        </p:spPr>
+        <p:txBody>
+          <a:bodyPr wrap="square" lIns="0" tIns="0" rIns="0" bIns="0" rtlCol="0" anchor="ctr"/>
+          <a:lstStyle/>
+          <a:p>
+            <a:pPr algn="ctr" indent="0" marL="0">
+              <a:buNone/>
+            </a:pPr>
+            <a:r>
+              <a:rPr lang="en-US" sz="1000" i="1" dirty="0">
+                <a:solidFill>
+                  <a:srgbClr val="6B7280"/>
+                </a:solidFill>
+                <a:latin typeface="Segoe UI" pitchFamily="34" charset="0"/>
+                <a:ea typeface="Segoe UI" pitchFamily="34" charset="-122"/>
+                <a:cs typeface="Segoe UI" pitchFamily="34" charset="-120"/>
+              </a:rPr>
+              <a:t>Databricks Lakehouse on Delta Lake</a:t>
+            </a:r>
+            <a:endParaRPr lang="en-US" sz="1000" dirty="0"/>
+          </a:p>
+        </p:txBody>
+      </p:sp>
+      <p:sp>
+        <p:nvSpPr>
+          <p:cNvPr id="26" name="Shape 24"/>
+          <p:cNvSpPr/>
+          <p:nvPr/>
+        </p:nvSpPr>
+        <p:spPr>
+          <a:xfrm>
+            <a:off x="7040880" y="1143000"/>
+            <a:ext cx="1691640" cy="777240"/>
+          </a:xfrm>
+          <a:prstGeom prst="roundRect">
+            <a:avLst>
+              <a:gd name="adj" fmla="val 7059"/>
             </a:avLst>
           </a:prstGeom>
           <a:solidFill>
             <a:srgbClr val="EFF6FC"/>
           </a:solidFill>
-          <a:ln w="9525">
+          <a:ln w="12700">
             <a:solidFill>
               <a:srgbClr val="0078D4"/>
             </a:solidFill>
@@ -3297,14 +3738,401 @@
       </p:sp>
       <p:sp>
         <p:nvSpPr>
-          <p:cNvPr id="15" name="Shape 13"/>
-          <p:cNvSpPr/>
-          <p:nvPr/>
-        </p:nvSpPr>
-        <p:spPr>
-          <a:xfrm>
-            <a:off x="6446520" y="1645920"/>
-            <a:ext cx="502920" cy="502920"/>
+          <p:cNvPr id="27" name="Text 25"/>
+          <p:cNvSpPr/>
+          <p:nvPr/>
+        </p:nvSpPr>
+        <p:spPr>
+          <a:xfrm>
+            <a:off x="7040880" y="1188720"/>
+            <a:ext cx="1691640" cy="292608"/>
+          </a:xfrm>
+          <a:prstGeom prst="rect">
+            <a:avLst/>
+          </a:prstGeom>
+          <a:noFill/>
+          <a:ln/>
+        </p:spPr>
+        <p:txBody>
+          <a:bodyPr wrap="square" lIns="0" tIns="0" rIns="0" bIns="0" rtlCol="0" anchor="ctr"/>
+          <a:lstStyle/>
+          <a:p>
+            <a:pPr algn="ctr" indent="0" marL="0">
+              <a:buNone/>
+            </a:pPr>
+            <a:r>
+              <a:rPr lang="en-US" sz="1300" b="1" dirty="0">
+                <a:solidFill>
+                  <a:srgbClr val="005A9E"/>
+                </a:solidFill>
+                <a:latin typeface="Segoe UI" pitchFamily="34" charset="0"/>
+                <a:ea typeface="Segoe UI" pitchFamily="34" charset="-122"/>
+                <a:cs typeface="Segoe UI" pitchFamily="34" charset="-120"/>
+              </a:rPr>
+              <a:t>Real-time</a:t>
+            </a:r>
+            <a:endParaRPr lang="en-US" sz="1300" dirty="0"/>
+          </a:p>
+        </p:txBody>
+      </p:sp>
+      <p:sp>
+        <p:nvSpPr>
+          <p:cNvPr id="28" name="Text 26"/>
+          <p:cNvSpPr/>
+          <p:nvPr/>
+        </p:nvSpPr>
+        <p:spPr>
+          <a:xfrm>
+            <a:off x="7040880" y="1481328"/>
+            <a:ext cx="1691640" cy="411480"/>
+          </a:xfrm>
+          <a:prstGeom prst="rect">
+            <a:avLst/>
+          </a:prstGeom>
+          <a:noFill/>
+          <a:ln/>
+        </p:spPr>
+        <p:txBody>
+          <a:bodyPr wrap="square" lIns="0" tIns="0" rIns="0" bIns="0" rtlCol="0" anchor="ctr"/>
+          <a:lstStyle/>
+          <a:p>
+            <a:pPr algn="ctr" indent="0" marL="0">
+              <a:buNone/>
+            </a:pPr>
+            <a:r>
+              <a:rPr lang="en-US" sz="1000" dirty="0">
+                <a:solidFill>
+                  <a:srgbClr val="1F2937"/>
+                </a:solidFill>
+                <a:latin typeface="Segoe UI" pitchFamily="34" charset="0"/>
+                <a:ea typeface="Segoe UI" pitchFamily="34" charset="-122"/>
+                <a:cs typeface="Segoe UI" pitchFamily="34" charset="-120"/>
+              </a:rPr>
+              <a:t>Power BI live tiles</a:t>
+            </a:r>
+            <a:endParaRPr lang="en-US" sz="1000" dirty="0"/>
+          </a:p>
+        </p:txBody>
+      </p:sp>
+      <p:sp>
+        <p:nvSpPr>
+          <p:cNvPr id="29" name="Shape 27"/>
+          <p:cNvSpPr/>
+          <p:nvPr/>
+        </p:nvSpPr>
+        <p:spPr>
+          <a:xfrm>
+            <a:off x="6583680" y="2400300"/>
+            <a:ext cx="457200" cy="-873252"/>
+          </a:xfrm>
+          <a:prstGeom prst="line">
+            <a:avLst/>
+          </a:prstGeom>
+          <a:noFill/>
+          <a:ln w="19050">
+            <a:solidFill>
+              <a:srgbClr val="0F2A52"/>
+            </a:solidFill>
+            <a:prstDash val="solid"/>
+            <a:tailEnd type="triangle"/>
+          </a:ln>
+        </p:spPr>
+      </p:sp>
+      <p:sp>
+        <p:nvSpPr>
+          <p:cNvPr id="30" name="Shape 28"/>
+          <p:cNvSpPr/>
+          <p:nvPr/>
+        </p:nvSpPr>
+        <p:spPr>
+          <a:xfrm>
+            <a:off x="7040880" y="2011680"/>
+            <a:ext cx="1691640" cy="777240"/>
+          </a:xfrm>
+          <a:prstGeom prst="roundRect">
+            <a:avLst>
+              <a:gd name="adj" fmla="val 7059"/>
+            </a:avLst>
+          </a:prstGeom>
+          <a:solidFill>
+            <a:srgbClr val="EFF6FC"/>
+          </a:solidFill>
+          <a:ln w="12700">
+            <a:solidFill>
+              <a:srgbClr val="0078D4"/>
+            </a:solidFill>
+            <a:prstDash val="solid"/>
+          </a:ln>
+        </p:spPr>
+      </p:sp>
+      <p:sp>
+        <p:nvSpPr>
+          <p:cNvPr id="31" name="Text 29"/>
+          <p:cNvSpPr/>
+          <p:nvPr/>
+        </p:nvSpPr>
+        <p:spPr>
+          <a:xfrm>
+            <a:off x="7040880" y="2057400"/>
+            <a:ext cx="1691640" cy="292608"/>
+          </a:xfrm>
+          <a:prstGeom prst="rect">
+            <a:avLst/>
+          </a:prstGeom>
+          <a:noFill/>
+          <a:ln/>
+        </p:spPr>
+        <p:txBody>
+          <a:bodyPr wrap="square" lIns="0" tIns="0" rIns="0" bIns="0" rtlCol="0" anchor="ctr"/>
+          <a:lstStyle/>
+          <a:p>
+            <a:pPr algn="ctr" indent="0" marL="0">
+              <a:buNone/>
+            </a:pPr>
+            <a:r>
+              <a:rPr lang="en-US" sz="1300" b="1" dirty="0">
+                <a:solidFill>
+                  <a:srgbClr val="005A9E"/>
+                </a:solidFill>
+                <a:latin typeface="Segoe UI" pitchFamily="34" charset="0"/>
+                <a:ea typeface="Segoe UI" pitchFamily="34" charset="-122"/>
+                <a:cs typeface="Segoe UI" pitchFamily="34" charset="-120"/>
+              </a:rPr>
+              <a:t>Analytics</a:t>
+            </a:r>
+            <a:endParaRPr lang="en-US" sz="1300" dirty="0"/>
+          </a:p>
+        </p:txBody>
+      </p:sp>
+      <p:sp>
+        <p:nvSpPr>
+          <p:cNvPr id="32" name="Text 30"/>
+          <p:cNvSpPr/>
+          <p:nvPr/>
+        </p:nvSpPr>
+        <p:spPr>
+          <a:xfrm>
+            <a:off x="7040880" y="2350008"/>
+            <a:ext cx="1691640" cy="411480"/>
+          </a:xfrm>
+          <a:prstGeom prst="rect">
+            <a:avLst/>
+          </a:prstGeom>
+          <a:noFill/>
+          <a:ln/>
+        </p:spPr>
+        <p:txBody>
+          <a:bodyPr wrap="square" lIns="0" tIns="0" rIns="0" bIns="0" rtlCol="0" anchor="ctr"/>
+          <a:lstStyle/>
+          <a:p>
+            <a:pPr algn="ctr" indent="0" marL="0">
+              <a:buNone/>
+            </a:pPr>
+            <a:r>
+              <a:rPr lang="en-US" sz="1000" dirty="0">
+                <a:solidFill>
+                  <a:srgbClr val="1F2937"/>
+                </a:solidFill>
+                <a:latin typeface="Segoe UI" pitchFamily="34" charset="0"/>
+                <a:ea typeface="Segoe UI" pitchFamily="34" charset="-122"/>
+                <a:cs typeface="Segoe UI" pitchFamily="34" charset="-120"/>
+              </a:rPr>
+              <a:t>Synapse Serverless / Dedicated</a:t>
+            </a:r>
+            <a:endParaRPr lang="en-US" sz="1000" dirty="0"/>
+          </a:p>
+        </p:txBody>
+      </p:sp>
+      <p:sp>
+        <p:nvSpPr>
+          <p:cNvPr id="33" name="Shape 31"/>
+          <p:cNvSpPr/>
+          <p:nvPr/>
+        </p:nvSpPr>
+        <p:spPr>
+          <a:xfrm>
+            <a:off x="6583680" y="2400300"/>
+            <a:ext cx="457200" cy="-4572"/>
+          </a:xfrm>
+          <a:prstGeom prst="line">
+            <a:avLst/>
+          </a:prstGeom>
+          <a:noFill/>
+          <a:ln w="19050">
+            <a:solidFill>
+              <a:srgbClr val="0F2A52"/>
+            </a:solidFill>
+            <a:prstDash val="solid"/>
+            <a:tailEnd type="triangle"/>
+          </a:ln>
+        </p:spPr>
+      </p:sp>
+      <p:sp>
+        <p:nvSpPr>
+          <p:cNvPr id="34" name="Shape 32"/>
+          <p:cNvSpPr/>
+          <p:nvPr/>
+        </p:nvSpPr>
+        <p:spPr>
+          <a:xfrm>
+            <a:off x="7040880" y="2880360"/>
+            <a:ext cx="1691640" cy="777240"/>
+          </a:xfrm>
+          <a:prstGeom prst="roundRect">
+            <a:avLst>
+              <a:gd name="adj" fmla="val 7059"/>
+            </a:avLst>
+          </a:prstGeom>
+          <a:solidFill>
+            <a:srgbClr val="EFF6FC"/>
+          </a:solidFill>
+          <a:ln w="12700">
+            <a:solidFill>
+              <a:srgbClr val="0078D4"/>
+            </a:solidFill>
+            <a:prstDash val="solid"/>
+          </a:ln>
+        </p:spPr>
+      </p:sp>
+      <p:sp>
+        <p:nvSpPr>
+          <p:cNvPr id="35" name="Text 33"/>
+          <p:cNvSpPr/>
+          <p:nvPr/>
+        </p:nvSpPr>
+        <p:spPr>
+          <a:xfrm>
+            <a:off x="7040880" y="2926080"/>
+            <a:ext cx="1691640" cy="292608"/>
+          </a:xfrm>
+          <a:prstGeom prst="rect">
+            <a:avLst/>
+          </a:prstGeom>
+          <a:noFill/>
+          <a:ln/>
+        </p:spPr>
+        <p:txBody>
+          <a:bodyPr wrap="square" lIns="0" tIns="0" rIns="0" bIns="0" rtlCol="0" anchor="ctr"/>
+          <a:lstStyle/>
+          <a:p>
+            <a:pPr algn="ctr" indent="0" marL="0">
+              <a:buNone/>
+            </a:pPr>
+            <a:r>
+              <a:rPr lang="en-US" sz="1300" b="1" dirty="0">
+                <a:solidFill>
+                  <a:srgbClr val="005A9E"/>
+                </a:solidFill>
+                <a:latin typeface="Segoe UI" pitchFamily="34" charset="0"/>
+                <a:ea typeface="Segoe UI" pitchFamily="34" charset="-122"/>
+                <a:cs typeface="Segoe UI" pitchFamily="34" charset="-120"/>
+              </a:rPr>
+              <a:t>AI / ML</a:t>
+            </a:r>
+            <a:endParaRPr lang="en-US" sz="1300" dirty="0"/>
+          </a:p>
+        </p:txBody>
+      </p:sp>
+      <p:sp>
+        <p:nvSpPr>
+          <p:cNvPr id="36" name="Text 34"/>
+          <p:cNvSpPr/>
+          <p:nvPr/>
+        </p:nvSpPr>
+        <p:spPr>
+          <a:xfrm>
+            <a:off x="7040880" y="3218688"/>
+            <a:ext cx="1691640" cy="411480"/>
+          </a:xfrm>
+          <a:prstGeom prst="rect">
+            <a:avLst/>
+          </a:prstGeom>
+          <a:noFill/>
+          <a:ln/>
+        </p:spPr>
+        <p:txBody>
+          <a:bodyPr wrap="square" lIns="0" tIns="0" rIns="0" bIns="0" rtlCol="0" anchor="ctr"/>
+          <a:lstStyle/>
+          <a:p>
+            <a:pPr algn="ctr" indent="0" marL="0">
+              <a:buNone/>
+            </a:pPr>
+            <a:r>
+              <a:rPr lang="en-US" sz="1000" dirty="0">
+                <a:solidFill>
+                  <a:srgbClr val="1F2937"/>
+                </a:solidFill>
+                <a:latin typeface="Segoe UI" pitchFamily="34" charset="0"/>
+                <a:ea typeface="Segoe UI" pitchFamily="34" charset="-122"/>
+                <a:cs typeface="Segoe UI" pitchFamily="34" charset="-120"/>
+              </a:rPr>
+              <a:t>Offline + online feature store</a:t>
+            </a:r>
+            <a:endParaRPr lang="en-US" sz="1000" dirty="0"/>
+          </a:p>
+        </p:txBody>
+      </p:sp>
+      <p:sp>
+        <p:nvSpPr>
+          <p:cNvPr id="37" name="Shape 35"/>
+          <p:cNvSpPr/>
+          <p:nvPr/>
+        </p:nvSpPr>
+        <p:spPr>
+          <a:xfrm>
+            <a:off x="6583680" y="2400300"/>
+            <a:ext cx="457200" cy="864108"/>
+          </a:xfrm>
+          <a:prstGeom prst="line">
+            <a:avLst/>
+          </a:prstGeom>
+          <a:noFill/>
+          <a:ln w="19050">
+            <a:solidFill>
+              <a:srgbClr val="0F2A52"/>
+            </a:solidFill>
+            <a:prstDash val="solid"/>
+            <a:tailEnd type="triangle"/>
+          </a:ln>
+        </p:spPr>
+      </p:sp>
+      <p:sp>
+        <p:nvSpPr>
+          <p:cNvPr id="38" name="Shape 36"/>
+          <p:cNvSpPr/>
+          <p:nvPr/>
+        </p:nvSpPr>
+        <p:spPr>
+          <a:xfrm>
+            <a:off x="457200" y="4069080"/>
+            <a:ext cx="2697480" cy="502920"/>
+          </a:xfrm>
+          <a:prstGeom prst="roundRect">
+            <a:avLst>
+              <a:gd name="adj" fmla="val 10909"/>
+            </a:avLst>
+          </a:prstGeom>
+          <a:solidFill>
+            <a:srgbClr val="F8FAFC"/>
+          </a:solidFill>
+          <a:ln w="6350">
+            <a:solidFill>
+              <a:srgbClr val="E5E7EB"/>
+            </a:solidFill>
+            <a:prstDash val="solid"/>
+          </a:ln>
+        </p:spPr>
+      </p:sp>
+      <p:sp>
+        <p:nvSpPr>
+          <p:cNvPr id="39" name="Shape 37"/>
+          <p:cNvSpPr/>
+          <p:nvPr/>
+        </p:nvSpPr>
+        <p:spPr>
+          <a:xfrm>
+            <a:off x="594360" y="4187952"/>
+            <a:ext cx="274320" cy="274320"/>
           </a:xfrm>
           <a:prstGeom prst="ellipse">
             <a:avLst/>
@@ -3317,14 +4145,14 @@
       </p:sp>
       <p:sp>
         <p:nvSpPr>
-          <p:cNvPr id="16" name="Text 14"/>
-          <p:cNvSpPr/>
-          <p:nvPr/>
-        </p:nvSpPr>
-        <p:spPr>
-          <a:xfrm>
-            <a:off x="6446520" y="1645920"/>
-            <a:ext cx="502920" cy="502920"/>
+          <p:cNvPr id="40" name="Text 38"/>
+          <p:cNvSpPr/>
+          <p:nvPr/>
+        </p:nvSpPr>
+        <p:spPr>
+          <a:xfrm>
+            <a:off x="594360" y="4187952"/>
+            <a:ext cx="274320" cy="274320"/>
           </a:xfrm>
           <a:prstGeom prst="rect">
             <a:avLst/>
@@ -3340,30 +4168,280 @@
               <a:buNone/>
             </a:pPr>
             <a:r>
-              <a:rPr lang="en-US" sz="2000" b="1" dirty="0">
+              <a:rPr lang="en-US" sz="1200" b="1" dirty="0">
                 <a:solidFill>
                   <a:srgbClr val="FFFFFF"/>
                 </a:solidFill>
-                <a:latin typeface="Calibri" pitchFamily="34" charset="0"/>
-                <a:ea typeface="Calibri" pitchFamily="34" charset="-122"/>
-                <a:cs typeface="Calibri" pitchFamily="34" charset="-120"/>
+                <a:latin typeface="Segoe UI" pitchFamily="34" charset="0"/>
+                <a:ea typeface="Segoe UI" pitchFamily="34" charset="-122"/>
+                <a:cs typeface="Segoe UI" pitchFamily="34" charset="-120"/>
+              </a:rPr>
+              <a:t>1</a:t>
+            </a:r>
+            <a:endParaRPr lang="en-US" sz="1200" dirty="0"/>
+          </a:p>
+        </p:txBody>
+      </p:sp>
+      <p:sp>
+        <p:nvSpPr>
+          <p:cNvPr id="41" name="Text 39"/>
+          <p:cNvSpPr/>
+          <p:nvPr/>
+        </p:nvSpPr>
+        <p:spPr>
+          <a:xfrm>
+            <a:off x="960120" y="4114800"/>
+            <a:ext cx="2103120" cy="411480"/>
+          </a:xfrm>
+          <a:prstGeom prst="rect">
+            <a:avLst/>
+          </a:prstGeom>
+          <a:noFill/>
+          <a:ln/>
+        </p:spPr>
+        <p:txBody>
+          <a:bodyPr wrap="square" lIns="0" tIns="0" rIns="0" bIns="0" rtlCol="0" anchor="ctr"/>
+          <a:lstStyle/>
+          <a:p>
+            <a:pPr indent="0" marL="0">
+              <a:buNone/>
+            </a:pPr>
+            <a:r>
+              <a:rPr lang="en-US" sz="1000" dirty="0">
+                <a:solidFill>
+                  <a:srgbClr val="1F2937"/>
+                </a:solidFill>
+                <a:latin typeface="Segoe UI" pitchFamily="34" charset="0"/>
+                <a:ea typeface="Segoe UI" pitchFamily="34" charset="-122"/>
+                <a:cs typeface="Segoe UI" pitchFamily="34" charset="-120"/>
+              </a:rPr>
+              <a:t>Both arrows → same Bronze. Unification at the storage layer.</a:t>
+            </a:r>
+            <a:endParaRPr lang="en-US" sz="1000" dirty="0"/>
+          </a:p>
+        </p:txBody>
+      </p:sp>
+      <p:sp>
+        <p:nvSpPr>
+          <p:cNvPr id="42" name="Shape 40"/>
+          <p:cNvSpPr/>
+          <p:nvPr/>
+        </p:nvSpPr>
+        <p:spPr>
+          <a:xfrm>
+            <a:off x="3360420" y="4069080"/>
+            <a:ext cx="2697480" cy="502920"/>
+          </a:xfrm>
+          <a:prstGeom prst="roundRect">
+            <a:avLst>
+              <a:gd name="adj" fmla="val 10909"/>
+            </a:avLst>
+          </a:prstGeom>
+          <a:solidFill>
+            <a:srgbClr val="F8FAFC"/>
+          </a:solidFill>
+          <a:ln w="6350">
+            <a:solidFill>
+              <a:srgbClr val="E5E7EB"/>
+            </a:solidFill>
+            <a:prstDash val="solid"/>
+          </a:ln>
+        </p:spPr>
+      </p:sp>
+      <p:sp>
+        <p:nvSpPr>
+          <p:cNvPr id="43" name="Shape 41"/>
+          <p:cNvSpPr/>
+          <p:nvPr/>
+        </p:nvSpPr>
+        <p:spPr>
+          <a:xfrm>
+            <a:off x="3497580" y="4187952"/>
+            <a:ext cx="274320" cy="274320"/>
+          </a:xfrm>
+          <a:prstGeom prst="ellipse">
+            <a:avLst/>
+          </a:prstGeom>
+          <a:solidFill>
+            <a:srgbClr val="0078D4"/>
+          </a:solidFill>
+          <a:ln/>
+        </p:spPr>
+      </p:sp>
+      <p:sp>
+        <p:nvSpPr>
+          <p:cNvPr id="44" name="Text 42"/>
+          <p:cNvSpPr/>
+          <p:nvPr/>
+        </p:nvSpPr>
+        <p:spPr>
+          <a:xfrm>
+            <a:off x="3497580" y="4187952"/>
+            <a:ext cx="274320" cy="274320"/>
+          </a:xfrm>
+          <a:prstGeom prst="rect">
+            <a:avLst/>
+          </a:prstGeom>
+          <a:noFill/>
+          <a:ln/>
+        </p:spPr>
+        <p:txBody>
+          <a:bodyPr wrap="square" lIns="0" tIns="0" rIns="0" bIns="0" rtlCol="0" anchor="ctr"/>
+          <a:lstStyle/>
+          <a:p>
+            <a:pPr algn="ctr" indent="0" marL="0">
+              <a:buNone/>
+            </a:pPr>
+            <a:r>
+              <a:rPr lang="en-US" sz="1200" b="1" dirty="0">
+                <a:solidFill>
+                  <a:srgbClr val="FFFFFF"/>
+                </a:solidFill>
+                <a:latin typeface="Segoe UI" pitchFamily="34" charset="0"/>
+                <a:ea typeface="Segoe UI" pitchFamily="34" charset="-122"/>
+                <a:cs typeface="Segoe UI" pitchFamily="34" charset="-120"/>
+              </a:rPr>
+              <a:t>2</a:t>
+            </a:r>
+            <a:endParaRPr lang="en-US" sz="1200" dirty="0"/>
+          </a:p>
+        </p:txBody>
+      </p:sp>
+      <p:sp>
+        <p:nvSpPr>
+          <p:cNvPr id="45" name="Text 43"/>
+          <p:cNvSpPr/>
+          <p:nvPr/>
+        </p:nvSpPr>
+        <p:spPr>
+          <a:xfrm>
+            <a:off x="3863340" y="4114800"/>
+            <a:ext cx="2103120" cy="411480"/>
+          </a:xfrm>
+          <a:prstGeom prst="rect">
+            <a:avLst/>
+          </a:prstGeom>
+          <a:noFill/>
+          <a:ln/>
+        </p:spPr>
+        <p:txBody>
+          <a:bodyPr wrap="square" lIns="0" tIns="0" rIns="0" bIns="0" rtlCol="0" anchor="ctr"/>
+          <a:lstStyle/>
+          <a:p>
+            <a:pPr indent="0" marL="0">
+              <a:buNone/>
+            </a:pPr>
+            <a:r>
+              <a:rPr lang="en-US" sz="1000" dirty="0">
+                <a:solidFill>
+                  <a:srgbClr val="1F2937"/>
+                </a:solidFill>
+                <a:latin typeface="Segoe UI" pitchFamily="34" charset="0"/>
+                <a:ea typeface="Segoe UI" pitchFamily="34" charset="-122"/>
+                <a:cs typeface="Segoe UI" pitchFamily="34" charset="-120"/>
+              </a:rPr>
+              <a:t>Bronze → Silver → Gold on Delta Lake. ACID, time travel.</a:t>
+            </a:r>
+            <a:endParaRPr lang="en-US" sz="1000" dirty="0"/>
+          </a:p>
+        </p:txBody>
+      </p:sp>
+      <p:sp>
+        <p:nvSpPr>
+          <p:cNvPr id="46" name="Shape 44"/>
+          <p:cNvSpPr/>
+          <p:nvPr/>
+        </p:nvSpPr>
+        <p:spPr>
+          <a:xfrm>
+            <a:off x="6263640" y="4069080"/>
+            <a:ext cx="2697480" cy="502920"/>
+          </a:xfrm>
+          <a:prstGeom prst="roundRect">
+            <a:avLst>
+              <a:gd name="adj" fmla="val 10909"/>
+            </a:avLst>
+          </a:prstGeom>
+          <a:solidFill>
+            <a:srgbClr val="F8FAFC"/>
+          </a:solidFill>
+          <a:ln w="6350">
+            <a:solidFill>
+              <a:srgbClr val="E5E7EB"/>
+            </a:solidFill>
+            <a:prstDash val="solid"/>
+          </a:ln>
+        </p:spPr>
+      </p:sp>
+      <p:sp>
+        <p:nvSpPr>
+          <p:cNvPr id="47" name="Shape 45"/>
+          <p:cNvSpPr/>
+          <p:nvPr/>
+        </p:nvSpPr>
+        <p:spPr>
+          <a:xfrm>
+            <a:off x="6400800" y="4187952"/>
+            <a:ext cx="274320" cy="274320"/>
+          </a:xfrm>
+          <a:prstGeom prst="ellipse">
+            <a:avLst/>
+          </a:prstGeom>
+          <a:solidFill>
+            <a:srgbClr val="0078D4"/>
+          </a:solidFill>
+          <a:ln/>
+        </p:spPr>
+      </p:sp>
+      <p:sp>
+        <p:nvSpPr>
+          <p:cNvPr id="48" name="Text 46"/>
+          <p:cNvSpPr/>
+          <p:nvPr/>
+        </p:nvSpPr>
+        <p:spPr>
+          <a:xfrm>
+            <a:off x="6400800" y="4187952"/>
+            <a:ext cx="274320" cy="274320"/>
+          </a:xfrm>
+          <a:prstGeom prst="rect">
+            <a:avLst/>
+          </a:prstGeom>
+          <a:noFill/>
+          <a:ln/>
+        </p:spPr>
+        <p:txBody>
+          <a:bodyPr wrap="square" lIns="0" tIns="0" rIns="0" bIns="0" rtlCol="0" anchor="ctr"/>
+          <a:lstStyle/>
+          <a:p>
+            <a:pPr algn="ctr" indent="0" marL="0">
+              <a:buNone/>
+            </a:pPr>
+            <a:r>
+              <a:rPr lang="en-US" sz="1200" b="1" dirty="0">
+                <a:solidFill>
+                  <a:srgbClr val="FFFFFF"/>
+                </a:solidFill>
+                <a:latin typeface="Segoe UI" pitchFamily="34" charset="0"/>
+                <a:ea typeface="Segoe UI" pitchFamily="34" charset="-122"/>
+                <a:cs typeface="Segoe UI" pitchFamily="34" charset="-120"/>
               </a:rPr>
               <a:t>3</a:t>
             </a:r>
-            <a:endParaRPr lang="en-US" sz="2000" dirty="0"/>
-          </a:p>
-        </p:txBody>
-      </p:sp>
-      <p:sp>
-        <p:nvSpPr>
-          <p:cNvPr id="17" name="Text 15"/>
-          <p:cNvSpPr/>
-          <p:nvPr/>
-        </p:nvSpPr>
-        <p:spPr>
-          <a:xfrm>
-            <a:off x="6446520" y="2286000"/>
-            <a:ext cx="2240280" cy="640080"/>
+            <a:endParaRPr lang="en-US" sz="1200" dirty="0"/>
+          </a:p>
+        </p:txBody>
+      </p:sp>
+      <p:sp>
+        <p:nvSpPr>
+          <p:cNvPr id="49" name="Text 47"/>
+          <p:cNvSpPr/>
+          <p:nvPr/>
+        </p:nvSpPr>
+        <p:spPr>
+          <a:xfrm>
+            <a:off x="6766560" y="4114800"/>
+            <a:ext cx="2103120" cy="411480"/>
           </a:xfrm>
           <a:prstGeom prst="rect">
             <a:avLst/>
@@ -3379,62 +4457,23 @@
               <a:buNone/>
             </a:pPr>
             <a:r>
-              <a:rPr lang="en-US" sz="1600" b="1" dirty="0">
-                <a:solidFill>
-                  <a:srgbClr val="0F2A52"/>
-                </a:solidFill>
-                <a:latin typeface="Calibri" pitchFamily="34" charset="0"/>
-                <a:ea typeface="Calibri" pitchFamily="34" charset="-122"/>
-                <a:cs typeface="Calibri" pitchFamily="34" charset="-120"/>
-              </a:rPr>
-              <a:t>Three consumption boxes</a:t>
-            </a:r>
-            <a:endParaRPr lang="en-US" sz="1600" dirty="0"/>
-          </a:p>
-        </p:txBody>
-      </p:sp>
-      <p:sp>
-        <p:nvSpPr>
-          <p:cNvPr id="18" name="Text 16"/>
-          <p:cNvSpPr/>
-          <p:nvPr/>
-        </p:nvSpPr>
-        <p:spPr>
-          <a:xfrm>
-            <a:off x="6446520" y="2971800"/>
-            <a:ext cx="2240280" cy="1417320"/>
-          </a:xfrm>
-          <a:prstGeom prst="rect">
-            <a:avLst/>
-          </a:prstGeom>
-          <a:noFill/>
-          <a:ln/>
-        </p:spPr>
-        <p:txBody>
-          <a:bodyPr wrap="square" lIns="0" tIns="0" rIns="0" bIns="0" rtlCol="0" anchor="ctr"/>
-          <a:lstStyle/>
-          <a:p>
-            <a:pPr indent="0" marL="0">
-              <a:buNone/>
-            </a:pPr>
-            <a:r>
-              <a:rPr lang="en-US" sz="1200" dirty="0">
+              <a:rPr lang="en-US" sz="1000" dirty="0">
                 <a:solidFill>
                   <a:srgbClr val="1F2937"/>
                 </a:solidFill>
-                <a:latin typeface="Calibri" pitchFamily="34" charset="0"/>
-                <a:ea typeface="Calibri" pitchFamily="34" charset="-122"/>
-                <a:cs typeface="Calibri" pitchFamily="34" charset="-120"/>
-              </a:rPr>
-              <a:t>Real-time · Analytics · AI/ML. One per ask in the brief.</a:t>
-            </a:r>
-            <a:endParaRPr lang="en-US" sz="1200" dirty="0"/>
-          </a:p>
-        </p:txBody>
-      </p:sp>
-      <p:sp>
-        <p:nvSpPr>
-          <p:cNvPr id="19" name="Text 17"/>
+                <a:latin typeface="Segoe UI" pitchFamily="34" charset="0"/>
+                <a:ea typeface="Segoe UI" pitchFamily="34" charset="-122"/>
+                <a:cs typeface="Segoe UI" pitchFamily="34" charset="-120"/>
+              </a:rPr>
+              <a:t>Three consumers — one per ask in the brief.</a:t>
+            </a:r>
+            <a:endParaRPr lang="en-US" sz="1000" dirty="0"/>
+          </a:p>
+        </p:txBody>
+      </p:sp>
+      <p:sp>
+        <p:nvSpPr>
+          <p:cNvPr id="50" name="Text 48"/>
           <p:cNvSpPr/>
           <p:nvPr/>
         </p:nvSpPr>
@@ -3461,9 +4500,9 @@
                 <a:solidFill>
                   <a:srgbClr val="6B7280"/>
                 </a:solidFill>
-                <a:latin typeface="Calibri" pitchFamily="34" charset="0"/>
-                <a:ea typeface="Calibri" pitchFamily="34" charset="-122"/>
-                <a:cs typeface="Calibri" pitchFamily="34" charset="-120"/>
+                <a:latin typeface="Segoe UI" pitchFamily="34" charset="0"/>
+                <a:ea typeface="Segoe UI" pitchFamily="34" charset="-122"/>
+                <a:cs typeface="Segoe UI" pitchFamily="34" charset="-120"/>
               </a:rPr>
               <a:t>People10 Solutions Lab — Malappa</a:t>
             </a:r>
@@ -3473,7 +4512,7 @@
       </p:sp>
       <p:sp>
         <p:nvSpPr>
-          <p:cNvPr id="20" name="Text 18"/>
+          <p:cNvPr id="51" name="Text 49"/>
           <p:cNvSpPr/>
           <p:nvPr/>
         </p:nvSpPr>
@@ -3500,9 +4539,9 @@
                 <a:solidFill>
                   <a:srgbClr val="6B7280"/>
                 </a:solidFill>
-                <a:latin typeface="Calibri" pitchFamily="34" charset="0"/>
-                <a:ea typeface="Calibri" pitchFamily="34" charset="-122"/>
-                <a:cs typeface="Calibri" pitchFamily="34" charset="-120"/>
+                <a:latin typeface="Segoe UI" pitchFamily="34" charset="0"/>
+                <a:ea typeface="Segoe UI" pitchFamily="34" charset="-122"/>
+                <a:cs typeface="Segoe UI" pitchFamily="34" charset="-120"/>
               </a:rPr>
               <a:t>3 / 9</a:t>
             </a:r>
@@ -3571,9 +4610,9 @@
                 <a:solidFill>
                   <a:srgbClr val="0F2A52"/>
                 </a:solidFill>
-                <a:latin typeface="Calibri" pitchFamily="34" charset="0"/>
-                <a:ea typeface="Calibri" pitchFamily="34" charset="-122"/>
-                <a:cs typeface="Calibri" pitchFamily="34" charset="-120"/>
+                <a:latin typeface="Segoe UI" pitchFamily="34" charset="0"/>
+                <a:ea typeface="Segoe UI" pitchFamily="34" charset="-122"/>
+                <a:cs typeface="Segoe UI" pitchFamily="34" charset="-120"/>
               </a:rPr>
               <a:t>Why Delta Lake makes the medallion work</a:t>
             </a:r>
@@ -3583,113 +4622,243 @@
       </p:sp>
       <p:sp>
         <p:nvSpPr>
-          <p:cNvPr id="3" name="Text 1"/>
-          <p:cNvSpPr/>
-          <p:nvPr/>
-        </p:nvSpPr>
-        <p:spPr>
-          <a:xfrm>
-            <a:off x="457200" y="1280160"/>
-            <a:ext cx="5120640" cy="2743200"/>
-          </a:xfrm>
-          <a:prstGeom prst="rect">
-            <a:avLst/>
-          </a:prstGeom>
-          <a:noFill/>
-          <a:ln/>
-        </p:spPr>
-        <p:txBody>
-          <a:bodyPr wrap="square" rtlCol="0" anchor="ctr"/>
-          <a:lstStyle/>
-          <a:p>
-            <a:pPr marL="342900" indent="-342900">
-              <a:spcAft>
-                <a:spcPts val="800"/>
-              </a:spcAft>
-              <a:buSzPct val="100000"/>
-              <a:buChar char="●"/>
-            </a:pPr>
-            <a:r>
-              <a:rPr lang="en-US" sz="1600" dirty="0">
+          <p:cNvPr id="3" name="Shape 1"/>
+          <p:cNvSpPr/>
+          <p:nvPr/>
+        </p:nvSpPr>
+        <p:spPr>
+          <a:xfrm>
+            <a:off x="502920" y="1426464"/>
+            <a:ext cx="164592" cy="164592"/>
+          </a:xfrm>
+          <a:prstGeom prst="rect">
+            <a:avLst/>
+          </a:prstGeom>
+          <a:solidFill>
+            <a:srgbClr val="0078D4"/>
+          </a:solidFill>
+          <a:ln/>
+        </p:spPr>
+      </p:sp>
+      <p:sp>
+        <p:nvSpPr>
+          <p:cNvPr id="4" name="Text 2"/>
+          <p:cNvSpPr/>
+          <p:nvPr/>
+        </p:nvSpPr>
+        <p:spPr>
+          <a:xfrm>
+            <a:off x="795528" y="1280160"/>
+            <a:ext cx="4937760" cy="502920"/>
+          </a:xfrm>
+          <a:prstGeom prst="rect">
+            <a:avLst/>
+          </a:prstGeom>
+          <a:noFill/>
+          <a:ln/>
+        </p:spPr>
+        <p:txBody>
+          <a:bodyPr wrap="square" lIns="0" tIns="0" rIns="0" bIns="0" rtlCol="0" anchor="ctr"/>
+          <a:lstStyle/>
+          <a:p>
+            <a:pPr indent="0" marL="0">
+              <a:buNone/>
+            </a:pPr>
+            <a:r>
+              <a:rPr lang="en-US" sz="1500" dirty="0">
                 <a:solidFill>
                   <a:srgbClr val="1F2937"/>
                 </a:solidFill>
-                <a:latin typeface="Calibri" pitchFamily="34" charset="0"/>
-                <a:ea typeface="Calibri" pitchFamily="34" charset="-122"/>
-                <a:cs typeface="Calibri" pitchFamily="34" charset="-120"/>
+                <a:latin typeface="Segoe UI" pitchFamily="34" charset="0"/>
+                <a:ea typeface="Segoe UI" pitchFamily="34" charset="-122"/>
+                <a:cs typeface="Segoe UI" pitchFamily="34" charset="-120"/>
               </a:rPr>
               <a:t>Concurrent streaming + batch writes on the same table (ACID)</a:t>
             </a:r>
-            <a:endParaRPr lang="en-US" sz="1600" dirty="0"/>
-          </a:p>
-          <a:p>
-            <a:pPr marL="342900" indent="-342900">
-              <a:spcAft>
-                <a:spcPts val="800"/>
-              </a:spcAft>
-              <a:buSzPct val="100000"/>
-              <a:buChar char="●"/>
-            </a:pPr>
-            <a:r>
-              <a:rPr lang="en-US" sz="1600" dirty="0">
+            <a:endParaRPr lang="en-US" sz="1500" dirty="0"/>
+          </a:p>
+        </p:txBody>
+      </p:sp>
+      <p:sp>
+        <p:nvSpPr>
+          <p:cNvPr id="5" name="Shape 3"/>
+          <p:cNvSpPr/>
+          <p:nvPr/>
+        </p:nvSpPr>
+        <p:spPr>
+          <a:xfrm>
+            <a:off x="502920" y="2066544"/>
+            <a:ext cx="164592" cy="164592"/>
+          </a:xfrm>
+          <a:prstGeom prst="rect">
+            <a:avLst/>
+          </a:prstGeom>
+          <a:solidFill>
+            <a:srgbClr val="0078D4"/>
+          </a:solidFill>
+          <a:ln/>
+        </p:spPr>
+      </p:sp>
+      <p:sp>
+        <p:nvSpPr>
+          <p:cNvPr id="6" name="Text 4"/>
+          <p:cNvSpPr/>
+          <p:nvPr/>
+        </p:nvSpPr>
+        <p:spPr>
+          <a:xfrm>
+            <a:off x="795528" y="1920240"/>
+            <a:ext cx="4937760" cy="502920"/>
+          </a:xfrm>
+          <a:prstGeom prst="rect">
+            <a:avLst/>
+          </a:prstGeom>
+          <a:noFill/>
+          <a:ln/>
+        </p:spPr>
+        <p:txBody>
+          <a:bodyPr wrap="square" lIns="0" tIns="0" rIns="0" bIns="0" rtlCol="0" anchor="ctr"/>
+          <a:lstStyle/>
+          <a:p>
+            <a:pPr indent="0" marL="0">
+              <a:buNone/>
+            </a:pPr>
+            <a:r>
+              <a:rPr lang="en-US" sz="1500" dirty="0">
                 <a:solidFill>
                   <a:srgbClr val="1F2937"/>
                 </a:solidFill>
-                <a:latin typeface="Calibri" pitchFamily="34" charset="0"/>
-                <a:ea typeface="Calibri" pitchFamily="34" charset="-122"/>
-                <a:cs typeface="Calibri" pitchFamily="34" charset="-120"/>
+                <a:latin typeface="Segoe UI" pitchFamily="34" charset="0"/>
+                <a:ea typeface="Segoe UI" pitchFamily="34" charset="-122"/>
+                <a:cs typeface="Segoe UI" pitchFamily="34" charset="-120"/>
               </a:rPr>
               <a:t>Time travel for replay and audit</a:t>
             </a:r>
-            <a:endParaRPr lang="en-US" sz="1600" dirty="0"/>
-          </a:p>
-          <a:p>
-            <a:pPr marL="342900" indent="-342900">
-              <a:spcAft>
-                <a:spcPts val="800"/>
-              </a:spcAft>
-              <a:buSzPct val="100000"/>
-              <a:buChar char="●"/>
-            </a:pPr>
-            <a:r>
-              <a:rPr lang="en-US" sz="1600" dirty="0">
+            <a:endParaRPr lang="en-US" sz="1500" dirty="0"/>
+          </a:p>
+        </p:txBody>
+      </p:sp>
+      <p:sp>
+        <p:nvSpPr>
+          <p:cNvPr id="7" name="Shape 5"/>
+          <p:cNvSpPr/>
+          <p:nvPr/>
+        </p:nvSpPr>
+        <p:spPr>
+          <a:xfrm>
+            <a:off x="502920" y="2706624"/>
+            <a:ext cx="164592" cy="164592"/>
+          </a:xfrm>
+          <a:prstGeom prst="rect">
+            <a:avLst/>
+          </a:prstGeom>
+          <a:solidFill>
+            <a:srgbClr val="0078D4"/>
+          </a:solidFill>
+          <a:ln/>
+        </p:spPr>
+      </p:sp>
+      <p:sp>
+        <p:nvSpPr>
+          <p:cNvPr id="8" name="Text 6"/>
+          <p:cNvSpPr/>
+          <p:nvPr/>
+        </p:nvSpPr>
+        <p:spPr>
+          <a:xfrm>
+            <a:off x="795528" y="2560320"/>
+            <a:ext cx="4937760" cy="502920"/>
+          </a:xfrm>
+          <a:prstGeom prst="rect">
+            <a:avLst/>
+          </a:prstGeom>
+          <a:noFill/>
+          <a:ln/>
+        </p:spPr>
+        <p:txBody>
+          <a:bodyPr wrap="square" lIns="0" tIns="0" rIns="0" bIns="0" rtlCol="0" anchor="ctr"/>
+          <a:lstStyle/>
+          <a:p>
+            <a:pPr indent="0" marL="0">
+              <a:buNone/>
+            </a:pPr>
+            <a:r>
+              <a:rPr lang="en-US" sz="1500" dirty="0">
                 <a:solidFill>
                   <a:srgbClr val="1F2937"/>
                 </a:solidFill>
-                <a:latin typeface="Calibri" pitchFamily="34" charset="0"/>
-                <a:ea typeface="Calibri" pitchFamily="34" charset="-122"/>
-                <a:cs typeface="Calibri" pitchFamily="34" charset="-120"/>
+                <a:latin typeface="Segoe UI" pitchFamily="34" charset="0"/>
+                <a:ea typeface="Segoe UI" pitchFamily="34" charset="-122"/>
+                <a:cs typeface="Segoe UI" pitchFamily="34" charset="-120"/>
               </a:rPr>
               <a:t>MERGE and apply_changes for idempotent SCD2</a:t>
             </a:r>
-            <a:endParaRPr lang="en-US" sz="1600" dirty="0"/>
-          </a:p>
-          <a:p>
-            <a:pPr marL="342900" indent="-342900">
-              <a:spcAft>
-                <a:spcPts val="800"/>
-              </a:spcAft>
-              <a:buSzPct val="100000"/>
-              <a:buChar char="●"/>
-            </a:pPr>
-            <a:r>
-              <a:rPr lang="en-US" sz="1600" dirty="0">
+            <a:endParaRPr lang="en-US" sz="1500" dirty="0"/>
+          </a:p>
+        </p:txBody>
+      </p:sp>
+      <p:sp>
+        <p:nvSpPr>
+          <p:cNvPr id="9" name="Shape 7"/>
+          <p:cNvSpPr/>
+          <p:nvPr/>
+        </p:nvSpPr>
+        <p:spPr>
+          <a:xfrm>
+            <a:off x="502920" y="3346704"/>
+            <a:ext cx="164592" cy="164592"/>
+          </a:xfrm>
+          <a:prstGeom prst="rect">
+            <a:avLst/>
+          </a:prstGeom>
+          <a:solidFill>
+            <a:srgbClr val="0078D4"/>
+          </a:solidFill>
+          <a:ln/>
+        </p:spPr>
+      </p:sp>
+      <p:sp>
+        <p:nvSpPr>
+          <p:cNvPr id="10" name="Text 8"/>
+          <p:cNvSpPr/>
+          <p:nvPr/>
+        </p:nvSpPr>
+        <p:spPr>
+          <a:xfrm>
+            <a:off x="795528" y="3200400"/>
+            <a:ext cx="4937760" cy="502920"/>
+          </a:xfrm>
+          <a:prstGeom prst="rect">
+            <a:avLst/>
+          </a:prstGeom>
+          <a:noFill/>
+          <a:ln/>
+        </p:spPr>
+        <p:txBody>
+          <a:bodyPr wrap="square" lIns="0" tIns="0" rIns="0" bIns="0" rtlCol="0" anchor="ctr"/>
+          <a:lstStyle/>
+          <a:p>
+            <a:pPr indent="0" marL="0">
+              <a:buNone/>
+            </a:pPr>
+            <a:r>
+              <a:rPr lang="en-US" sz="1500" dirty="0">
                 <a:solidFill>
                   <a:srgbClr val="1F2937"/>
                 </a:solidFill>
-                <a:latin typeface="Calibri" pitchFamily="34" charset="0"/>
-                <a:ea typeface="Calibri" pitchFamily="34" charset="-122"/>
-                <a:cs typeface="Calibri" pitchFamily="34" charset="-120"/>
+                <a:latin typeface="Segoe UI" pitchFamily="34" charset="0"/>
+                <a:ea typeface="Segoe UI" pitchFamily="34" charset="-122"/>
+                <a:cs typeface="Segoe UI" pitchFamily="34" charset="-120"/>
               </a:rPr>
               <a:t>Open format — Synapse Serverless reads Delta natively</a:t>
             </a:r>
-            <a:endParaRPr lang="en-US" sz="1600" dirty="0"/>
-          </a:p>
-        </p:txBody>
-      </p:sp>
-      <p:sp>
-        <p:nvSpPr>
-          <p:cNvPr id="4" name="Shape 2"/>
+            <a:endParaRPr lang="en-US" sz="1500" dirty="0"/>
+          </a:p>
+        </p:txBody>
+      </p:sp>
+      <p:sp>
+        <p:nvSpPr>
+          <p:cNvPr id="11" name="Shape 9"/>
           <p:cNvSpPr/>
           <p:nvPr/>
         </p:nvSpPr>
@@ -3706,7 +4875,7 @@
           <a:solidFill>
             <a:srgbClr val="EFF6FC"/>
           </a:solidFill>
-          <a:ln w="9525">
+          <a:ln w="12700">
             <a:solidFill>
               <a:srgbClr val="0078D4"/>
             </a:solidFill>
@@ -3716,14 +4885,75 @@
       </p:sp>
       <p:sp>
         <p:nvSpPr>
-          <p:cNvPr id="5" name="Text 3"/>
+          <p:cNvPr id="12" name="Shape 10"/>
           <p:cNvSpPr/>
           <p:nvPr/>
         </p:nvSpPr>
         <p:spPr>
           <a:xfrm>
             <a:off x="6080760" y="1508760"/>
-            <a:ext cx="2377440" cy="411480"/>
+            <a:ext cx="1554480" cy="320040"/>
+          </a:xfrm>
+          <a:prstGeom prst="roundRect">
+            <a:avLst>
+              <a:gd name="adj" fmla="val 14286"/>
+            </a:avLst>
+          </a:prstGeom>
+          <a:solidFill>
+            <a:srgbClr val="0078D4"/>
+          </a:solidFill>
+          <a:ln/>
+        </p:spPr>
+      </p:sp>
+      <p:sp>
+        <p:nvSpPr>
+          <p:cNvPr id="13" name="Text 11"/>
+          <p:cNvSpPr/>
+          <p:nvPr/>
+        </p:nvSpPr>
+        <p:spPr>
+          <a:xfrm>
+            <a:off x="6080760" y="1508760"/>
+            <a:ext cx="1554480" cy="320040"/>
+          </a:xfrm>
+          <a:prstGeom prst="rect">
+            <a:avLst/>
+          </a:prstGeom>
+          <a:noFill/>
+          <a:ln/>
+        </p:spPr>
+        <p:txBody>
+          <a:bodyPr wrap="square" lIns="0" tIns="0" rIns="0" bIns="0" rtlCol="0" anchor="ctr"/>
+          <a:lstStyle/>
+          <a:p>
+            <a:pPr algn="ctr" indent="0" marL="0">
+              <a:buNone/>
+            </a:pPr>
+            <a:r>
+              <a:rPr lang="en-US" sz="900" b="1" spc="300" kern="0" dirty="0">
+                <a:solidFill>
+                  <a:srgbClr val="FFFFFF"/>
+                </a:solidFill>
+                <a:latin typeface="Segoe UI" pitchFamily="34" charset="0"/>
+                <a:ea typeface="Segoe UI" pitchFamily="34" charset="-122"/>
+                <a:cs typeface="Segoe UI" pitchFamily="34" charset="-120"/>
+              </a:rPr>
+              <a:t>IF ASKED</a:t>
+            </a:r>
+            <a:endParaRPr lang="en-US" sz="900" dirty="0"/>
+          </a:p>
+        </p:txBody>
+      </p:sp>
+      <p:sp>
+        <p:nvSpPr>
+          <p:cNvPr id="14" name="Text 12"/>
+          <p:cNvSpPr/>
+          <p:nvPr/>
+        </p:nvSpPr>
+        <p:spPr>
+          <a:xfrm>
+            <a:off x="6080760" y="1920240"/>
+            <a:ext cx="2377440" cy="365760"/>
           </a:xfrm>
           <a:prstGeom prst="rect">
             <a:avLst/>
@@ -3739,30 +4969,30 @@
               <a:buNone/>
             </a:pPr>
             <a:r>
-              <a:rPr lang="en-US" sz="1400" b="1" dirty="0">
+              <a:rPr lang="en-US" sz="1600" b="1" dirty="0">
                 <a:solidFill>
                   <a:srgbClr val="005A9E"/>
                 </a:solidFill>
-                <a:latin typeface="Calibri" pitchFamily="34" charset="0"/>
-                <a:ea typeface="Calibri" pitchFamily="34" charset="-122"/>
-                <a:cs typeface="Calibri" pitchFamily="34" charset="-120"/>
-              </a:rPr>
-              <a:t>If asked: Delta vs Iceberg?</a:t>
-            </a:r>
-            <a:endParaRPr lang="en-US" sz="1400" dirty="0"/>
-          </a:p>
-        </p:txBody>
-      </p:sp>
-      <p:sp>
-        <p:nvSpPr>
-          <p:cNvPr id="6" name="Text 4"/>
-          <p:cNvSpPr/>
-          <p:nvPr/>
-        </p:nvSpPr>
-        <p:spPr>
-          <a:xfrm>
-            <a:off x="6080760" y="2011680"/>
-            <a:ext cx="2377440" cy="2194560"/>
+                <a:latin typeface="Segoe UI" pitchFamily="34" charset="0"/>
+                <a:ea typeface="Segoe UI" pitchFamily="34" charset="-122"/>
+                <a:cs typeface="Segoe UI" pitchFamily="34" charset="-120"/>
+              </a:rPr>
+              <a:t>Delta vs Iceberg?</a:t>
+            </a:r>
+            <a:endParaRPr lang="en-US" sz="1600" dirty="0"/>
+          </a:p>
+        </p:txBody>
+      </p:sp>
+      <p:sp>
+        <p:nvSpPr>
+          <p:cNvPr id="15" name="Text 13"/>
+          <p:cNvSpPr/>
+          <p:nvPr/>
+        </p:nvSpPr>
+        <p:spPr>
+          <a:xfrm>
+            <a:off x="6080760" y="2377440"/>
+            <a:ext cx="2377440" cy="1828800"/>
           </a:xfrm>
           <a:prstGeom prst="rect">
             <a:avLst/>
@@ -3782,9 +5012,9 @@
                 <a:solidFill>
                   <a:srgbClr val="1F2937"/>
                 </a:solidFill>
-                <a:latin typeface="Calibri" pitchFamily="34" charset="0"/>
-                <a:ea typeface="Calibri" pitchFamily="34" charset="-122"/>
-                <a:cs typeface="Calibri" pitchFamily="34" charset="-120"/>
+                <a:latin typeface="Segoe UI" pitchFamily="34" charset="0"/>
+                <a:ea typeface="Segoe UI" pitchFamily="34" charset="-122"/>
+                <a:cs typeface="Segoe UI" pitchFamily="34" charset="-120"/>
               </a:rPr>
               <a:t>Native Databricks + Unity Catalog. Synapse Serverless reads Delta directly — no metastore shim.</a:t>
             </a:r>
@@ -3803,11 +5033,11 @@
             <a:r>
               <a:rPr lang="en-US" sz="1200" i="1" dirty="0">
                 <a:solidFill>
-                  <a:srgbClr val="1F2937"/>
-                </a:solidFill>
-                <a:latin typeface="Calibri" pitchFamily="34" charset="0"/>
-                <a:ea typeface="Calibri" pitchFamily="34" charset="-122"/>
-                <a:cs typeface="Calibri" pitchFamily="34" charset="-120"/>
+                  <a:srgbClr val="6B7280"/>
+                </a:solidFill>
+                <a:latin typeface="Segoe UI" pitchFamily="34" charset="0"/>
+                <a:ea typeface="Segoe UI" pitchFamily="34" charset="-122"/>
+                <a:cs typeface="Segoe UI" pitchFamily="34" charset="-120"/>
               </a:rPr>
               <a:t>At 10× scale on a Trino-led stack I'd reconsider.</a:t>
             </a:r>
@@ -3817,7 +5047,7 @@
       </p:sp>
       <p:sp>
         <p:nvSpPr>
-          <p:cNvPr id="7" name="Text 5"/>
+          <p:cNvPr id="16" name="Text 14"/>
           <p:cNvSpPr/>
           <p:nvPr/>
         </p:nvSpPr>
@@ -3844,9 +5074,9 @@
                 <a:solidFill>
                   <a:srgbClr val="6B7280"/>
                 </a:solidFill>
-                <a:latin typeface="Calibri" pitchFamily="34" charset="0"/>
-                <a:ea typeface="Calibri" pitchFamily="34" charset="-122"/>
-                <a:cs typeface="Calibri" pitchFamily="34" charset="-120"/>
+                <a:latin typeface="Segoe UI" pitchFamily="34" charset="0"/>
+                <a:ea typeface="Segoe UI" pitchFamily="34" charset="-122"/>
+                <a:cs typeface="Segoe UI" pitchFamily="34" charset="-120"/>
               </a:rPr>
               <a:t>People10 Solutions Lab — Malappa</a:t>
             </a:r>
@@ -3856,7 +5086,7 @@
       </p:sp>
       <p:sp>
         <p:nvSpPr>
-          <p:cNvPr id="8" name="Text 6"/>
+          <p:cNvPr id="17" name="Text 15"/>
           <p:cNvSpPr/>
           <p:nvPr/>
         </p:nvSpPr>
@@ -3883,9 +5113,9 @@
                 <a:solidFill>
                   <a:srgbClr val="6B7280"/>
                 </a:solidFill>
-                <a:latin typeface="Calibri" pitchFamily="34" charset="0"/>
-                <a:ea typeface="Calibri" pitchFamily="34" charset="-122"/>
-                <a:cs typeface="Calibri" pitchFamily="34" charset="-120"/>
+                <a:latin typeface="Segoe UI" pitchFamily="34" charset="0"/>
+                <a:ea typeface="Segoe UI" pitchFamily="34" charset="-122"/>
+                <a:cs typeface="Segoe UI" pitchFamily="34" charset="-120"/>
               </a:rPr>
               <a:t>4 / 9</a:t>
             </a:r>
@@ -3954,9 +5184,9 @@
                 <a:solidFill>
                   <a:srgbClr val="0F2A52"/>
                 </a:solidFill>
-                <a:latin typeface="Calibri" pitchFamily="34" charset="0"/>
-                <a:ea typeface="Calibri" pitchFamily="34" charset="-122"/>
-                <a:cs typeface="Calibri" pitchFamily="34" charset="-120"/>
+                <a:latin typeface="Segoe UI" pitchFamily="34" charset="0"/>
+                <a:ea typeface="Segoe UI" pitchFamily="34" charset="-122"/>
+                <a:cs typeface="Segoe UI" pitchFamily="34" charset="-120"/>
               </a:rPr>
               <a:t>The PoC — one DLT pipeline, both arrows</a:t>
             </a:r>
@@ -3973,11 +5203,11 @@
         <p:spPr>
           <a:xfrm>
             <a:off x="457200" y="960120"/>
-            <a:ext cx="8229600" cy="384048"/>
+            <a:ext cx="8229600" cy="411480"/>
           </a:xfrm>
           <a:prstGeom prst="roundRect">
             <a:avLst>
-              <a:gd name="adj" fmla="val 11905"/>
+              <a:gd name="adj" fmla="val 11111"/>
             </a:avLst>
           </a:prstGeom>
           <a:solidFill>
@@ -3986,16 +5216,40 @@
           <a:ln/>
         </p:spPr>
       </p:sp>
-      <p:sp>
-        <p:nvSpPr>
-          <p:cNvPr id="4" name="Text 2"/>
-          <p:cNvSpPr/>
-          <p:nvPr/>
-        </p:nvSpPr>
-        <p:spPr>
-          <a:xfrm>
-            <a:off x="640080" y="960120"/>
-            <a:ext cx="7863840" cy="384048"/>
+      <p:pic>
+        <p:nvPicPr>
+          <p:cNvPr id="4" name="Image 0" descr="preencoded.png">    </p:cNvPr>
+          <p:cNvPicPr>
+            <a:picLocks noChangeAspect="1"/>
+          </p:cNvPicPr>
+          <p:nvPr/>
+        </p:nvPicPr>
+        <p:blipFill>
+          <a:blip r:embed="rId1"/>
+          <a:stretch>
+            <a:fillRect/>
+          </a:stretch>
+        </p:blipFill>
+        <p:spPr>
+          <a:xfrm>
+            <a:off x="594360" y="1060704"/>
+            <a:ext cx="201168" cy="201168"/>
+          </a:xfrm>
+          <a:prstGeom prst="rect">
+            <a:avLst/>
+          </a:prstGeom>
+        </p:spPr>
+      </p:pic>
+      <p:sp>
+        <p:nvSpPr>
+          <p:cNvPr id="5" name="Text 2"/>
+          <p:cNvSpPr/>
+          <p:nvPr/>
+        </p:nvSpPr>
+        <p:spPr>
+          <a:xfrm>
+            <a:off x="868680" y="960120"/>
+            <a:ext cx="7772400" cy="411480"/>
           </a:xfrm>
           <a:prstGeom prst="rect">
             <a:avLst/>
@@ -4019,7 +5273,7 @@
                 <a:ea typeface="Consolas" pitchFamily="34" charset="-122"/>
                 <a:cs typeface="Consolas" pitchFamily="34" charset="-120"/>
               </a:rPr>
-              <a:t>📄  poc/databricks/pipelines/unified_medallion_dlt.py</a:t>
+              <a:t>poc/databricks/pipelines/unified_medallion_dlt.py</a:t>
             </a:r>
             <a:endParaRPr lang="en-US" sz="1300" dirty="0"/>
           </a:p>
@@ -4027,14 +5281,14 @@
       </p:sp>
       <p:sp>
         <p:nvSpPr>
-          <p:cNvPr id="5" name="Shape 3"/>
-          <p:cNvSpPr/>
-          <p:nvPr/>
-        </p:nvSpPr>
-        <p:spPr>
-          <a:xfrm>
-            <a:off x="502920" y="1764792"/>
-            <a:ext cx="164592" cy="164592"/>
+          <p:cNvPr id="6" name="Shape 3"/>
+          <p:cNvSpPr/>
+          <p:nvPr/>
+        </p:nvSpPr>
+        <p:spPr>
+          <a:xfrm>
+            <a:off x="502920" y="1746504"/>
+            <a:ext cx="274320" cy="274320"/>
           </a:xfrm>
           <a:prstGeom prst="ellipse">
             <a:avLst/>
@@ -4047,14 +5301,53 @@
       </p:sp>
       <p:sp>
         <p:nvSpPr>
-          <p:cNvPr id="6" name="Text 4"/>
-          <p:cNvSpPr/>
-          <p:nvPr/>
-        </p:nvSpPr>
-        <p:spPr>
-          <a:xfrm>
-            <a:off x="777240" y="1600200"/>
-            <a:ext cx="3566160" cy="502920"/>
+          <p:cNvPr id="7" name="Text 4"/>
+          <p:cNvSpPr/>
+          <p:nvPr/>
+        </p:nvSpPr>
+        <p:spPr>
+          <a:xfrm>
+            <a:off x="502920" y="1746504"/>
+            <a:ext cx="274320" cy="274320"/>
+          </a:xfrm>
+          <a:prstGeom prst="rect">
+            <a:avLst/>
+          </a:prstGeom>
+          <a:noFill/>
+          <a:ln/>
+        </p:spPr>
+        <p:txBody>
+          <a:bodyPr wrap="square" lIns="0" tIns="0" rIns="0" bIns="0" rtlCol="0" anchor="ctr"/>
+          <a:lstStyle/>
+          <a:p>
+            <a:pPr algn="ctr" indent="0" marL="0">
+              <a:buNone/>
+            </a:pPr>
+            <a:r>
+              <a:rPr lang="en-US" sz="1100" b="1" dirty="0">
+                <a:solidFill>
+                  <a:srgbClr val="FFFFFF"/>
+                </a:solidFill>
+                <a:latin typeface="Segoe UI" pitchFamily="34" charset="0"/>
+                <a:ea typeface="Segoe UI" pitchFamily="34" charset="-122"/>
+                <a:cs typeface="Segoe UI" pitchFamily="34" charset="-120"/>
+              </a:rPr>
+              <a:t>1</a:t>
+            </a:r>
+            <a:endParaRPr lang="en-US" sz="1100" dirty="0"/>
+          </a:p>
+        </p:txBody>
+      </p:sp>
+      <p:sp>
+        <p:nvSpPr>
+          <p:cNvPr id="8" name="Text 5"/>
+          <p:cNvSpPr/>
+          <p:nvPr/>
+        </p:nvSpPr>
+        <p:spPr>
+          <a:xfrm>
+            <a:off x="914400" y="1627632"/>
+            <a:ext cx="3657600" cy="502920"/>
           </a:xfrm>
           <a:prstGeom prst="rect">
             <a:avLst/>
@@ -4086,14 +5379,14 @@
       </p:sp>
       <p:sp>
         <p:nvSpPr>
-          <p:cNvPr id="7" name="Text 5"/>
-          <p:cNvSpPr/>
-          <p:nvPr/>
-        </p:nvSpPr>
-        <p:spPr>
-          <a:xfrm>
-            <a:off x="4343400" y="1600200"/>
-            <a:ext cx="4434840" cy="502920"/>
+          <p:cNvPr id="9" name="Text 6"/>
+          <p:cNvSpPr/>
+          <p:nvPr/>
+        </p:nvSpPr>
+        <p:spPr>
+          <a:xfrm>
+            <a:off x="4617720" y="1627632"/>
+            <a:ext cx="4160520" cy="502920"/>
           </a:xfrm>
           <a:prstGeom prst="rect">
             <a:avLst/>
@@ -4113,11 +5406,11 @@
                 <a:solidFill>
                   <a:srgbClr val="1F2937"/>
                 </a:solidFill>
-                <a:latin typeface="Calibri" pitchFamily="34" charset="0"/>
-                <a:ea typeface="Calibri" pitchFamily="34" charset="-122"/>
-                <a:cs typeface="Calibri" pitchFamily="34" charset="-120"/>
-              </a:rPr>
-              <a:t>—  streaming Kafka source, @dlt.table</a:t>
+                <a:latin typeface="Segoe UI" pitchFamily="34" charset="0"/>
+                <a:ea typeface="Segoe UI" pitchFamily="34" charset="-122"/>
+                <a:cs typeface="Segoe UI" pitchFamily="34" charset="-120"/>
+              </a:rPr>
+              <a:t>streaming Kafka source · @dlt.table</a:t>
             </a:r>
             <a:endParaRPr lang="en-US" sz="1300" dirty="0"/>
           </a:p>
@@ -4125,14 +5418,14 @@
       </p:sp>
       <p:sp>
         <p:nvSpPr>
-          <p:cNvPr id="8" name="Shape 6"/>
-          <p:cNvSpPr/>
-          <p:nvPr/>
-        </p:nvSpPr>
-        <p:spPr>
-          <a:xfrm>
-            <a:off x="502920" y="2267712"/>
-            <a:ext cx="164592" cy="164592"/>
+          <p:cNvPr id="10" name="Shape 7"/>
+          <p:cNvSpPr/>
+          <p:nvPr/>
+        </p:nvSpPr>
+        <p:spPr>
+          <a:xfrm>
+            <a:off x="502920" y="2249424"/>
+            <a:ext cx="274320" cy="274320"/>
           </a:xfrm>
           <a:prstGeom prst="ellipse">
             <a:avLst/>
@@ -4145,14 +5438,53 @@
       </p:sp>
       <p:sp>
         <p:nvSpPr>
-          <p:cNvPr id="9" name="Text 7"/>
-          <p:cNvSpPr/>
-          <p:nvPr/>
-        </p:nvSpPr>
-        <p:spPr>
-          <a:xfrm>
-            <a:off x="777240" y="2103120"/>
-            <a:ext cx="3566160" cy="502920"/>
+          <p:cNvPr id="11" name="Text 8"/>
+          <p:cNvSpPr/>
+          <p:nvPr/>
+        </p:nvSpPr>
+        <p:spPr>
+          <a:xfrm>
+            <a:off x="502920" y="2249424"/>
+            <a:ext cx="274320" cy="274320"/>
+          </a:xfrm>
+          <a:prstGeom prst="rect">
+            <a:avLst/>
+          </a:prstGeom>
+          <a:noFill/>
+          <a:ln/>
+        </p:spPr>
+        <p:txBody>
+          <a:bodyPr wrap="square" lIns="0" tIns="0" rIns="0" bIns="0" rtlCol="0" anchor="ctr"/>
+          <a:lstStyle/>
+          <a:p>
+            <a:pPr algn="ctr" indent="0" marL="0">
+              <a:buNone/>
+            </a:pPr>
+            <a:r>
+              <a:rPr lang="en-US" sz="1100" b="1" dirty="0">
+                <a:solidFill>
+                  <a:srgbClr val="FFFFFF"/>
+                </a:solidFill>
+                <a:latin typeface="Segoe UI" pitchFamily="34" charset="0"/>
+                <a:ea typeface="Segoe UI" pitchFamily="34" charset="-122"/>
+                <a:cs typeface="Segoe UI" pitchFamily="34" charset="-120"/>
+              </a:rPr>
+              <a:t>2</a:t>
+            </a:r>
+            <a:endParaRPr lang="en-US" sz="1100" dirty="0"/>
+          </a:p>
+        </p:txBody>
+      </p:sp>
+      <p:sp>
+        <p:nvSpPr>
+          <p:cNvPr id="12" name="Text 9"/>
+          <p:cNvSpPr/>
+          <p:nvPr/>
+        </p:nvSpPr>
+        <p:spPr>
+          <a:xfrm>
+            <a:off x="914400" y="2130552"/>
+            <a:ext cx="3657600" cy="502920"/>
           </a:xfrm>
           <a:prstGeom prst="rect">
             <a:avLst/>
@@ -4184,14 +5516,14 @@
       </p:sp>
       <p:sp>
         <p:nvSpPr>
-          <p:cNvPr id="10" name="Text 8"/>
-          <p:cNvSpPr/>
-          <p:nvPr/>
-        </p:nvSpPr>
-        <p:spPr>
-          <a:xfrm>
-            <a:off x="4343400" y="2103120"/>
-            <a:ext cx="4434840" cy="502920"/>
+          <p:cNvPr id="13" name="Text 10"/>
+          <p:cNvSpPr/>
+          <p:nvPr/>
+        </p:nvSpPr>
+        <p:spPr>
+          <a:xfrm>
+            <a:off x="4617720" y="2130552"/>
+            <a:ext cx="4160520" cy="502920"/>
           </a:xfrm>
           <a:prstGeom prst="rect">
             <a:avLst/>
@@ -4211,11 +5543,11 @@
                 <a:solidFill>
                   <a:srgbClr val="1F2937"/>
                 </a:solidFill>
-                <a:latin typeface="Calibri" pitchFamily="34" charset="0"/>
-                <a:ea typeface="Calibri" pitchFamily="34" charset="-122"/>
-                <a:cs typeface="Calibri" pitchFamily="34" charset="-120"/>
-              </a:rPr>
-              <a:t>—  batch Auto Loader source, same @dlt.table decorator</a:t>
+                <a:latin typeface="Segoe UI" pitchFamily="34" charset="0"/>
+                <a:ea typeface="Segoe UI" pitchFamily="34" charset="-122"/>
+                <a:cs typeface="Segoe UI" pitchFamily="34" charset="-120"/>
+              </a:rPr>
+              <a:t>batch Auto Loader · same @dlt.table decorator</a:t>
             </a:r>
             <a:endParaRPr lang="en-US" sz="1300" dirty="0"/>
           </a:p>
@@ -4223,14 +5555,14 @@
       </p:sp>
       <p:sp>
         <p:nvSpPr>
-          <p:cNvPr id="11" name="Shape 9"/>
-          <p:cNvSpPr/>
-          <p:nvPr/>
-        </p:nvSpPr>
-        <p:spPr>
-          <a:xfrm>
-            <a:off x="502920" y="2770632"/>
-            <a:ext cx="164592" cy="164592"/>
+          <p:cNvPr id="14" name="Shape 11"/>
+          <p:cNvSpPr/>
+          <p:nvPr/>
+        </p:nvSpPr>
+        <p:spPr>
+          <a:xfrm>
+            <a:off x="502920" y="2752344"/>
+            <a:ext cx="274320" cy="274320"/>
           </a:xfrm>
           <a:prstGeom prst="ellipse">
             <a:avLst/>
@@ -4243,14 +5575,53 @@
       </p:sp>
       <p:sp>
         <p:nvSpPr>
-          <p:cNvPr id="12" name="Text 10"/>
-          <p:cNvSpPr/>
-          <p:nvPr/>
-        </p:nvSpPr>
-        <p:spPr>
-          <a:xfrm>
-            <a:off x="777240" y="2606040"/>
-            <a:ext cx="3566160" cy="502920"/>
+          <p:cNvPr id="15" name="Text 12"/>
+          <p:cNvSpPr/>
+          <p:nvPr/>
+        </p:nvSpPr>
+        <p:spPr>
+          <a:xfrm>
+            <a:off x="502920" y="2752344"/>
+            <a:ext cx="274320" cy="274320"/>
+          </a:xfrm>
+          <a:prstGeom prst="rect">
+            <a:avLst/>
+          </a:prstGeom>
+          <a:noFill/>
+          <a:ln/>
+        </p:spPr>
+        <p:txBody>
+          <a:bodyPr wrap="square" lIns="0" tIns="0" rIns="0" bIns="0" rtlCol="0" anchor="ctr"/>
+          <a:lstStyle/>
+          <a:p>
+            <a:pPr algn="ctr" indent="0" marL="0">
+              <a:buNone/>
+            </a:pPr>
+            <a:r>
+              <a:rPr lang="en-US" sz="1100" b="1" dirty="0">
+                <a:solidFill>
+                  <a:srgbClr val="FFFFFF"/>
+                </a:solidFill>
+                <a:latin typeface="Segoe UI" pitchFamily="34" charset="0"/>
+                <a:ea typeface="Segoe UI" pitchFamily="34" charset="-122"/>
+                <a:cs typeface="Segoe UI" pitchFamily="34" charset="-120"/>
+              </a:rPr>
+              <a:t>3</a:t>
+            </a:r>
+            <a:endParaRPr lang="en-US" sz="1100" dirty="0"/>
+          </a:p>
+        </p:txBody>
+      </p:sp>
+      <p:sp>
+        <p:nvSpPr>
+          <p:cNvPr id="16" name="Text 13"/>
+          <p:cNvSpPr/>
+          <p:nvPr/>
+        </p:nvSpPr>
+        <p:spPr>
+          <a:xfrm>
+            <a:off x="914400" y="2633472"/>
+            <a:ext cx="3657600" cy="502920"/>
           </a:xfrm>
           <a:prstGeom prst="rect">
             <a:avLst/>
@@ -4282,14 +5653,14 @@
       </p:sp>
       <p:sp>
         <p:nvSpPr>
-          <p:cNvPr id="13" name="Text 11"/>
-          <p:cNvSpPr/>
-          <p:nvPr/>
-        </p:nvSpPr>
-        <p:spPr>
-          <a:xfrm>
-            <a:off x="4343400" y="2606040"/>
-            <a:ext cx="4434840" cy="502920"/>
+          <p:cNvPr id="17" name="Text 14"/>
+          <p:cNvSpPr/>
+          <p:nvPr/>
+        </p:nvSpPr>
+        <p:spPr>
+          <a:xfrm>
+            <a:off x="4617720" y="2633472"/>
+            <a:ext cx="4160520" cy="502920"/>
           </a:xfrm>
           <a:prstGeom prst="rect">
             <a:avLst/>
@@ -4309,11 +5680,11 @@
                 <a:solidFill>
                   <a:srgbClr val="1F2937"/>
                 </a:solidFill>
-                <a:latin typeface="Calibri" pitchFamily="34" charset="0"/>
-                <a:ea typeface="Calibri" pitchFamily="34" charset="-122"/>
-                <a:cs typeface="Calibri" pitchFamily="34" charset="-120"/>
-              </a:rPr>
-              <a:t>—  expect_or_fail / expect_or_drop / expect</a:t>
+                <a:latin typeface="Segoe UI" pitchFamily="34" charset="0"/>
+                <a:ea typeface="Segoe UI" pitchFamily="34" charset="-122"/>
+                <a:cs typeface="Segoe UI" pitchFamily="34" charset="-120"/>
+              </a:rPr>
+              <a:t>expect_or_fail · expect_or_drop · expect</a:t>
             </a:r>
             <a:endParaRPr lang="en-US" sz="1300" dirty="0"/>
           </a:p>
@@ -4321,14 +5692,14 @@
       </p:sp>
       <p:sp>
         <p:nvSpPr>
-          <p:cNvPr id="14" name="Shape 12"/>
-          <p:cNvSpPr/>
-          <p:nvPr/>
-        </p:nvSpPr>
-        <p:spPr>
-          <a:xfrm>
-            <a:off x="502920" y="3273552"/>
-            <a:ext cx="164592" cy="164592"/>
+          <p:cNvPr id="18" name="Shape 15"/>
+          <p:cNvSpPr/>
+          <p:nvPr/>
+        </p:nvSpPr>
+        <p:spPr>
+          <a:xfrm>
+            <a:off x="502920" y="3255264"/>
+            <a:ext cx="274320" cy="274320"/>
           </a:xfrm>
           <a:prstGeom prst="ellipse">
             <a:avLst/>
@@ -4341,14 +5712,53 @@
       </p:sp>
       <p:sp>
         <p:nvSpPr>
-          <p:cNvPr id="15" name="Text 13"/>
-          <p:cNvSpPr/>
-          <p:nvPr/>
-        </p:nvSpPr>
-        <p:spPr>
-          <a:xfrm>
-            <a:off x="777240" y="3108960"/>
-            <a:ext cx="3566160" cy="502920"/>
+          <p:cNvPr id="19" name="Text 16"/>
+          <p:cNvSpPr/>
+          <p:nvPr/>
+        </p:nvSpPr>
+        <p:spPr>
+          <a:xfrm>
+            <a:off x="502920" y="3255264"/>
+            <a:ext cx="274320" cy="274320"/>
+          </a:xfrm>
+          <a:prstGeom prst="rect">
+            <a:avLst/>
+          </a:prstGeom>
+          <a:noFill/>
+          <a:ln/>
+        </p:spPr>
+        <p:txBody>
+          <a:bodyPr wrap="square" lIns="0" tIns="0" rIns="0" bIns="0" rtlCol="0" anchor="ctr"/>
+          <a:lstStyle/>
+          <a:p>
+            <a:pPr algn="ctr" indent="0" marL="0">
+              <a:buNone/>
+            </a:pPr>
+            <a:r>
+              <a:rPr lang="en-US" sz="1100" b="1" dirty="0">
+                <a:solidFill>
+                  <a:srgbClr val="FFFFFF"/>
+                </a:solidFill>
+                <a:latin typeface="Segoe UI" pitchFamily="34" charset="0"/>
+                <a:ea typeface="Segoe UI" pitchFamily="34" charset="-122"/>
+                <a:cs typeface="Segoe UI" pitchFamily="34" charset="-120"/>
+              </a:rPr>
+              <a:t>4</a:t>
+            </a:r>
+            <a:endParaRPr lang="en-US" sz="1100" dirty="0"/>
+          </a:p>
+        </p:txBody>
+      </p:sp>
+      <p:sp>
+        <p:nvSpPr>
+          <p:cNvPr id="20" name="Text 17"/>
+          <p:cNvSpPr/>
+          <p:nvPr/>
+        </p:nvSpPr>
+        <p:spPr>
+          <a:xfrm>
+            <a:off x="914400" y="3136392"/>
+            <a:ext cx="3657600" cy="502920"/>
           </a:xfrm>
           <a:prstGeom prst="rect">
             <a:avLst/>
@@ -4380,14 +5790,14 @@
       </p:sp>
       <p:sp>
         <p:nvSpPr>
-          <p:cNvPr id="16" name="Text 14"/>
-          <p:cNvSpPr/>
-          <p:nvPr/>
-        </p:nvSpPr>
-        <p:spPr>
-          <a:xfrm>
-            <a:off x="4343400" y="3108960"/>
-            <a:ext cx="4434840" cy="502920"/>
+          <p:cNvPr id="21" name="Text 18"/>
+          <p:cNvSpPr/>
+          <p:nvPr/>
+        </p:nvSpPr>
+        <p:spPr>
+          <a:xfrm>
+            <a:off x="4617720" y="3136392"/>
+            <a:ext cx="4160520" cy="502920"/>
           </a:xfrm>
           <a:prstGeom prst="rect">
             <a:avLst/>
@@ -4407,11 +5817,11 @@
                 <a:solidFill>
                   <a:srgbClr val="1F2937"/>
                 </a:solidFill>
-                <a:latin typeface="Calibri" pitchFamily="34" charset="0"/>
-                <a:ea typeface="Calibri" pitchFamily="34" charset="-122"/>
-                <a:cs typeface="Calibri" pitchFamily="34" charset="-120"/>
-              </a:rPr>
-              <a:t>—  via apply_changes</a:t>
+                <a:latin typeface="Segoe UI" pitchFamily="34" charset="0"/>
+                <a:ea typeface="Segoe UI" pitchFamily="34" charset="-122"/>
+                <a:cs typeface="Segoe UI" pitchFamily="34" charset="-120"/>
+              </a:rPr>
+              <a:t>via apply_changes</a:t>
             </a:r>
             <a:endParaRPr lang="en-US" sz="1300" dirty="0"/>
           </a:p>
@@ -4419,14 +5829,14 @@
       </p:sp>
       <p:sp>
         <p:nvSpPr>
-          <p:cNvPr id="17" name="Shape 15"/>
-          <p:cNvSpPr/>
-          <p:nvPr/>
-        </p:nvSpPr>
-        <p:spPr>
-          <a:xfrm>
-            <a:off x="502920" y="3776472"/>
-            <a:ext cx="164592" cy="164592"/>
+          <p:cNvPr id="22" name="Shape 19"/>
+          <p:cNvSpPr/>
+          <p:nvPr/>
+        </p:nvSpPr>
+        <p:spPr>
+          <a:xfrm>
+            <a:off x="502920" y="3758184"/>
+            <a:ext cx="274320" cy="274320"/>
           </a:xfrm>
           <a:prstGeom prst="ellipse">
             <a:avLst/>
@@ -4439,14 +5849,53 @@
       </p:sp>
       <p:sp>
         <p:nvSpPr>
-          <p:cNvPr id="18" name="Text 16"/>
-          <p:cNvSpPr/>
-          <p:nvPr/>
-        </p:nvSpPr>
-        <p:spPr>
-          <a:xfrm>
-            <a:off x="777240" y="3611880"/>
-            <a:ext cx="3566160" cy="502920"/>
+          <p:cNvPr id="23" name="Text 20"/>
+          <p:cNvSpPr/>
+          <p:nvPr/>
+        </p:nvSpPr>
+        <p:spPr>
+          <a:xfrm>
+            <a:off x="502920" y="3758184"/>
+            <a:ext cx="274320" cy="274320"/>
+          </a:xfrm>
+          <a:prstGeom prst="rect">
+            <a:avLst/>
+          </a:prstGeom>
+          <a:noFill/>
+          <a:ln/>
+        </p:spPr>
+        <p:txBody>
+          <a:bodyPr wrap="square" lIns="0" tIns="0" rIns="0" bIns="0" rtlCol="0" anchor="ctr"/>
+          <a:lstStyle/>
+          <a:p>
+            <a:pPr algn="ctr" indent="0" marL="0">
+              <a:buNone/>
+            </a:pPr>
+            <a:r>
+              <a:rPr lang="en-US" sz="1100" b="1" dirty="0">
+                <a:solidFill>
+                  <a:srgbClr val="FFFFFF"/>
+                </a:solidFill>
+                <a:latin typeface="Segoe UI" pitchFamily="34" charset="0"/>
+                <a:ea typeface="Segoe UI" pitchFamily="34" charset="-122"/>
+                <a:cs typeface="Segoe UI" pitchFamily="34" charset="-120"/>
+              </a:rPr>
+              <a:t>5</a:t>
+            </a:r>
+            <a:endParaRPr lang="en-US" sz="1100" dirty="0"/>
+          </a:p>
+        </p:txBody>
+      </p:sp>
+      <p:sp>
+        <p:nvSpPr>
+          <p:cNvPr id="24" name="Text 21"/>
+          <p:cNvSpPr/>
+          <p:nvPr/>
+        </p:nvSpPr>
+        <p:spPr>
+          <a:xfrm>
+            <a:off x="914400" y="3639312"/>
+            <a:ext cx="3657600" cy="502920"/>
           </a:xfrm>
           <a:prstGeom prst="rect">
             <a:avLst/>
@@ -4478,14 +5927,14 @@
       </p:sp>
       <p:sp>
         <p:nvSpPr>
-          <p:cNvPr id="19" name="Text 17"/>
-          <p:cNvSpPr/>
-          <p:nvPr/>
-        </p:nvSpPr>
-        <p:spPr>
-          <a:xfrm>
-            <a:off x="4343400" y="3611880"/>
-            <a:ext cx="4434840" cy="502920"/>
+          <p:cNvPr id="25" name="Text 22"/>
+          <p:cNvSpPr/>
+          <p:nvPr/>
+        </p:nvSpPr>
+        <p:spPr>
+          <a:xfrm>
+            <a:off x="4617720" y="3639312"/>
+            <a:ext cx="4160520" cy="502920"/>
           </a:xfrm>
           <a:prstGeom prst="rect">
             <a:avLst/>
@@ -4505,11 +5954,11 @@
                 <a:solidFill>
                   <a:srgbClr val="1F2937"/>
                 </a:solidFill>
-                <a:latin typeface="Calibri" pitchFamily="34" charset="0"/>
-                <a:ea typeface="Calibri" pitchFamily="34" charset="-122"/>
-                <a:cs typeface="Calibri" pitchFamily="34" charset="-120"/>
-              </a:rPr>
-              <a:t>—  joins streaming-derived rollups with batch-derived dimensions</a:t>
+                <a:latin typeface="Segoe UI" pitchFamily="34" charset="0"/>
+                <a:ea typeface="Segoe UI" pitchFamily="34" charset="-122"/>
+                <a:cs typeface="Segoe UI" pitchFamily="34" charset="-120"/>
+              </a:rPr>
+              <a:t>joins streaming-derived rollups with batch-derived dimensions</a:t>
             </a:r>
             <a:endParaRPr lang="en-US" sz="1300" dirty="0"/>
           </a:p>
@@ -4517,7 +5966,7 @@
       </p:sp>
       <p:sp>
         <p:nvSpPr>
-          <p:cNvPr id="20" name="Text 18"/>
+          <p:cNvPr id="26" name="Text 23"/>
           <p:cNvSpPr/>
           <p:nvPr/>
         </p:nvSpPr>
@@ -4544,9 +5993,9 @@
                 <a:solidFill>
                   <a:srgbClr val="005A9E"/>
                 </a:solidFill>
-                <a:latin typeface="Calibri" pitchFamily="34" charset="0"/>
-                <a:ea typeface="Calibri" pitchFamily="34" charset="-122"/>
-                <a:cs typeface="Calibri" pitchFamily="34" charset="-120"/>
+                <a:latin typeface="Segoe UI" pitchFamily="34" charset="0"/>
+                <a:ea typeface="Segoe UI" pitchFamily="34" charset="-122"/>
+                <a:cs typeface="Segoe UI" pitchFamily="34" charset="-120"/>
               </a:rPr>
               <a:t>This single file is the answer to the brief's core question.</a:t>
             </a:r>
@@ -4556,7 +6005,7 @@
       </p:sp>
       <p:sp>
         <p:nvSpPr>
-          <p:cNvPr id="21" name="Text 19"/>
+          <p:cNvPr id="27" name="Text 24"/>
           <p:cNvSpPr/>
           <p:nvPr/>
         </p:nvSpPr>
@@ -4583,9 +6032,9 @@
                 <a:solidFill>
                   <a:srgbClr val="6B7280"/>
                 </a:solidFill>
-                <a:latin typeface="Calibri" pitchFamily="34" charset="0"/>
-                <a:ea typeface="Calibri" pitchFamily="34" charset="-122"/>
-                <a:cs typeface="Calibri" pitchFamily="34" charset="-120"/>
+                <a:latin typeface="Segoe UI" pitchFamily="34" charset="0"/>
+                <a:ea typeface="Segoe UI" pitchFamily="34" charset="-122"/>
+                <a:cs typeface="Segoe UI" pitchFamily="34" charset="-120"/>
               </a:rPr>
               <a:t>People10 Solutions Lab — Malappa</a:t>
             </a:r>
@@ -4595,7 +6044,7 @@
       </p:sp>
       <p:sp>
         <p:nvSpPr>
-          <p:cNvPr id="22" name="Text 20"/>
+          <p:cNvPr id="28" name="Text 25"/>
           <p:cNvSpPr/>
           <p:nvPr/>
         </p:nvSpPr>
@@ -4622,9 +6071,9 @@
                 <a:solidFill>
                   <a:srgbClr val="6B7280"/>
                 </a:solidFill>
-                <a:latin typeface="Calibri" pitchFamily="34" charset="0"/>
-                <a:ea typeface="Calibri" pitchFamily="34" charset="-122"/>
-                <a:cs typeface="Calibri" pitchFamily="34" charset="-120"/>
+                <a:latin typeface="Segoe UI" pitchFamily="34" charset="0"/>
+                <a:ea typeface="Segoe UI" pitchFamily="34" charset="-122"/>
+                <a:cs typeface="Segoe UI" pitchFamily="34" charset="-120"/>
               </a:rPr>
               <a:t>5 / 9</a:t>
             </a:r>
@@ -4693,9 +6142,9 @@
                 <a:solidFill>
                   <a:srgbClr val="0F2A52"/>
                 </a:solidFill>
-                <a:latin typeface="Calibri" pitchFamily="34" charset="0"/>
-                <a:ea typeface="Calibri" pitchFamily="34" charset="-122"/>
-                <a:cs typeface="Calibri" pitchFamily="34" charset="-120"/>
+                <a:latin typeface="Segoe UI" pitchFamily="34" charset="0"/>
+                <a:ea typeface="Segoe UI" pitchFamily="34" charset="-122"/>
+                <a:cs typeface="Segoe UI" pitchFamily="34" charset="-120"/>
               </a:rPr>
               <a:t>Two-pattern processing — and why I kept both</a:t>
             </a:r>
@@ -4712,17 +6161,17 @@
         <p:spPr>
           <a:xfrm>
             <a:off x="457200" y="1097280"/>
-            <a:ext cx="4069080" cy="1874520"/>
+            <a:ext cx="4069080" cy="1828800"/>
           </a:xfrm>
           <a:prstGeom prst="roundRect">
             <a:avLst>
-              <a:gd name="adj" fmla="val 3902"/>
+              <a:gd name="adj" fmla="val 4000"/>
             </a:avLst>
           </a:prstGeom>
           <a:solidFill>
             <a:srgbClr val="EFF6FC"/>
           </a:solidFill>
-          <a:ln w="9525">
+          <a:ln w="12700">
             <a:solidFill>
               <a:srgbClr val="0078D4"/>
             </a:solidFill>
@@ -4732,13 +6181,33 @@
       </p:sp>
       <p:sp>
         <p:nvSpPr>
-          <p:cNvPr id="4" name="Text 2"/>
-          <p:cNvSpPr/>
-          <p:nvPr/>
-        </p:nvSpPr>
-        <p:spPr>
-          <a:xfrm>
-            <a:off x="640080" y="1261872"/>
+          <p:cNvPr id="4" name="Shape 2"/>
+          <p:cNvSpPr/>
+          <p:nvPr/>
+        </p:nvSpPr>
+        <p:spPr>
+          <a:xfrm>
+            <a:off x="457200" y="1097280"/>
+            <a:ext cx="4069080" cy="73152"/>
+          </a:xfrm>
+          <a:prstGeom prst="rect">
+            <a:avLst/>
+          </a:prstGeom>
+          <a:solidFill>
+            <a:srgbClr val="0078D4"/>
+          </a:solidFill>
+          <a:ln/>
+        </p:spPr>
+      </p:sp>
+      <p:sp>
+        <p:nvSpPr>
+          <p:cNvPr id="5" name="Text 3"/>
+          <p:cNvSpPr/>
+          <p:nvPr/>
+        </p:nvSpPr>
+        <p:spPr>
+          <a:xfrm>
+            <a:off x="640080" y="1298448"/>
             <a:ext cx="3703320" cy="365760"/>
           </a:xfrm>
           <a:prstGeom prst="rect">
@@ -4755,30 +6224,30 @@
               <a:buNone/>
             </a:pPr>
             <a:r>
-              <a:rPr lang="en-US" sz="1600" b="1" dirty="0">
+              <a:rPr lang="en-US" sz="1700" b="1" dirty="0">
                 <a:solidFill>
                   <a:srgbClr val="005A9E"/>
                 </a:solidFill>
-                <a:latin typeface="Calibri" pitchFamily="34" charset="0"/>
-                <a:ea typeface="Calibri" pitchFamily="34" charset="-122"/>
-                <a:cs typeface="Calibri" pitchFamily="34" charset="-120"/>
+                <a:latin typeface="Segoe UI" pitchFamily="34" charset="0"/>
+                <a:ea typeface="Segoe UI" pitchFamily="34" charset="-122"/>
+                <a:cs typeface="Segoe UI" pitchFamily="34" charset="-120"/>
               </a:rPr>
               <a:t>Declarative — DLT</a:t>
             </a:r>
-            <a:endParaRPr lang="en-US" sz="1600" dirty="0"/>
-          </a:p>
-        </p:txBody>
-      </p:sp>
-      <p:sp>
-        <p:nvSpPr>
-          <p:cNvPr id="5" name="Text 3"/>
-          <p:cNvSpPr/>
-          <p:nvPr/>
-        </p:nvSpPr>
-        <p:spPr>
-          <a:xfrm>
-            <a:off x="640080" y="1691640"/>
-            <a:ext cx="3703320" cy="1097280"/>
+            <a:endParaRPr lang="en-US" sz="1700" dirty="0"/>
+          </a:p>
+        </p:txBody>
+      </p:sp>
+      <p:sp>
+        <p:nvSpPr>
+          <p:cNvPr id="6" name="Text 4"/>
+          <p:cNvSpPr/>
+          <p:nvPr/>
+        </p:nvSpPr>
+        <p:spPr>
+          <a:xfrm>
+            <a:off x="640080" y="1737360"/>
+            <a:ext cx="3703320" cy="1051560"/>
           </a:xfrm>
           <a:prstGeom prst="rect">
             <a:avLst/>
@@ -4798,11 +6267,11 @@
                 <a:solidFill>
                   <a:srgbClr val="1F2937"/>
                 </a:solidFill>
-                <a:latin typeface="Calibri" pitchFamily="34" charset="0"/>
-                <a:ea typeface="Calibri" pitchFamily="34" charset="-122"/>
-                <a:cs typeface="Calibri" pitchFamily="34" charset="-120"/>
-              </a:rPr>
-              <a:t>For unified streaming + batch flows. Lineage, autoscaling, retries from the framework.</a:t>
+                <a:latin typeface="Segoe UI" pitchFamily="34" charset="0"/>
+                <a:ea typeface="Segoe UI" pitchFamily="34" charset="-122"/>
+                <a:cs typeface="Segoe UI" pitchFamily="34" charset="-120"/>
+              </a:rPr>
+              <a:t>Unified streaming + batch. Lineage, autoscaling, retries from the framework. Inline expectations and apply_changes.</a:t>
             </a:r>
             <a:endParaRPr lang="en-US" sz="1300" dirty="0"/>
           </a:p>
@@ -4810,24 +6279,24 @@
       </p:sp>
       <p:sp>
         <p:nvSpPr>
-          <p:cNvPr id="6" name="Shape 4"/>
+          <p:cNvPr id="7" name="Shape 5"/>
           <p:cNvSpPr/>
           <p:nvPr/>
         </p:nvSpPr>
         <p:spPr>
           <a:xfrm>
             <a:off x="4709160" y="1097280"/>
-            <a:ext cx="4069080" cy="1874520"/>
+            <a:ext cx="4069080" cy="1828800"/>
           </a:xfrm>
           <a:prstGeom prst="roundRect">
             <a:avLst>
-              <a:gd name="adj" fmla="val 3902"/>
+              <a:gd name="adj" fmla="val 4000"/>
             </a:avLst>
           </a:prstGeom>
           <a:solidFill>
             <a:srgbClr val="F8FAFC"/>
           </a:solidFill>
-          <a:ln w="9525">
+          <a:ln w="12700">
             <a:solidFill>
               <a:srgbClr val="E5E7EB"/>
             </a:solidFill>
@@ -4837,13 +6306,33 @@
       </p:sp>
       <p:sp>
         <p:nvSpPr>
-          <p:cNvPr id="7" name="Text 5"/>
-          <p:cNvSpPr/>
-          <p:nvPr/>
-        </p:nvSpPr>
-        <p:spPr>
-          <a:xfrm>
-            <a:off x="4892040" y="1261872"/>
+          <p:cNvPr id="8" name="Shape 6"/>
+          <p:cNvSpPr/>
+          <p:nvPr/>
+        </p:nvSpPr>
+        <p:spPr>
+          <a:xfrm>
+            <a:off x="4709160" y="1097280"/>
+            <a:ext cx="4069080" cy="73152"/>
+          </a:xfrm>
+          <a:prstGeom prst="rect">
+            <a:avLst/>
+          </a:prstGeom>
+          <a:solidFill>
+            <a:srgbClr val="0F2A52"/>
+          </a:solidFill>
+          <a:ln/>
+        </p:spPr>
+      </p:sp>
+      <p:sp>
+        <p:nvSpPr>
+          <p:cNvPr id="9" name="Text 7"/>
+          <p:cNvSpPr/>
+          <p:nvPr/>
+        </p:nvSpPr>
+        <p:spPr>
+          <a:xfrm>
+            <a:off x="4892040" y="1298448"/>
             <a:ext cx="3703320" cy="365760"/>
           </a:xfrm>
           <a:prstGeom prst="rect">
@@ -4860,30 +6349,30 @@
               <a:buNone/>
             </a:pPr>
             <a:r>
-              <a:rPr lang="en-US" sz="1600" b="1" dirty="0">
+              <a:rPr lang="en-US" sz="1700" b="1" dirty="0">
                 <a:solidFill>
                   <a:srgbClr val="0F2A52"/>
                 </a:solidFill>
-                <a:latin typeface="Calibri" pitchFamily="34" charset="0"/>
-                <a:ea typeface="Calibri" pitchFamily="34" charset="-122"/>
-                <a:cs typeface="Calibri" pitchFamily="34" charset="-120"/>
+                <a:latin typeface="Segoe UI" pitchFamily="34" charset="0"/>
+                <a:ea typeface="Segoe UI" pitchFamily="34" charset="-122"/>
+                <a:cs typeface="Segoe UI" pitchFamily="34" charset="-120"/>
               </a:rPr>
               <a:t>Imperative — PySpark + PipelineRun</a:t>
             </a:r>
-            <a:endParaRPr lang="en-US" sz="1600" dirty="0"/>
-          </a:p>
-        </p:txBody>
-      </p:sp>
-      <p:sp>
-        <p:nvSpPr>
-          <p:cNvPr id="8" name="Text 6"/>
-          <p:cNvSpPr/>
-          <p:nvPr/>
-        </p:nvSpPr>
-        <p:spPr>
-          <a:xfrm>
-            <a:off x="4892040" y="1691640"/>
-            <a:ext cx="3703320" cy="1097280"/>
+            <a:endParaRPr lang="en-US" sz="1700" dirty="0"/>
+          </a:p>
+        </p:txBody>
+      </p:sp>
+      <p:sp>
+        <p:nvSpPr>
+          <p:cNvPr id="10" name="Text 8"/>
+          <p:cNvSpPr/>
+          <p:nvPr/>
+        </p:nvSpPr>
+        <p:spPr>
+          <a:xfrm>
+            <a:off x="4892040" y="1737360"/>
+            <a:ext cx="3703320" cy="1051560"/>
           </a:xfrm>
           <a:prstGeom prst="rect">
             <a:avLst/>
@@ -4903,11 +6392,11 @@
                 <a:solidFill>
                   <a:srgbClr val="1F2937"/>
                 </a:solidFill>
-                <a:latin typeface="Calibri" pitchFamily="34" charset="0"/>
-                <a:ea typeface="Calibri" pitchFamily="34" charset="-122"/>
-                <a:cs typeface="Calibri" pitchFamily="34" charset="-120"/>
-              </a:rPr>
-              <a:t>For SAP edge cases needing full PySpark control. PipelineRun chassis = lock + watermark + audit row.</a:t>
+                <a:latin typeface="Segoe UI" pitchFamily="34" charset="0"/>
+                <a:ea typeface="Segoe UI" pitchFamily="34" charset="-122"/>
+                <a:cs typeface="Segoe UI" pitchFamily="34" charset="-120"/>
+              </a:rPr>
+              <a:t>SAP edge cases needing full PySpark control. PipelineRun chassis = lock + watermark + structured audit row.</a:t>
             </a:r>
             <a:endParaRPr lang="en-US" sz="1300" dirty="0"/>
           </a:p>
@@ -4915,7 +6404,7 @@
       </p:sp>
       <p:sp>
         <p:nvSpPr>
-          <p:cNvPr id="9" name="Shape 7"/>
+          <p:cNvPr id="11" name="Shape 9"/>
           <p:cNvSpPr/>
           <p:nvPr/>
         </p:nvSpPr>
@@ -4937,7 +6426,7 @@
       </p:sp>
       <p:sp>
         <p:nvSpPr>
-          <p:cNvPr id="10" name="Shape 8"/>
+          <p:cNvPr id="12" name="Shape 10"/>
           <p:cNvSpPr/>
           <p:nvPr/>
         </p:nvSpPr>
@@ -4957,13 +6446,13 @@
       </p:sp>
       <p:sp>
         <p:nvSpPr>
-          <p:cNvPr id="11" name="Text 9"/>
-          <p:cNvSpPr/>
-          <p:nvPr/>
-        </p:nvSpPr>
-        <p:spPr>
-          <a:xfrm>
-            <a:off x="777240" y="3355848"/>
+          <p:cNvPr id="13" name="Text 11"/>
+          <p:cNvSpPr/>
+          <p:nvPr/>
+        </p:nvSpPr>
+        <p:spPr>
+          <a:xfrm>
+            <a:off x="777240" y="3383280"/>
             <a:ext cx="7772400" cy="274320"/>
           </a:xfrm>
           <a:prstGeom prst="rect">
@@ -4980,29 +6469,29 @@
               <a:buNone/>
             </a:pPr>
             <a:r>
-              <a:rPr lang="en-US" sz="1200" b="1" spc="200" kern="0" dirty="0">
+              <a:rPr lang="en-US" sz="1000" b="1" spc="400" kern="0" dirty="0">
                 <a:solidFill>
                   <a:srgbClr val="0078D4"/>
                 </a:solidFill>
-                <a:latin typeface="Calibri" pitchFamily="34" charset="0"/>
-                <a:ea typeface="Calibri" pitchFamily="34" charset="-122"/>
-                <a:cs typeface="Calibri" pitchFamily="34" charset="-120"/>
-              </a:rPr>
-              <a:t>Decision rule</a:t>
-            </a:r>
-            <a:endParaRPr lang="en-US" sz="1200" dirty="0"/>
-          </a:p>
-        </p:txBody>
-      </p:sp>
-      <p:sp>
-        <p:nvSpPr>
-          <p:cNvPr id="12" name="Text 10"/>
-          <p:cNvSpPr/>
-          <p:nvPr/>
-        </p:nvSpPr>
-        <p:spPr>
-          <a:xfrm>
-            <a:off x="777240" y="3630168"/>
+                <a:latin typeface="Segoe UI" pitchFamily="34" charset="0"/>
+                <a:ea typeface="Segoe UI" pitchFamily="34" charset="-122"/>
+                <a:cs typeface="Segoe UI" pitchFamily="34" charset="-120"/>
+              </a:rPr>
+              <a:t>DECISION RULE</a:t>
+            </a:r>
+            <a:endParaRPr lang="en-US" sz="1000" dirty="0"/>
+          </a:p>
+        </p:txBody>
+      </p:sp>
+      <p:sp>
+        <p:nvSpPr>
+          <p:cNvPr id="14" name="Text 12"/>
+          <p:cNvSpPr/>
+          <p:nvPr/>
+        </p:nvSpPr>
+        <p:spPr>
+          <a:xfrm>
+            <a:off x="777240" y="3657600"/>
             <a:ext cx="7772400" cy="457200"/>
           </a:xfrm>
           <a:prstGeom prst="rect">
@@ -5023,11 +6512,11 @@
                 <a:solidFill>
                   <a:srgbClr val="FFFFFF"/>
                 </a:solidFill>
-                <a:latin typeface="Calibri" pitchFamily="34" charset="0"/>
-                <a:ea typeface="Calibri" pitchFamily="34" charset="-122"/>
-                <a:cs typeface="Calibri" pitchFamily="34" charset="-120"/>
-              </a:rPr>
-              <a:t>Can this be expressed as @dlt.table + expects + apply_changes? If yes, write DLT. If no, write a notebook.</a:t>
+                <a:latin typeface="Segoe UI" pitchFamily="34" charset="0"/>
+                <a:ea typeface="Segoe UI" pitchFamily="34" charset="-122"/>
+                <a:cs typeface="Segoe UI" pitchFamily="34" charset="-120"/>
+              </a:rPr>
+              <a:t>Can this be expressed as @dlt.table + expects + apply_changes?  If yes → DLT.  If no → notebook.</a:t>
             </a:r>
             <a:endParaRPr lang="en-US" sz="1400" dirty="0"/>
           </a:p>
@@ -5035,7 +6524,7 @@
       </p:sp>
       <p:sp>
         <p:nvSpPr>
-          <p:cNvPr id="13" name="Text 11"/>
+          <p:cNvPr id="15" name="Text 13"/>
           <p:cNvSpPr/>
           <p:nvPr/>
         </p:nvSpPr>
@@ -5062,9 +6551,9 @@
                 <a:solidFill>
                   <a:srgbClr val="6B7280"/>
                 </a:solidFill>
-                <a:latin typeface="Calibri" pitchFamily="34" charset="0"/>
-                <a:ea typeface="Calibri" pitchFamily="34" charset="-122"/>
-                <a:cs typeface="Calibri" pitchFamily="34" charset="-120"/>
+                <a:latin typeface="Segoe UI" pitchFamily="34" charset="0"/>
+                <a:ea typeface="Segoe UI" pitchFamily="34" charset="-122"/>
+                <a:cs typeface="Segoe UI" pitchFamily="34" charset="-120"/>
               </a:rPr>
               <a:t>People10 Solutions Lab — Malappa</a:t>
             </a:r>
@@ -5074,7 +6563,7 @@
       </p:sp>
       <p:sp>
         <p:nvSpPr>
-          <p:cNvPr id="14" name="Text 12"/>
+          <p:cNvPr id="16" name="Text 14"/>
           <p:cNvSpPr/>
           <p:nvPr/>
         </p:nvSpPr>
@@ -5101,9 +6590,9 @@
                 <a:solidFill>
                   <a:srgbClr val="6B7280"/>
                 </a:solidFill>
-                <a:latin typeface="Calibri" pitchFamily="34" charset="0"/>
-                <a:ea typeface="Calibri" pitchFamily="34" charset="-122"/>
-                <a:cs typeface="Calibri" pitchFamily="34" charset="-120"/>
+                <a:latin typeface="Segoe UI" pitchFamily="34" charset="0"/>
+                <a:ea typeface="Segoe UI" pitchFamily="34" charset="-122"/>
+                <a:cs typeface="Segoe UI" pitchFamily="34" charset="-120"/>
               </a:rPr>
               <a:t>6 / 9</a:t>
             </a:r>
@@ -5172,9 +6661,9 @@
                 <a:solidFill>
                   <a:srgbClr val="0F2A52"/>
                 </a:solidFill>
-                <a:latin typeface="Calibri" pitchFamily="34" charset="0"/>
-                <a:ea typeface="Calibri" pitchFamily="34" charset="-122"/>
-                <a:cs typeface="Calibri" pitchFamily="34" charset="-120"/>
+                <a:latin typeface="Segoe UI" pitchFamily="34" charset="0"/>
+                <a:ea typeface="Segoe UI" pitchFamily="34" charset="-122"/>
+                <a:cs typeface="Segoe UI" pitchFamily="34" charset="-120"/>
               </a:rPr>
               <a:t>Production-readiness signals</a:t>
             </a:r>
@@ -5201,7 +6690,7 @@
           <a:solidFill>
             <a:srgbClr val="F8FAFC"/>
           </a:solidFill>
-          <a:ln w="9525">
+          <a:ln w="12700">
             <a:solidFill>
               <a:srgbClr val="E5E7EB"/>
             </a:solidFill>
@@ -5217,12 +6706,12 @@
         </p:nvSpPr>
         <p:spPr>
           <a:xfrm>
-            <a:off x="685800" y="1298448"/>
-            <a:ext cx="1280160" cy="329184"/>
+            <a:off x="685800" y="1325880"/>
+            <a:ext cx="502920" cy="502920"/>
           </a:xfrm>
           <a:prstGeom prst="roundRect">
             <a:avLst>
-              <a:gd name="adj" fmla="val 13889"/>
+              <a:gd name="adj" fmla="val 10909"/>
             </a:avLst>
           </a:prstGeom>
           <a:solidFill>
@@ -5231,55 +6720,79 @@
           <a:ln/>
         </p:spPr>
       </p:sp>
-      <p:sp>
-        <p:nvSpPr>
-          <p:cNvPr id="5" name="Text 3"/>
-          <p:cNvSpPr/>
-          <p:nvPr/>
-        </p:nvSpPr>
-        <p:spPr>
-          <a:xfrm>
-            <a:off x="685800" y="1298448"/>
-            <a:ext cx="1280160" cy="329184"/>
-          </a:xfrm>
-          <a:prstGeom prst="rect">
-            <a:avLst/>
-          </a:prstGeom>
-          <a:noFill/>
-          <a:ln/>
-        </p:spPr>
-        <p:txBody>
-          <a:bodyPr wrap="square" lIns="0" tIns="0" rIns="0" bIns="0" rtlCol="0" anchor="ctr"/>
-          <a:lstStyle/>
-          <a:p>
-            <a:pPr algn="ctr" indent="0" marL="0">
-              <a:buNone/>
-            </a:pPr>
-            <a:r>
-              <a:rPr lang="en-US" sz="1100" b="1" dirty="0">
-                <a:solidFill>
-                  <a:srgbClr val="FFFFFF"/>
-                </a:solidFill>
-                <a:latin typeface="Calibri" pitchFamily="34" charset="0"/>
-                <a:ea typeface="Calibri" pitchFamily="34" charset="-122"/>
-                <a:cs typeface="Calibri" pitchFamily="34" charset="-120"/>
+      <p:pic>
+        <p:nvPicPr>
+          <p:cNvPr id="5" name="Image 0" descr="preencoded.png">    </p:cNvPr>
+          <p:cNvPicPr>
+            <a:picLocks noChangeAspect="1"/>
+          </p:cNvPicPr>
+          <p:nvPr/>
+        </p:nvPicPr>
+        <p:blipFill>
+          <a:blip r:embed="rId1"/>
+          <a:stretch>
+            <a:fillRect/>
+          </a:stretch>
+        </p:blipFill>
+        <p:spPr>
+          <a:xfrm>
+            <a:off x="777240" y="1417320"/>
+            <a:ext cx="320040" cy="320040"/>
+          </a:xfrm>
+          <a:prstGeom prst="rect">
+            <a:avLst/>
+          </a:prstGeom>
+        </p:spPr>
+      </p:pic>
+      <p:sp>
+        <p:nvSpPr>
+          <p:cNvPr id="6" name="Text 3"/>
+          <p:cNvSpPr/>
+          <p:nvPr/>
+        </p:nvSpPr>
+        <p:spPr>
+          <a:xfrm>
+            <a:off x="1325880" y="1371600"/>
+            <a:ext cx="3063240" cy="411480"/>
+          </a:xfrm>
+          <a:prstGeom prst="rect">
+            <a:avLst/>
+          </a:prstGeom>
+          <a:noFill/>
+          <a:ln/>
+        </p:spPr>
+        <p:txBody>
+          <a:bodyPr wrap="square" lIns="0" tIns="0" rIns="0" bIns="0" rtlCol="0" anchor="ctr"/>
+          <a:lstStyle/>
+          <a:p>
+            <a:pPr indent="0" marL="0">
+              <a:buNone/>
+            </a:pPr>
+            <a:r>
+              <a:rPr lang="en-US" sz="1700" b="1" dirty="0">
+                <a:solidFill>
+                  <a:srgbClr val="0F2A52"/>
+                </a:solidFill>
+                <a:latin typeface="Segoe UI" pitchFamily="34" charset="0"/>
+                <a:ea typeface="Segoe UI" pitchFamily="34" charset="-122"/>
+                <a:cs typeface="Segoe UI" pitchFamily="34" charset="-120"/>
               </a:rPr>
               <a:t>Lineage</a:t>
             </a:r>
-            <a:endParaRPr lang="en-US" sz="1100" dirty="0"/>
-          </a:p>
-        </p:txBody>
-      </p:sp>
-      <p:sp>
-        <p:nvSpPr>
-          <p:cNvPr id="6" name="Text 4"/>
-          <p:cNvSpPr/>
-          <p:nvPr/>
-        </p:nvSpPr>
-        <p:spPr>
-          <a:xfrm>
-            <a:off x="685800" y="1737360"/>
-            <a:ext cx="3611880" cy="685800"/>
+            <a:endParaRPr lang="en-US" sz="1700" dirty="0"/>
+          </a:p>
+        </p:txBody>
+      </p:sp>
+      <p:sp>
+        <p:nvSpPr>
+          <p:cNvPr id="7" name="Text 4"/>
+          <p:cNvSpPr/>
+          <p:nvPr/>
+        </p:nvSpPr>
+        <p:spPr>
+          <a:xfrm>
+            <a:off x="685800" y="1938528"/>
+            <a:ext cx="3611880" cy="502920"/>
           </a:xfrm>
           <a:prstGeom prst="rect">
             <a:avLst/>
@@ -5295,23 +6808,23 @@
               <a:buNone/>
             </a:pPr>
             <a:r>
-              <a:rPr lang="en-US" sz="1300" dirty="0">
+              <a:rPr lang="en-US" sz="1250" dirty="0">
                 <a:solidFill>
                   <a:srgbClr val="1F2937"/>
                 </a:solidFill>
-                <a:latin typeface="Calibri" pitchFamily="34" charset="0"/>
-                <a:ea typeface="Calibri" pitchFamily="34" charset="-122"/>
-                <a:cs typeface="Calibri" pitchFamily="34" charset="-120"/>
+                <a:latin typeface="Segoe UI" pitchFamily="34" charset="0"/>
+                <a:ea typeface="Segoe UI" pitchFamily="34" charset="-122"/>
+                <a:cs typeface="Segoe UI" pitchFamily="34" charset="-120"/>
               </a:rPr>
               <a:t>Unity Catalog + Purview for AS9100-style audit trails.</a:t>
             </a:r>
-            <a:endParaRPr lang="en-US" sz="1300" dirty="0"/>
-          </a:p>
-        </p:txBody>
-      </p:sp>
-      <p:sp>
-        <p:nvSpPr>
-          <p:cNvPr id="7" name="Shape 5"/>
+            <a:endParaRPr lang="en-US" sz="1250" dirty="0"/>
+          </a:p>
+        </p:txBody>
+      </p:sp>
+      <p:sp>
+        <p:nvSpPr>
+          <p:cNvPr id="8" name="Shape 5"/>
           <p:cNvSpPr/>
           <p:nvPr/>
         </p:nvSpPr>
@@ -5328,7 +6841,7 @@
           <a:solidFill>
             <a:srgbClr val="F8FAFC"/>
           </a:solidFill>
-          <a:ln w="9525">
+          <a:ln w="12700">
             <a:solidFill>
               <a:srgbClr val="E5E7EB"/>
             </a:solidFill>
@@ -5338,18 +6851,18 @@
       </p:sp>
       <p:sp>
         <p:nvSpPr>
-          <p:cNvPr id="8" name="Shape 6"/>
-          <p:cNvSpPr/>
-          <p:nvPr/>
-        </p:nvSpPr>
-        <p:spPr>
-          <a:xfrm>
-            <a:off x="4937760" y="1298448"/>
-            <a:ext cx="1280160" cy="329184"/>
+          <p:cNvPr id="9" name="Shape 6"/>
+          <p:cNvSpPr/>
+          <p:nvPr/>
+        </p:nvSpPr>
+        <p:spPr>
+          <a:xfrm>
+            <a:off x="4937760" y="1325880"/>
+            <a:ext cx="502920" cy="502920"/>
           </a:xfrm>
           <a:prstGeom prst="roundRect">
             <a:avLst>
-              <a:gd name="adj" fmla="val 13889"/>
+              <a:gd name="adj" fmla="val 10909"/>
             </a:avLst>
           </a:prstGeom>
           <a:solidFill>
@@ -5358,55 +6871,79 @@
           <a:ln/>
         </p:spPr>
       </p:sp>
-      <p:sp>
-        <p:nvSpPr>
-          <p:cNvPr id="9" name="Text 7"/>
-          <p:cNvSpPr/>
-          <p:nvPr/>
-        </p:nvSpPr>
-        <p:spPr>
-          <a:xfrm>
-            <a:off x="4937760" y="1298448"/>
-            <a:ext cx="1280160" cy="329184"/>
-          </a:xfrm>
-          <a:prstGeom prst="rect">
-            <a:avLst/>
-          </a:prstGeom>
-          <a:noFill/>
-          <a:ln/>
-        </p:spPr>
-        <p:txBody>
-          <a:bodyPr wrap="square" lIns="0" tIns="0" rIns="0" bIns="0" rtlCol="0" anchor="ctr"/>
-          <a:lstStyle/>
-          <a:p>
-            <a:pPr algn="ctr" indent="0" marL="0">
-              <a:buNone/>
-            </a:pPr>
-            <a:r>
-              <a:rPr lang="en-US" sz="1100" b="1" dirty="0">
-                <a:solidFill>
-                  <a:srgbClr val="FFFFFF"/>
-                </a:solidFill>
-                <a:latin typeface="Calibri" pitchFamily="34" charset="0"/>
-                <a:ea typeface="Calibri" pitchFamily="34" charset="-122"/>
-                <a:cs typeface="Calibri" pitchFamily="34" charset="-120"/>
+      <p:pic>
+        <p:nvPicPr>
+          <p:cNvPr id="10" name="Image 1" descr="preencoded.png">    </p:cNvPr>
+          <p:cNvPicPr>
+            <a:picLocks noChangeAspect="1"/>
+          </p:cNvPicPr>
+          <p:nvPr/>
+        </p:nvPicPr>
+        <p:blipFill>
+          <a:blip r:embed="rId2"/>
+          <a:stretch>
+            <a:fillRect/>
+          </a:stretch>
+        </p:blipFill>
+        <p:spPr>
+          <a:xfrm>
+            <a:off x="5029200" y="1417320"/>
+            <a:ext cx="320040" cy="320040"/>
+          </a:xfrm>
+          <a:prstGeom prst="rect">
+            <a:avLst/>
+          </a:prstGeom>
+        </p:spPr>
+      </p:pic>
+      <p:sp>
+        <p:nvSpPr>
+          <p:cNvPr id="11" name="Text 7"/>
+          <p:cNvSpPr/>
+          <p:nvPr/>
+        </p:nvSpPr>
+        <p:spPr>
+          <a:xfrm>
+            <a:off x="5577840" y="1371600"/>
+            <a:ext cx="3063240" cy="411480"/>
+          </a:xfrm>
+          <a:prstGeom prst="rect">
+            <a:avLst/>
+          </a:prstGeom>
+          <a:noFill/>
+          <a:ln/>
+        </p:spPr>
+        <p:txBody>
+          <a:bodyPr wrap="square" lIns="0" tIns="0" rIns="0" bIns="0" rtlCol="0" anchor="ctr"/>
+          <a:lstStyle/>
+          <a:p>
+            <a:pPr indent="0" marL="0">
+              <a:buNone/>
+            </a:pPr>
+            <a:r>
+              <a:rPr lang="en-US" sz="1700" b="1" dirty="0">
+                <a:solidFill>
+                  <a:srgbClr val="0F2A52"/>
+                </a:solidFill>
+                <a:latin typeface="Segoe UI" pitchFamily="34" charset="0"/>
+                <a:ea typeface="Segoe UI" pitchFamily="34" charset="-122"/>
+                <a:cs typeface="Segoe UI" pitchFamily="34" charset="-120"/>
               </a:rPr>
               <a:t>Security</a:t>
             </a:r>
-            <a:endParaRPr lang="en-US" sz="1100" dirty="0"/>
-          </a:p>
-        </p:txBody>
-      </p:sp>
-      <p:sp>
-        <p:nvSpPr>
-          <p:cNvPr id="10" name="Text 8"/>
-          <p:cNvSpPr/>
-          <p:nvPr/>
-        </p:nvSpPr>
-        <p:spPr>
-          <a:xfrm>
-            <a:off x="4937760" y="1737360"/>
-            <a:ext cx="3611880" cy="685800"/>
+            <a:endParaRPr lang="en-US" sz="1700" dirty="0"/>
+          </a:p>
+        </p:txBody>
+      </p:sp>
+      <p:sp>
+        <p:nvSpPr>
+          <p:cNvPr id="12" name="Text 8"/>
+          <p:cNvSpPr/>
+          <p:nvPr/>
+        </p:nvSpPr>
+        <p:spPr>
+          <a:xfrm>
+            <a:off x="4937760" y="1938528"/>
+            <a:ext cx="3611880" cy="502920"/>
           </a:xfrm>
           <a:prstGeom prst="rect">
             <a:avLst/>
@@ -5422,23 +6959,23 @@
               <a:buNone/>
             </a:pPr>
             <a:r>
-              <a:rPr lang="en-US" sz="1300" dirty="0">
+              <a:rPr lang="en-US" sz="1250" dirty="0">
                 <a:solidFill>
                   <a:srgbClr val="1F2937"/>
                 </a:solidFill>
-                <a:latin typeface="Calibri" pitchFamily="34" charset="0"/>
-                <a:ea typeface="Calibri" pitchFamily="34" charset="-122"/>
-                <a:cs typeface="Calibri" pitchFamily="34" charset="-120"/>
+                <a:latin typeface="Segoe UI" pitchFamily="34" charset="0"/>
+                <a:ea typeface="Segoe UI" pitchFamily="34" charset="-122"/>
+                <a:cs typeface="Segoe UI" pitchFamily="34" charset="-120"/>
               </a:rPr>
               <a:t>Managed identities · CMK from Key Vault · Private Endpoints · RLS in Synapse.</a:t>
             </a:r>
-            <a:endParaRPr lang="en-US" sz="1300" dirty="0"/>
-          </a:p>
-        </p:txBody>
-      </p:sp>
-      <p:sp>
-        <p:nvSpPr>
-          <p:cNvPr id="11" name="Shape 9"/>
+            <a:endParaRPr lang="en-US" sz="1250" dirty="0"/>
+          </a:p>
+        </p:txBody>
+      </p:sp>
+      <p:sp>
+        <p:nvSpPr>
+          <p:cNvPr id="13" name="Shape 9"/>
           <p:cNvSpPr/>
           <p:nvPr/>
         </p:nvSpPr>
@@ -5455,7 +6992,7 @@
           <a:solidFill>
             <a:srgbClr val="F8FAFC"/>
           </a:solidFill>
-          <a:ln w="9525">
+          <a:ln w="12700">
             <a:solidFill>
               <a:srgbClr val="E5E7EB"/>
             </a:solidFill>
@@ -5465,18 +7002,18 @@
       </p:sp>
       <p:sp>
         <p:nvSpPr>
-          <p:cNvPr id="12" name="Shape 10"/>
-          <p:cNvSpPr/>
-          <p:nvPr/>
-        </p:nvSpPr>
-        <p:spPr>
-          <a:xfrm>
-            <a:off x="685800" y="2944368"/>
-            <a:ext cx="1280160" cy="329184"/>
+          <p:cNvPr id="14" name="Shape 10"/>
+          <p:cNvSpPr/>
+          <p:nvPr/>
+        </p:nvSpPr>
+        <p:spPr>
+          <a:xfrm>
+            <a:off x="685800" y="2971800"/>
+            <a:ext cx="502920" cy="502920"/>
           </a:xfrm>
           <a:prstGeom prst="roundRect">
             <a:avLst>
-              <a:gd name="adj" fmla="val 13889"/>
+              <a:gd name="adj" fmla="val 10909"/>
             </a:avLst>
           </a:prstGeom>
           <a:solidFill>
@@ -5485,55 +7022,79 @@
           <a:ln/>
         </p:spPr>
       </p:sp>
-      <p:sp>
-        <p:nvSpPr>
-          <p:cNvPr id="13" name="Text 11"/>
-          <p:cNvSpPr/>
-          <p:nvPr/>
-        </p:nvSpPr>
-        <p:spPr>
-          <a:xfrm>
-            <a:off x="685800" y="2944368"/>
-            <a:ext cx="1280160" cy="329184"/>
-          </a:xfrm>
-          <a:prstGeom prst="rect">
-            <a:avLst/>
-          </a:prstGeom>
-          <a:noFill/>
-          <a:ln/>
-        </p:spPr>
-        <p:txBody>
-          <a:bodyPr wrap="square" lIns="0" tIns="0" rIns="0" bIns="0" rtlCol="0" anchor="ctr"/>
-          <a:lstStyle/>
-          <a:p>
-            <a:pPr algn="ctr" indent="0" marL="0">
-              <a:buNone/>
-            </a:pPr>
-            <a:r>
-              <a:rPr lang="en-US" sz="1100" b="1" dirty="0">
-                <a:solidFill>
-                  <a:srgbClr val="FFFFFF"/>
-                </a:solidFill>
-                <a:latin typeface="Calibri" pitchFamily="34" charset="0"/>
-                <a:ea typeface="Calibri" pitchFamily="34" charset="-122"/>
-                <a:cs typeface="Calibri" pitchFamily="34" charset="-120"/>
+      <p:pic>
+        <p:nvPicPr>
+          <p:cNvPr id="15" name="Image 2" descr="preencoded.png">    </p:cNvPr>
+          <p:cNvPicPr>
+            <a:picLocks noChangeAspect="1"/>
+          </p:cNvPicPr>
+          <p:nvPr/>
+        </p:nvPicPr>
+        <p:blipFill>
+          <a:blip r:embed="rId3"/>
+          <a:stretch>
+            <a:fillRect/>
+          </a:stretch>
+        </p:blipFill>
+        <p:spPr>
+          <a:xfrm>
+            <a:off x="777240" y="3063240"/>
+            <a:ext cx="320040" cy="320040"/>
+          </a:xfrm>
+          <a:prstGeom prst="rect">
+            <a:avLst/>
+          </a:prstGeom>
+        </p:spPr>
+      </p:pic>
+      <p:sp>
+        <p:nvSpPr>
+          <p:cNvPr id="16" name="Text 11"/>
+          <p:cNvSpPr/>
+          <p:nvPr/>
+        </p:nvSpPr>
+        <p:spPr>
+          <a:xfrm>
+            <a:off x="1325880" y="3017520"/>
+            <a:ext cx="3063240" cy="411480"/>
+          </a:xfrm>
+          <a:prstGeom prst="rect">
+            <a:avLst/>
+          </a:prstGeom>
+          <a:noFill/>
+          <a:ln/>
+        </p:spPr>
+        <p:txBody>
+          <a:bodyPr wrap="square" lIns="0" tIns="0" rIns="0" bIns="0" rtlCol="0" anchor="ctr"/>
+          <a:lstStyle/>
+          <a:p>
+            <a:pPr indent="0" marL="0">
+              <a:buNone/>
+            </a:pPr>
+            <a:r>
+              <a:rPr lang="en-US" sz="1700" b="1" dirty="0">
+                <a:solidFill>
+                  <a:srgbClr val="0F2A52"/>
+                </a:solidFill>
+                <a:latin typeface="Segoe UI" pitchFamily="34" charset="0"/>
+                <a:ea typeface="Segoe UI" pitchFamily="34" charset="-122"/>
+                <a:cs typeface="Segoe UI" pitchFamily="34" charset="-120"/>
               </a:rPr>
               <a:t>CI/CD</a:t>
             </a:r>
-            <a:endParaRPr lang="en-US" sz="1100" dirty="0"/>
-          </a:p>
-        </p:txBody>
-      </p:sp>
-      <p:sp>
-        <p:nvSpPr>
-          <p:cNvPr id="14" name="Text 12"/>
-          <p:cNvSpPr/>
-          <p:nvPr/>
-        </p:nvSpPr>
-        <p:spPr>
-          <a:xfrm>
-            <a:off x="685800" y="3383280"/>
-            <a:ext cx="3611880" cy="685800"/>
+            <a:endParaRPr lang="en-US" sz="1700" dirty="0"/>
+          </a:p>
+        </p:txBody>
+      </p:sp>
+      <p:sp>
+        <p:nvSpPr>
+          <p:cNvPr id="17" name="Text 12"/>
+          <p:cNvSpPr/>
+          <p:nvPr/>
+        </p:nvSpPr>
+        <p:spPr>
+          <a:xfrm>
+            <a:off x="685800" y="3584448"/>
+            <a:ext cx="3611880" cy="502920"/>
           </a:xfrm>
           <a:prstGeom prst="rect">
             <a:avLst/>
@@ -5549,23 +7110,23 @@
               <a:buNone/>
             </a:pPr>
             <a:r>
-              <a:rPr lang="en-US" sz="1300" dirty="0">
+              <a:rPr lang="en-US" sz="1250" dirty="0">
                 <a:solidFill>
                   <a:srgbClr val="1F2937"/>
                 </a:solidFill>
-                <a:latin typeface="Calibri" pitchFamily="34" charset="0"/>
-                <a:ea typeface="Calibri" pitchFamily="34" charset="-122"/>
-                <a:cs typeface="Calibri" pitchFamily="34" charset="-120"/>
+                <a:latin typeface="Segoe UI" pitchFamily="34" charset="0"/>
+                <a:ea typeface="Segoe UI" pitchFamily="34" charset="-122"/>
+                <a:cs typeface="Segoe UI" pitchFamily="34" charset="-120"/>
               </a:rPr>
               <a:t>GitHub Actions: ruff + pytest (cov ≥ 80%) + terraform validate + checkov + gitleaks.</a:t>
             </a:r>
-            <a:endParaRPr lang="en-US" sz="1300" dirty="0"/>
-          </a:p>
-        </p:txBody>
-      </p:sp>
-      <p:sp>
-        <p:nvSpPr>
-          <p:cNvPr id="15" name="Shape 13"/>
+            <a:endParaRPr lang="en-US" sz="1250" dirty="0"/>
+          </a:p>
+        </p:txBody>
+      </p:sp>
+      <p:sp>
+        <p:nvSpPr>
+          <p:cNvPr id="18" name="Shape 13"/>
           <p:cNvSpPr/>
           <p:nvPr/>
         </p:nvSpPr>
@@ -5582,7 +7143,7 @@
           <a:solidFill>
             <a:srgbClr val="F8FAFC"/>
           </a:solidFill>
-          <a:ln w="9525">
+          <a:ln w="12700">
             <a:solidFill>
               <a:srgbClr val="E5E7EB"/>
             </a:solidFill>
@@ -5592,18 +7153,18 @@
       </p:sp>
       <p:sp>
         <p:nvSpPr>
-          <p:cNvPr id="16" name="Shape 14"/>
-          <p:cNvSpPr/>
-          <p:nvPr/>
-        </p:nvSpPr>
-        <p:spPr>
-          <a:xfrm>
-            <a:off x="4937760" y="2944368"/>
-            <a:ext cx="1280160" cy="329184"/>
+          <p:cNvPr id="19" name="Shape 14"/>
+          <p:cNvSpPr/>
+          <p:nvPr/>
+        </p:nvSpPr>
+        <p:spPr>
+          <a:xfrm>
+            <a:off x="4937760" y="2971800"/>
+            <a:ext cx="502920" cy="502920"/>
           </a:xfrm>
           <a:prstGeom prst="roundRect">
             <a:avLst>
-              <a:gd name="adj" fmla="val 13889"/>
+              <a:gd name="adj" fmla="val 10909"/>
             </a:avLst>
           </a:prstGeom>
           <a:solidFill>
@@ -5612,55 +7173,79 @@
           <a:ln/>
         </p:spPr>
       </p:sp>
-      <p:sp>
-        <p:nvSpPr>
-          <p:cNvPr id="17" name="Text 15"/>
-          <p:cNvSpPr/>
-          <p:nvPr/>
-        </p:nvSpPr>
-        <p:spPr>
-          <a:xfrm>
-            <a:off x="4937760" y="2944368"/>
-            <a:ext cx="1280160" cy="329184"/>
-          </a:xfrm>
-          <a:prstGeom prst="rect">
-            <a:avLst/>
-          </a:prstGeom>
-          <a:noFill/>
-          <a:ln/>
-        </p:spPr>
-        <p:txBody>
-          <a:bodyPr wrap="square" lIns="0" tIns="0" rIns="0" bIns="0" rtlCol="0" anchor="ctr"/>
-          <a:lstStyle/>
-          <a:p>
-            <a:pPr algn="ctr" indent="0" marL="0">
-              <a:buNone/>
-            </a:pPr>
-            <a:r>
-              <a:rPr lang="en-US" sz="1100" b="1" dirty="0">
-                <a:solidFill>
-                  <a:srgbClr val="FFFFFF"/>
-                </a:solidFill>
-                <a:latin typeface="Calibri" pitchFamily="34" charset="0"/>
-                <a:ea typeface="Calibri" pitchFamily="34" charset="-122"/>
-                <a:cs typeface="Calibri" pitchFamily="34" charset="-120"/>
+      <p:pic>
+        <p:nvPicPr>
+          <p:cNvPr id="20" name="Image 3" descr="preencoded.png">    </p:cNvPr>
+          <p:cNvPicPr>
+            <a:picLocks noChangeAspect="1"/>
+          </p:cNvPicPr>
+          <p:nvPr/>
+        </p:nvPicPr>
+        <p:blipFill>
+          <a:blip r:embed="rId4"/>
+          <a:stretch>
+            <a:fillRect/>
+          </a:stretch>
+        </p:blipFill>
+        <p:spPr>
+          <a:xfrm>
+            <a:off x="5029200" y="3063240"/>
+            <a:ext cx="320040" cy="320040"/>
+          </a:xfrm>
+          <a:prstGeom prst="rect">
+            <a:avLst/>
+          </a:prstGeom>
+        </p:spPr>
+      </p:pic>
+      <p:sp>
+        <p:nvSpPr>
+          <p:cNvPr id="21" name="Text 15"/>
+          <p:cNvSpPr/>
+          <p:nvPr/>
+        </p:nvSpPr>
+        <p:spPr>
+          <a:xfrm>
+            <a:off x="5577840" y="3017520"/>
+            <a:ext cx="3063240" cy="411480"/>
+          </a:xfrm>
+          <a:prstGeom prst="rect">
+            <a:avLst/>
+          </a:prstGeom>
+          <a:noFill/>
+          <a:ln/>
+        </p:spPr>
+        <p:txBody>
+          <a:bodyPr wrap="square" lIns="0" tIns="0" rIns="0" bIns="0" rtlCol="0" anchor="ctr"/>
+          <a:lstStyle/>
+          <a:p>
+            <a:pPr indent="0" marL="0">
+              <a:buNone/>
+            </a:pPr>
+            <a:r>
+              <a:rPr lang="en-US" sz="1700" b="1" dirty="0">
+                <a:solidFill>
+                  <a:srgbClr val="0F2A52"/>
+                </a:solidFill>
+                <a:latin typeface="Segoe UI" pitchFamily="34" charset="0"/>
+                <a:ea typeface="Segoe UI" pitchFamily="34" charset="-122"/>
+                <a:cs typeface="Segoe UI" pitchFamily="34" charset="-120"/>
               </a:rPr>
               <a:t>Cost levers</a:t>
             </a:r>
-            <a:endParaRPr lang="en-US" sz="1100" dirty="0"/>
-          </a:p>
-        </p:txBody>
-      </p:sp>
-      <p:sp>
-        <p:nvSpPr>
-          <p:cNvPr id="18" name="Text 16"/>
-          <p:cNvSpPr/>
-          <p:nvPr/>
-        </p:nvSpPr>
-        <p:spPr>
-          <a:xfrm>
-            <a:off x="4937760" y="3383280"/>
-            <a:ext cx="3611880" cy="685800"/>
+            <a:endParaRPr lang="en-US" sz="1700" dirty="0"/>
+          </a:p>
+        </p:txBody>
+      </p:sp>
+      <p:sp>
+        <p:nvSpPr>
+          <p:cNvPr id="22" name="Text 16"/>
+          <p:cNvSpPr/>
+          <p:nvPr/>
+        </p:nvSpPr>
+        <p:spPr>
+          <a:xfrm>
+            <a:off x="4937760" y="3584448"/>
+            <a:ext cx="3611880" cy="502920"/>
           </a:xfrm>
           <a:prstGeom prst="rect">
             <a:avLst/>
@@ -5676,23 +7261,23 @@
               <a:buNone/>
             </a:pPr>
             <a:r>
-              <a:rPr lang="en-US" sz="1300" dirty="0">
+              <a:rPr lang="en-US" sz="1250" dirty="0">
                 <a:solidFill>
                   <a:srgbClr val="1F2937"/>
                 </a:solidFill>
-                <a:latin typeface="Calibri" pitchFamily="34" charset="0"/>
-                <a:ea typeface="Calibri" pitchFamily="34" charset="-122"/>
-                <a:cs typeface="Calibri" pitchFamily="34" charset="-120"/>
+                <a:latin typeface="Segoe UI" pitchFamily="34" charset="0"/>
+                <a:ea typeface="Segoe UI" pitchFamily="34" charset="-122"/>
+                <a:cs typeface="Segoe UI" pitchFamily="34" charset="-120"/>
               </a:rPr>
               <a:t>ADLS lifecycle · Synapse pause schedule · Photon · spot workers · Serverless for ad-hoc.</a:t>
             </a:r>
-            <a:endParaRPr lang="en-US" sz="1300" dirty="0"/>
-          </a:p>
-        </p:txBody>
-      </p:sp>
-      <p:sp>
-        <p:nvSpPr>
-          <p:cNvPr id="19" name="Text 17"/>
+            <a:endParaRPr lang="en-US" sz="1250" dirty="0"/>
+          </a:p>
+        </p:txBody>
+      </p:sp>
+      <p:sp>
+        <p:nvSpPr>
+          <p:cNvPr id="23" name="Text 17"/>
           <p:cNvSpPr/>
           <p:nvPr/>
         </p:nvSpPr>
@@ -5719,9 +7304,9 @@
                 <a:solidFill>
                   <a:srgbClr val="6B7280"/>
                 </a:solidFill>
-                <a:latin typeface="Calibri" pitchFamily="34" charset="0"/>
-                <a:ea typeface="Calibri" pitchFamily="34" charset="-122"/>
-                <a:cs typeface="Calibri" pitchFamily="34" charset="-120"/>
+                <a:latin typeface="Segoe UI" pitchFamily="34" charset="0"/>
+                <a:ea typeface="Segoe UI" pitchFamily="34" charset="-122"/>
+                <a:cs typeface="Segoe UI" pitchFamily="34" charset="-120"/>
               </a:rPr>
               <a:t>People10 Solutions Lab — Malappa</a:t>
             </a:r>
@@ -5731,7 +7316,7 @@
       </p:sp>
       <p:sp>
         <p:nvSpPr>
-          <p:cNvPr id="20" name="Text 18"/>
+          <p:cNvPr id="24" name="Text 18"/>
           <p:cNvSpPr/>
           <p:nvPr/>
         </p:nvSpPr>
@@ -5758,9 +7343,9 @@
                 <a:solidFill>
                   <a:srgbClr val="6B7280"/>
                 </a:solidFill>
-                <a:latin typeface="Calibri" pitchFamily="34" charset="0"/>
-                <a:ea typeface="Calibri" pitchFamily="34" charset="-122"/>
-                <a:cs typeface="Calibri" pitchFamily="34" charset="-120"/>
+                <a:latin typeface="Segoe UI" pitchFamily="34" charset="0"/>
+                <a:ea typeface="Segoe UI" pitchFamily="34" charset="-122"/>
+                <a:cs typeface="Segoe UI" pitchFamily="34" charset="-120"/>
               </a:rPr>
               <a:t>7 / 9</a:t>
             </a:r>
@@ -5829,9 +7414,9 @@
                 <a:solidFill>
                   <a:srgbClr val="0F2A52"/>
                 </a:solidFill>
-                <a:latin typeface="Calibri" pitchFamily="34" charset="0"/>
-                <a:ea typeface="Calibri" pitchFamily="34" charset="-122"/>
-                <a:cs typeface="Calibri" pitchFamily="34" charset="-120"/>
+                <a:latin typeface="Segoe UI" pitchFamily="34" charset="0"/>
+                <a:ea typeface="Segoe UI" pitchFamily="34" charset="-122"/>
+                <a:cs typeface="Segoe UI" pitchFamily="34" charset="-120"/>
               </a:rPr>
               <a:t>Trade-offs · what I'd do next</a:t>
             </a:r>
@@ -5888,9 +7473,9 @@
                 <a:solidFill>
                   <a:srgbClr val="FFFFFF"/>
                 </a:solidFill>
-                <a:latin typeface="Calibri" pitchFamily="34" charset="0"/>
-                <a:ea typeface="Calibri" pitchFamily="34" charset="-122"/>
-                <a:cs typeface="Calibri" pitchFamily="34" charset="-120"/>
+                <a:latin typeface="Segoe UI" pitchFamily="34" charset="0"/>
+                <a:ea typeface="Segoe UI" pitchFamily="34" charset="-122"/>
+                <a:cs typeface="Segoe UI" pitchFamily="34" charset="-120"/>
               </a:rPr>
               <a:t>1</a:t>
             </a:r>
@@ -5923,17 +7508,17 @@
               <a:buNone/>
             </a:pPr>
             <a:r>
-              <a:rPr lang="en-US" sz="1800" b="1" dirty="0">
+              <a:rPr lang="en-US" sz="1700" b="1" dirty="0">
                 <a:solidFill>
                   <a:srgbClr val="0F2A52"/>
                 </a:solidFill>
-                <a:latin typeface="Calibri" pitchFamily="34" charset="0"/>
-                <a:ea typeface="Calibri" pitchFamily="34" charset="-122"/>
-                <a:cs typeface="Calibri" pitchFamily="34" charset="-120"/>
-              </a:rPr>
-              <a:t>Dual-pattern is deliberate</a:t>
-            </a:r>
-            <a:endParaRPr lang="en-US" sz="1800" dirty="0"/>
+                <a:latin typeface="Segoe UI" pitchFamily="34" charset="0"/>
+                <a:ea typeface="Segoe UI" pitchFamily="34" charset="-122"/>
+                <a:cs typeface="Segoe UI" pitchFamily="34" charset="-120"/>
+              </a:rPr>
+              <a:t>Dual-pattern is a deliberate choice</a:t>
+            </a:r>
+            <a:endParaRPr lang="en-US" sz="1700" dirty="0"/>
           </a:p>
         </p:txBody>
       </p:sp>
@@ -5946,7 +7531,7 @@
         <p:spPr>
           <a:xfrm>
             <a:off x="1280160" y="1463040"/>
-            <a:ext cx="7406640" cy="594360"/>
+            <a:ext cx="7406640" cy="640080"/>
           </a:xfrm>
           <a:prstGeom prst="rect">
             <a:avLst/>
@@ -5966,11 +7551,11 @@
                 <a:solidFill>
                   <a:srgbClr val="1F2937"/>
                 </a:solidFill>
-                <a:latin typeface="Calibri" pitchFamily="34" charset="0"/>
-                <a:ea typeface="Calibri" pitchFamily="34" charset="-122"/>
-                <a:cs typeface="Calibri" pitchFamily="34" charset="-120"/>
-              </a:rPr>
-              <a:t>DLT + imperative kept on purpose to show pattern judgment. In production I'd consolidate to DLT once the team is comfortable.</a:t>
+                <a:latin typeface="Segoe UI" pitchFamily="34" charset="0"/>
+                <a:ea typeface="Segoe UI" pitchFamily="34" charset="-122"/>
+                <a:cs typeface="Segoe UI" pitchFamily="34" charset="-120"/>
+              </a:rPr>
+              <a:t>DLT + imperative kept on purpose to show pattern judgment. In production I'd consolidate to DLT once the team has internalised the framework — keep PySpark only for genuine SAP edge cases.</a:t>
             </a:r>
             <a:endParaRPr lang="en-US" sz="1300" dirty="0"/>
           </a:p>
@@ -6025,9 +7610,9 @@
                 <a:solidFill>
                   <a:srgbClr val="FFFFFF"/>
                 </a:solidFill>
-                <a:latin typeface="Calibri" pitchFamily="34" charset="0"/>
-                <a:ea typeface="Calibri" pitchFamily="34" charset="-122"/>
-                <a:cs typeface="Calibri" pitchFamily="34" charset="-120"/>
+                <a:latin typeface="Segoe UI" pitchFamily="34" charset="0"/>
+                <a:ea typeface="Segoe UI" pitchFamily="34" charset="-122"/>
+                <a:cs typeface="Segoe UI" pitchFamily="34" charset="-120"/>
               </a:rPr>
               <a:t>2</a:t>
             </a:r>
@@ -6060,17 +7645,17 @@
               <a:buNone/>
             </a:pPr>
             <a:r>
-              <a:rPr lang="en-US" sz="1800" b="1" dirty="0">
+              <a:rPr lang="en-US" sz="1700" b="1" dirty="0">
                 <a:solidFill>
                   <a:srgbClr val="0F2A52"/>
                 </a:solidFill>
-                <a:latin typeface="Calibri" pitchFamily="34" charset="0"/>
-                <a:ea typeface="Calibri" pitchFamily="34" charset="-122"/>
-                <a:cs typeface="Calibri" pitchFamily="34" charset="-120"/>
+                <a:latin typeface="Segoe UI" pitchFamily="34" charset="0"/>
+                <a:ea typeface="Segoe UI" pitchFamily="34" charset="-122"/>
+                <a:cs typeface="Segoe UI" pitchFamily="34" charset="-120"/>
               </a:rPr>
               <a:t>Honest gaps</a:t>
             </a:r>
-            <a:endParaRPr lang="en-US" sz="1800" dirty="0"/>
+            <a:endParaRPr lang="en-US" sz="1700" dirty="0"/>
           </a:p>
         </p:txBody>
       </p:sp>
@@ -6083,7 +7668,7 @@
         <p:spPr>
           <a:xfrm>
             <a:off x="1280160" y="2514600"/>
-            <a:ext cx="7406640" cy="594360"/>
+            <a:ext cx="7406640" cy="640080"/>
           </a:xfrm>
           <a:prstGeom prst="rect">
             <a:avLst/>
@@ -6103,11 +7688,11 @@
                 <a:solidFill>
                   <a:srgbClr val="1F2937"/>
                 </a:solidFill>
-                <a:latin typeface="Calibri" pitchFamily="34" charset="0"/>
-                <a:ea typeface="Calibri" pitchFamily="34" charset="-122"/>
-                <a:cs typeface="Calibri" pitchFamily="34" charset="-120"/>
-              </a:rPr>
-              <a:t>Cosmos online feature store · full networking · real Synapse end-to-end · Purview scan config. All listed in TODO.md.</a:t>
+                <a:latin typeface="Segoe UI" pitchFamily="34" charset="0"/>
+                <a:ea typeface="Segoe UI" pitchFamily="34" charset="-122"/>
+                <a:cs typeface="Segoe UI" pitchFamily="34" charset="-120"/>
+              </a:rPr>
+              <a:t>Cosmos online feature store (designed, not provisioned) · full networking module · real Synapse end-to-end run · Purview scan config. All listed in TODO.md with effort estimates.</a:t>
             </a:r>
             <a:endParaRPr lang="en-US" sz="1300" dirty="0"/>
           </a:p>
@@ -6162,9 +7747,9 @@
                 <a:solidFill>
                   <a:srgbClr val="FFFFFF"/>
                 </a:solidFill>
-                <a:latin typeface="Calibri" pitchFamily="34" charset="0"/>
-                <a:ea typeface="Calibri" pitchFamily="34" charset="-122"/>
-                <a:cs typeface="Calibri" pitchFamily="34" charset="-120"/>
+                <a:latin typeface="Segoe UI" pitchFamily="34" charset="0"/>
+                <a:ea typeface="Segoe UI" pitchFamily="34" charset="-122"/>
+                <a:cs typeface="Segoe UI" pitchFamily="34" charset="-120"/>
               </a:rPr>
               <a:t>3</a:t>
             </a:r>
@@ -6197,17 +7782,17 @@
               <a:buNone/>
             </a:pPr>
             <a:r>
-              <a:rPr lang="en-US" sz="1800" b="1" dirty="0">
+              <a:rPr lang="en-US" sz="1700" b="1" dirty="0">
                 <a:solidFill>
                   <a:srgbClr val="0F2A52"/>
                 </a:solidFill>
-                <a:latin typeface="Calibri" pitchFamily="34" charset="0"/>
-                <a:ea typeface="Calibri" pitchFamily="34" charset="-122"/>
-                <a:cs typeface="Calibri" pitchFamily="34" charset="-120"/>
+                <a:latin typeface="Segoe UI" pitchFamily="34" charset="0"/>
+                <a:ea typeface="Segoe UI" pitchFamily="34" charset="-122"/>
+                <a:cs typeface="Segoe UI" pitchFamily="34" charset="-120"/>
               </a:rPr>
               <a:t>Things I'm uncertain about</a:t>
             </a:r>
-            <a:endParaRPr lang="en-US" sz="1800" dirty="0"/>
+            <a:endParaRPr lang="en-US" sz="1700" dirty="0"/>
           </a:p>
         </p:txBody>
       </p:sp>
@@ -6220,7 +7805,7 @@
         <p:spPr>
           <a:xfrm>
             <a:off x="1280160" y="3566160"/>
-            <a:ext cx="7406640" cy="594360"/>
+            <a:ext cx="7406640" cy="640080"/>
           </a:xfrm>
           <a:prstGeom prst="rect">
             <a:avLst/>
@@ -6240,11 +7825,11 @@
                 <a:solidFill>
                   <a:srgbClr val="1F2937"/>
                 </a:solidFill>
-                <a:latin typeface="Calibri" pitchFamily="34" charset="0"/>
-                <a:ea typeface="Calibri" pitchFamily="34" charset="-122"/>
-                <a:cs typeface="Calibri" pitchFamily="34" charset="-120"/>
-              </a:rPr>
-              <a:t>Wrote them up in TODO.md. Would genuinely like a second opinion from the panel.</a:t>
+                <a:latin typeface="Segoe UI" pitchFamily="34" charset="0"/>
+                <a:ea typeface="Segoe UI" pitchFamily="34" charset="-122"/>
+                <a:cs typeface="Segoe UI" pitchFamily="34" charset="-120"/>
+              </a:rPr>
+              <a:t>Whether 32 Event Hubs partitions is right at the cost we'd actually run at. Whether apply_changes plays well with the audit chassis. Whether to retire the imperative path entirely. Would genuinely like a panel opinion.</a:t>
             </a:r>
             <a:endParaRPr lang="en-US" sz="1300" dirty="0"/>
           </a:p>
@@ -6279,9 +7864,9 @@
                 <a:solidFill>
                   <a:srgbClr val="6B7280"/>
                 </a:solidFill>
-                <a:latin typeface="Calibri" pitchFamily="34" charset="0"/>
-                <a:ea typeface="Calibri" pitchFamily="34" charset="-122"/>
-                <a:cs typeface="Calibri" pitchFamily="34" charset="-120"/>
+                <a:latin typeface="Segoe UI" pitchFamily="34" charset="0"/>
+                <a:ea typeface="Segoe UI" pitchFamily="34" charset="-122"/>
+                <a:cs typeface="Segoe UI" pitchFamily="34" charset="-120"/>
               </a:rPr>
               <a:t>People10 Solutions Lab — Malappa</a:t>
             </a:r>
@@ -6318,9 +7903,9 @@
                 <a:solidFill>
                   <a:srgbClr val="6B7280"/>
                 </a:solidFill>
-                <a:latin typeface="Calibri" pitchFamily="34" charset="0"/>
-                <a:ea typeface="Calibri" pitchFamily="34" charset="-122"/>
-                <a:cs typeface="Calibri" pitchFamily="34" charset="-120"/>
+                <a:latin typeface="Segoe UI" pitchFamily="34" charset="0"/>
+                <a:ea typeface="Segoe UI" pitchFamily="34" charset="-122"/>
+                <a:cs typeface="Segoe UI" pitchFamily="34" charset="-120"/>
               </a:rPr>
               <a:t>8 / 9</a:t>
             </a:r>
@@ -6342,7 +7927,7 @@
     <p:bg>
       <p:bgPr>
         <a:solidFill>
-          <a:srgbClr val="0F2A52"/>
+          <a:srgbClr val="0A1F3D"/>
         </a:solidFill>
       </p:bgPr>
     </p:bg>
@@ -6405,23 +7990,43 @@
               <a:buNone/>
             </a:pPr>
             <a:r>
-              <a:rPr lang="en-US" sz="5600" b="1" dirty="0">
+              <a:rPr lang="en-US" sz="6000" b="1" dirty="0">
                 <a:solidFill>
                   <a:srgbClr val="FFFFFF"/>
                 </a:solidFill>
-                <a:latin typeface="Calibri" pitchFamily="34" charset="0"/>
-                <a:ea typeface="Calibri" pitchFamily="34" charset="-122"/>
-                <a:cs typeface="Calibri" pitchFamily="34" charset="-120"/>
+                <a:latin typeface="Segoe UI" pitchFamily="34" charset="0"/>
+                <a:ea typeface="Segoe UI" pitchFamily="34" charset="-122"/>
+                <a:cs typeface="Segoe UI" pitchFamily="34" charset="-120"/>
               </a:rPr>
               <a:t>Questions?</a:t>
             </a:r>
-            <a:endParaRPr lang="en-US" sz="5600" dirty="0"/>
-          </a:p>
-        </p:txBody>
-      </p:sp>
-      <p:sp>
-        <p:nvSpPr>
-          <p:cNvPr id="4" name="Text 2"/>
+            <a:endParaRPr lang="en-US" sz="6000" dirty="0"/>
+          </a:p>
+        </p:txBody>
+      </p:sp>
+      <p:sp>
+        <p:nvSpPr>
+          <p:cNvPr id="4" name="Shape 2"/>
+          <p:cNvSpPr/>
+          <p:nvPr/>
+        </p:nvSpPr>
+        <p:spPr>
+          <a:xfrm>
+            <a:off x="4206240" y="2788920"/>
+            <a:ext cx="731520" cy="45720"/>
+          </a:xfrm>
+          <a:prstGeom prst="rect">
+            <a:avLst/>
+          </a:prstGeom>
+          <a:solidFill>
+            <a:srgbClr val="0078D4"/>
+          </a:solidFill>
+          <a:ln/>
+        </p:spPr>
+      </p:sp>
+      <p:sp>
+        <p:nvSpPr>
+          <p:cNvPr id="5" name="Text 3"/>
           <p:cNvSpPr/>
           <p:nvPr/>
         </p:nvSpPr>
@@ -6446,11 +8051,11 @@
             <a:r>
               <a:rPr lang="en-US" sz="1600" i="1" dirty="0">
                 <a:solidFill>
-                  <a:srgbClr val="CFE3F8"/>
-                </a:solidFill>
-                <a:latin typeface="Calibri" pitchFamily="34" charset="0"/>
-                <a:ea typeface="Calibri" pitchFamily="34" charset="-122"/>
-                <a:cs typeface="Calibri" pitchFamily="34" charset="-120"/>
+                  <a:srgbClr val="DEECF9"/>
+                </a:solidFill>
+                <a:latin typeface="Segoe UI" pitchFamily="34" charset="0"/>
+                <a:ea typeface="Segoe UI" pitchFamily="34" charset="-122"/>
+                <a:cs typeface="Segoe UI" pitchFamily="34" charset="-120"/>
               </a:rPr>
               <a:t>I'd most welcome a question on why I kept both DLT and imperative notebooks — that's the part I'm most curious to get a second opinion on.</a:t>
             </a:r>
@@ -6460,7 +8065,7 @@
       </p:sp>
       <p:sp>
         <p:nvSpPr>
-          <p:cNvPr id="5" name="Text 3"/>
+          <p:cNvPr id="6" name="Text 4"/>
           <p:cNvSpPr/>
           <p:nvPr/>
         </p:nvSpPr>
@@ -6487,9 +8092,9 @@
                 <a:solidFill>
                   <a:srgbClr val="8FB6DA"/>
                 </a:solidFill>
-                <a:latin typeface="Calibri" pitchFamily="34" charset="0"/>
-                <a:ea typeface="Calibri" pitchFamily="34" charset="-122"/>
-                <a:cs typeface="Calibri" pitchFamily="34" charset="-120"/>
+                <a:latin typeface="Segoe UI" pitchFamily="34" charset="0"/>
+                <a:ea typeface="Segoe UI" pitchFamily="34" charset="-122"/>
+                <a:cs typeface="Segoe UI" pitchFamily="34" charset="-120"/>
               </a:rPr>
               <a:t>People10 Solutions Lab — Malappa</a:t>
             </a:r>
@@ -6499,7 +8104,7 @@
       </p:sp>
       <p:sp>
         <p:nvSpPr>
-          <p:cNvPr id="6" name="Text 4"/>
+          <p:cNvPr id="7" name="Text 5"/>
           <p:cNvSpPr/>
           <p:nvPr/>
         </p:nvSpPr>
@@ -6526,9 +8131,9 @@
                 <a:solidFill>
                   <a:srgbClr val="8FB6DA"/>
                 </a:solidFill>
-                <a:latin typeface="Calibri" pitchFamily="34" charset="0"/>
-                <a:ea typeface="Calibri" pitchFamily="34" charset="-122"/>
-                <a:cs typeface="Calibri" pitchFamily="34" charset="-120"/>
+                <a:latin typeface="Segoe UI" pitchFamily="34" charset="0"/>
+                <a:ea typeface="Segoe UI" pitchFamily="34" charset="-122"/>
+                <a:cs typeface="Segoe UI" pitchFamily="34" charset="-120"/>
               </a:rPr>
               <a:t>9 / 9</a:t>
             </a:r>
